--- a/docs/삼국 약식 체스.pptx
+++ b/docs/삼국 약식 체스.pptx
@@ -215,7 +215,7 @@
           <a:p>
             <a:fld id="{B4F07136-05B9-4084-83BF-56E9BCCDA6F9}" type="datetimeFigureOut">
               <a:rPr lang="ko-KR" altLang="en-US" smtClean="0"/>
-              <a:t>2026-07-25</a:t>
+              <a:t>2026-07-31</a:t>
             </a:fld>
             <a:endParaRPr lang="ko-KR" altLang="en-US"/>
           </a:p>
@@ -1253,7 +1253,7 @@
           <a:p>
             <a:fld id="{7612FBA5-57BE-4E0D-B9AB-8FA0886BAC02}" type="datetimeFigureOut">
               <a:rPr lang="ko-KR" altLang="en-US" smtClean="0"/>
-              <a:t>2026-07-25</a:t>
+              <a:t>2026-07-31</a:t>
             </a:fld>
             <a:endParaRPr lang="ko-KR" altLang="en-US"/>
           </a:p>
@@ -1451,7 +1451,7 @@
           <a:p>
             <a:fld id="{7612FBA5-57BE-4E0D-B9AB-8FA0886BAC02}" type="datetimeFigureOut">
               <a:rPr lang="ko-KR" altLang="en-US" smtClean="0"/>
-              <a:t>2026-07-25</a:t>
+              <a:t>2026-07-31</a:t>
             </a:fld>
             <a:endParaRPr lang="ko-KR" altLang="en-US"/>
           </a:p>
@@ -1659,7 +1659,7 @@
           <a:p>
             <a:fld id="{7612FBA5-57BE-4E0D-B9AB-8FA0886BAC02}" type="datetimeFigureOut">
               <a:rPr lang="ko-KR" altLang="en-US" smtClean="0"/>
-              <a:t>2026-07-25</a:t>
+              <a:t>2026-07-31</a:t>
             </a:fld>
             <a:endParaRPr lang="ko-KR" altLang="en-US"/>
           </a:p>
@@ -1857,7 +1857,7 @@
           <a:p>
             <a:fld id="{7612FBA5-57BE-4E0D-B9AB-8FA0886BAC02}" type="datetimeFigureOut">
               <a:rPr lang="ko-KR" altLang="en-US" smtClean="0"/>
-              <a:t>2026-07-25</a:t>
+              <a:t>2026-07-31</a:t>
             </a:fld>
             <a:endParaRPr lang="ko-KR" altLang="en-US"/>
           </a:p>
@@ -2132,7 +2132,7 @@
           <a:p>
             <a:fld id="{7612FBA5-57BE-4E0D-B9AB-8FA0886BAC02}" type="datetimeFigureOut">
               <a:rPr lang="ko-KR" altLang="en-US" smtClean="0"/>
-              <a:t>2026-07-25</a:t>
+              <a:t>2026-07-31</a:t>
             </a:fld>
             <a:endParaRPr lang="ko-KR" altLang="en-US"/>
           </a:p>
@@ -2397,7 +2397,7 @@
           <a:p>
             <a:fld id="{7612FBA5-57BE-4E0D-B9AB-8FA0886BAC02}" type="datetimeFigureOut">
               <a:rPr lang="ko-KR" altLang="en-US" smtClean="0"/>
-              <a:t>2026-07-25</a:t>
+              <a:t>2026-07-31</a:t>
             </a:fld>
             <a:endParaRPr lang="ko-KR" altLang="en-US"/>
           </a:p>
@@ -2809,7 +2809,7 @@
           <a:p>
             <a:fld id="{7612FBA5-57BE-4E0D-B9AB-8FA0886BAC02}" type="datetimeFigureOut">
               <a:rPr lang="ko-KR" altLang="en-US" smtClean="0"/>
-              <a:t>2026-07-25</a:t>
+              <a:t>2026-07-31</a:t>
             </a:fld>
             <a:endParaRPr lang="ko-KR" altLang="en-US"/>
           </a:p>
@@ -2950,7 +2950,7 @@
           <a:p>
             <a:fld id="{7612FBA5-57BE-4E0D-B9AB-8FA0886BAC02}" type="datetimeFigureOut">
               <a:rPr lang="ko-KR" altLang="en-US" smtClean="0"/>
-              <a:t>2026-07-25</a:t>
+              <a:t>2026-07-31</a:t>
             </a:fld>
             <a:endParaRPr lang="ko-KR" altLang="en-US"/>
           </a:p>
@@ -3063,7 +3063,7 @@
           <a:p>
             <a:fld id="{7612FBA5-57BE-4E0D-B9AB-8FA0886BAC02}" type="datetimeFigureOut">
               <a:rPr lang="ko-KR" altLang="en-US" smtClean="0"/>
-              <a:t>2026-07-25</a:t>
+              <a:t>2026-07-31</a:t>
             </a:fld>
             <a:endParaRPr lang="ko-KR" altLang="en-US"/>
           </a:p>
@@ -3374,7 +3374,7 @@
           <a:p>
             <a:fld id="{7612FBA5-57BE-4E0D-B9AB-8FA0886BAC02}" type="datetimeFigureOut">
               <a:rPr lang="ko-KR" altLang="en-US" smtClean="0"/>
-              <a:t>2026-07-25</a:t>
+              <a:t>2026-07-31</a:t>
             </a:fld>
             <a:endParaRPr lang="ko-KR" altLang="en-US"/>
           </a:p>
@@ -3662,7 +3662,7 @@
           <a:p>
             <a:fld id="{7612FBA5-57BE-4E0D-B9AB-8FA0886BAC02}" type="datetimeFigureOut">
               <a:rPr lang="ko-KR" altLang="en-US" smtClean="0"/>
-              <a:t>2026-07-25</a:t>
+              <a:t>2026-07-31</a:t>
             </a:fld>
             <a:endParaRPr lang="ko-KR" altLang="en-US"/>
           </a:p>
@@ -3903,7 +3903,7 @@
           <a:p>
             <a:fld id="{7612FBA5-57BE-4E0D-B9AB-8FA0886BAC02}" type="datetimeFigureOut">
               <a:rPr lang="ko-KR" altLang="en-US" smtClean="0"/>
-              <a:t>2026-07-25</a:t>
+              <a:t>2026-07-31</a:t>
             </a:fld>
             <a:endParaRPr lang="ko-KR" altLang="en-US"/>
           </a:p>
@@ -5407,7 +5407,7 @@
           <p:nvPr>
             <p:extLst>
               <p:ext uri="{D42A27DB-BD31-4B8C-83A1-F6EECF244321}">
-                <p14:modId xmlns:p14="http://schemas.microsoft.com/office/powerpoint/2010/main" val="889577301"/>
+                <p14:modId xmlns:p14="http://schemas.microsoft.com/office/powerpoint/2010/main" val="2015751262"/>
               </p:ext>
             </p:extLst>
           </p:nvPr>
@@ -5841,12 +5841,18 @@
                         <a:buNone/>
                       </a:pPr>
                       <a:r>
-                        <a:rPr lang="ko-KR" sz="1400" u="none" strike="noStrike">
+                        <a:rPr lang="en-US" altLang="ko-KR" sz="1400" u="none" strike="noStrike" dirty="0">
                           <a:effectLst/>
                         </a:rPr>
-                        <a:t>8방향 1칸</a:t>
+                        <a:t>4</a:t>
                       </a:r>
-                      <a:endParaRPr lang="ko-KR" sz="1400" b="0" i="0" u="none" strike="noStrike">
+                      <a:r>
+                        <a:rPr lang="ko-KR" sz="1400" u="none" strike="noStrike" dirty="0">
+                          <a:effectLst/>
+                        </a:rPr>
+                        <a:t>방향 1칸</a:t>
+                      </a:r>
+                      <a:endParaRPr lang="ko-KR" sz="1400" b="0" i="0" u="none" strike="noStrike" dirty="0">
                         <a:solidFill>
                           <a:srgbClr val="000000"/>
                         </a:solidFill>
@@ -11379,7 +11385,7 @@
         <p:spPr>
           <a:xfrm>
             <a:off x="1013638" y="1059959"/>
-            <a:ext cx="9480191" cy="4193777"/>
+            <a:ext cx="9480191" cy="4609275"/>
           </a:xfrm>
           <a:prstGeom prst="rect">
             <a:avLst/>
@@ -11571,6 +11577,45 @@
                 <a:sym typeface="Wingdings" panose="05000000000000000000" pitchFamily="2" charset="2"/>
               </a:rPr>
               <a:t>]) %</a:t>
+            </a:r>
+          </a:p>
+          <a:p>
+            <a:pPr marL="285750" indent="-285750">
+              <a:lnSpc>
+                <a:spcPct val="150000"/>
+              </a:lnSpc>
+              <a:buFont typeface="Arial" panose="020B0604020202020204" pitchFamily="34" charset="0"/>
+              <a:buChar char="•"/>
+            </a:pPr>
+            <a:r>
+              <a:rPr lang="ko-KR" altLang="en-US" dirty="0">
+                <a:sym typeface="Wingdings" panose="05000000000000000000" pitchFamily="2" charset="2"/>
+              </a:rPr>
+              <a:t>통솔력</a:t>
+            </a:r>
+            <a:r>
+              <a:rPr lang="en-US" altLang="ko-KR" dirty="0">
+                <a:sym typeface="Wingdings" panose="05000000000000000000" pitchFamily="2" charset="2"/>
+              </a:rPr>
+              <a:t>: Waiting time </a:t>
+            </a:r>
+            <a:r>
+              <a:rPr lang="ko-KR" altLang="en-US" dirty="0">
+                <a:sym typeface="Wingdings" panose="05000000000000000000" pitchFamily="2" charset="2"/>
+              </a:rPr>
+              <a:t>에 영향 </a:t>
+            </a:r>
+            <a:r>
+              <a:rPr lang="en-US" altLang="ko-KR" dirty="0">
+                <a:sym typeface="Wingdings" panose="05000000000000000000" pitchFamily="2" charset="2"/>
+              </a:rPr>
+              <a:t> Waiting time = 190 - </a:t>
+            </a:r>
+            <a:r>
+              <a:rPr lang="ko-KR" altLang="en-US" dirty="0">
+                <a:sym typeface="Wingdings" panose="05000000000000000000" pitchFamily="2" charset="2"/>
+              </a:rPr>
+              <a:t>통솔력</a:t>
             </a:r>
             <a:endParaRPr lang="en-US" altLang="ko-KR" dirty="0"/>
           </a:p>

--- a/docs/삼국 약식 체스.pptx
+++ b/docs/삼국 약식 체스.pptx
@@ -215,7 +215,7 @@
           <a:p>
             <a:fld id="{B4F07136-05B9-4084-83BF-56E9BCCDA6F9}" type="datetimeFigureOut">
               <a:rPr lang="ko-KR" altLang="en-US" smtClean="0"/>
-              <a:t>2026-07-31</a:t>
+              <a:t>2026-08-03</a:t>
             </a:fld>
             <a:endParaRPr lang="ko-KR" altLang="en-US"/>
           </a:p>
@@ -1253,7 +1253,7 @@
           <a:p>
             <a:fld id="{7612FBA5-57BE-4E0D-B9AB-8FA0886BAC02}" type="datetimeFigureOut">
               <a:rPr lang="ko-KR" altLang="en-US" smtClean="0"/>
-              <a:t>2026-07-31</a:t>
+              <a:t>2026-08-03</a:t>
             </a:fld>
             <a:endParaRPr lang="ko-KR" altLang="en-US"/>
           </a:p>
@@ -1451,7 +1451,7 @@
           <a:p>
             <a:fld id="{7612FBA5-57BE-4E0D-B9AB-8FA0886BAC02}" type="datetimeFigureOut">
               <a:rPr lang="ko-KR" altLang="en-US" smtClean="0"/>
-              <a:t>2026-07-31</a:t>
+              <a:t>2026-08-03</a:t>
             </a:fld>
             <a:endParaRPr lang="ko-KR" altLang="en-US"/>
           </a:p>
@@ -1659,7 +1659,7 @@
           <a:p>
             <a:fld id="{7612FBA5-57BE-4E0D-B9AB-8FA0886BAC02}" type="datetimeFigureOut">
               <a:rPr lang="ko-KR" altLang="en-US" smtClean="0"/>
-              <a:t>2026-07-31</a:t>
+              <a:t>2026-08-03</a:t>
             </a:fld>
             <a:endParaRPr lang="ko-KR" altLang="en-US"/>
           </a:p>
@@ -1857,7 +1857,7 @@
           <a:p>
             <a:fld id="{7612FBA5-57BE-4E0D-B9AB-8FA0886BAC02}" type="datetimeFigureOut">
               <a:rPr lang="ko-KR" altLang="en-US" smtClean="0"/>
-              <a:t>2026-07-31</a:t>
+              <a:t>2026-08-03</a:t>
             </a:fld>
             <a:endParaRPr lang="ko-KR" altLang="en-US"/>
           </a:p>
@@ -2132,7 +2132,7 @@
           <a:p>
             <a:fld id="{7612FBA5-57BE-4E0D-B9AB-8FA0886BAC02}" type="datetimeFigureOut">
               <a:rPr lang="ko-KR" altLang="en-US" smtClean="0"/>
-              <a:t>2026-07-31</a:t>
+              <a:t>2026-08-03</a:t>
             </a:fld>
             <a:endParaRPr lang="ko-KR" altLang="en-US"/>
           </a:p>
@@ -2397,7 +2397,7 @@
           <a:p>
             <a:fld id="{7612FBA5-57BE-4E0D-B9AB-8FA0886BAC02}" type="datetimeFigureOut">
               <a:rPr lang="ko-KR" altLang="en-US" smtClean="0"/>
-              <a:t>2026-07-31</a:t>
+              <a:t>2026-08-03</a:t>
             </a:fld>
             <a:endParaRPr lang="ko-KR" altLang="en-US"/>
           </a:p>
@@ -2809,7 +2809,7 @@
           <a:p>
             <a:fld id="{7612FBA5-57BE-4E0D-B9AB-8FA0886BAC02}" type="datetimeFigureOut">
               <a:rPr lang="ko-KR" altLang="en-US" smtClean="0"/>
-              <a:t>2026-07-31</a:t>
+              <a:t>2026-08-03</a:t>
             </a:fld>
             <a:endParaRPr lang="ko-KR" altLang="en-US"/>
           </a:p>
@@ -2950,7 +2950,7 @@
           <a:p>
             <a:fld id="{7612FBA5-57BE-4E0D-B9AB-8FA0886BAC02}" type="datetimeFigureOut">
               <a:rPr lang="ko-KR" altLang="en-US" smtClean="0"/>
-              <a:t>2026-07-31</a:t>
+              <a:t>2026-08-03</a:t>
             </a:fld>
             <a:endParaRPr lang="ko-KR" altLang="en-US"/>
           </a:p>
@@ -3063,7 +3063,7 @@
           <a:p>
             <a:fld id="{7612FBA5-57BE-4E0D-B9AB-8FA0886BAC02}" type="datetimeFigureOut">
               <a:rPr lang="ko-KR" altLang="en-US" smtClean="0"/>
-              <a:t>2026-07-31</a:t>
+              <a:t>2026-08-03</a:t>
             </a:fld>
             <a:endParaRPr lang="ko-KR" altLang="en-US"/>
           </a:p>
@@ -3374,7 +3374,7 @@
           <a:p>
             <a:fld id="{7612FBA5-57BE-4E0D-B9AB-8FA0886BAC02}" type="datetimeFigureOut">
               <a:rPr lang="ko-KR" altLang="en-US" smtClean="0"/>
-              <a:t>2026-07-31</a:t>
+              <a:t>2026-08-03</a:t>
             </a:fld>
             <a:endParaRPr lang="ko-KR" altLang="en-US"/>
           </a:p>
@@ -3662,7 +3662,7 @@
           <a:p>
             <a:fld id="{7612FBA5-57BE-4E0D-B9AB-8FA0886BAC02}" type="datetimeFigureOut">
               <a:rPr lang="ko-KR" altLang="en-US" smtClean="0"/>
-              <a:t>2026-07-31</a:t>
+              <a:t>2026-08-03</a:t>
             </a:fld>
             <a:endParaRPr lang="ko-KR" altLang="en-US"/>
           </a:p>
@@ -3903,7 +3903,7 @@
           <a:p>
             <a:fld id="{7612FBA5-57BE-4E0D-B9AB-8FA0886BAC02}" type="datetimeFigureOut">
               <a:rPr lang="ko-KR" altLang="en-US" smtClean="0"/>
-              <a:t>2026-07-31</a:t>
+              <a:t>2026-08-03</a:t>
             </a:fld>
             <a:endParaRPr lang="ko-KR" altLang="en-US"/>
           </a:p>

--- a/docs/삼국 약식 체스.pptx
+++ b/docs/삼국 약식 체스.pptx
@@ -5,7 +5,7 @@
     <p:sldMasterId id="2147483648" r:id="rId1"/>
   </p:sldMasterIdLst>
   <p:notesMasterIdLst>
-    <p:notesMasterId r:id="rId21"/>
+    <p:notesMasterId r:id="rId27"/>
   </p:notesMasterIdLst>
   <p:sldIdLst>
     <p:sldId id="256" r:id="rId2"/>
@@ -27,6 +27,12 @@
     <p:sldId id="273" r:id="rId18"/>
     <p:sldId id="274" r:id="rId19"/>
     <p:sldId id="275" r:id="rId20"/>
+    <p:sldId id="276" r:id="rId21"/>
+    <p:sldId id="278" r:id="rId22"/>
+    <p:sldId id="279" r:id="rId23"/>
+    <p:sldId id="281" r:id="rId24"/>
+    <p:sldId id="282" r:id="rId25"/>
+    <p:sldId id="283" r:id="rId26"/>
   </p:sldIdLst>
   <p:sldSz cx="12192000" cy="6858000"/>
   <p:notesSz cx="6858000" cy="9144000"/>
@@ -215,7 +221,7 @@
           <a:p>
             <a:fld id="{B4F07136-05B9-4084-83BF-56E9BCCDA6F9}" type="datetimeFigureOut">
               <a:rPr lang="ko-KR" altLang="en-US" smtClean="0"/>
-              <a:t>2026-08-03</a:t>
+              <a:t>2026-08-04</a:t>
             </a:fld>
             <a:endParaRPr lang="ko-KR" altLang="en-US"/>
           </a:p>
@@ -1253,7 +1259,7 @@
           <a:p>
             <a:fld id="{7612FBA5-57BE-4E0D-B9AB-8FA0886BAC02}" type="datetimeFigureOut">
               <a:rPr lang="ko-KR" altLang="en-US" smtClean="0"/>
-              <a:t>2026-08-03</a:t>
+              <a:t>2026-08-04</a:t>
             </a:fld>
             <a:endParaRPr lang="ko-KR" altLang="en-US"/>
           </a:p>
@@ -1451,7 +1457,7 @@
           <a:p>
             <a:fld id="{7612FBA5-57BE-4E0D-B9AB-8FA0886BAC02}" type="datetimeFigureOut">
               <a:rPr lang="ko-KR" altLang="en-US" smtClean="0"/>
-              <a:t>2026-08-03</a:t>
+              <a:t>2026-08-04</a:t>
             </a:fld>
             <a:endParaRPr lang="ko-KR" altLang="en-US"/>
           </a:p>
@@ -1659,7 +1665,7 @@
           <a:p>
             <a:fld id="{7612FBA5-57BE-4E0D-B9AB-8FA0886BAC02}" type="datetimeFigureOut">
               <a:rPr lang="ko-KR" altLang="en-US" smtClean="0"/>
-              <a:t>2026-08-03</a:t>
+              <a:t>2026-08-04</a:t>
             </a:fld>
             <a:endParaRPr lang="ko-KR" altLang="en-US"/>
           </a:p>
@@ -1857,7 +1863,7 @@
           <a:p>
             <a:fld id="{7612FBA5-57BE-4E0D-B9AB-8FA0886BAC02}" type="datetimeFigureOut">
               <a:rPr lang="ko-KR" altLang="en-US" smtClean="0"/>
-              <a:t>2026-08-03</a:t>
+              <a:t>2026-08-04</a:t>
             </a:fld>
             <a:endParaRPr lang="ko-KR" altLang="en-US"/>
           </a:p>
@@ -2132,7 +2138,7 @@
           <a:p>
             <a:fld id="{7612FBA5-57BE-4E0D-B9AB-8FA0886BAC02}" type="datetimeFigureOut">
               <a:rPr lang="ko-KR" altLang="en-US" smtClean="0"/>
-              <a:t>2026-08-03</a:t>
+              <a:t>2026-08-04</a:t>
             </a:fld>
             <a:endParaRPr lang="ko-KR" altLang="en-US"/>
           </a:p>
@@ -2397,7 +2403,7 @@
           <a:p>
             <a:fld id="{7612FBA5-57BE-4E0D-B9AB-8FA0886BAC02}" type="datetimeFigureOut">
               <a:rPr lang="ko-KR" altLang="en-US" smtClean="0"/>
-              <a:t>2026-08-03</a:t>
+              <a:t>2026-08-04</a:t>
             </a:fld>
             <a:endParaRPr lang="ko-KR" altLang="en-US"/>
           </a:p>
@@ -2809,7 +2815,7 @@
           <a:p>
             <a:fld id="{7612FBA5-57BE-4E0D-B9AB-8FA0886BAC02}" type="datetimeFigureOut">
               <a:rPr lang="ko-KR" altLang="en-US" smtClean="0"/>
-              <a:t>2026-08-03</a:t>
+              <a:t>2026-08-04</a:t>
             </a:fld>
             <a:endParaRPr lang="ko-KR" altLang="en-US"/>
           </a:p>
@@ -2950,7 +2956,7 @@
           <a:p>
             <a:fld id="{7612FBA5-57BE-4E0D-B9AB-8FA0886BAC02}" type="datetimeFigureOut">
               <a:rPr lang="ko-KR" altLang="en-US" smtClean="0"/>
-              <a:t>2026-08-03</a:t>
+              <a:t>2026-08-04</a:t>
             </a:fld>
             <a:endParaRPr lang="ko-KR" altLang="en-US"/>
           </a:p>
@@ -3063,7 +3069,7 @@
           <a:p>
             <a:fld id="{7612FBA5-57BE-4E0D-B9AB-8FA0886BAC02}" type="datetimeFigureOut">
               <a:rPr lang="ko-KR" altLang="en-US" smtClean="0"/>
-              <a:t>2026-08-03</a:t>
+              <a:t>2026-08-04</a:t>
             </a:fld>
             <a:endParaRPr lang="ko-KR" altLang="en-US"/>
           </a:p>
@@ -3374,7 +3380,7 @@
           <a:p>
             <a:fld id="{7612FBA5-57BE-4E0D-B9AB-8FA0886BAC02}" type="datetimeFigureOut">
               <a:rPr lang="ko-KR" altLang="en-US" smtClean="0"/>
-              <a:t>2026-08-03</a:t>
+              <a:t>2026-08-04</a:t>
             </a:fld>
             <a:endParaRPr lang="ko-KR" altLang="en-US"/>
           </a:p>
@@ -3662,7 +3668,7 @@
           <a:p>
             <a:fld id="{7612FBA5-57BE-4E0D-B9AB-8FA0886BAC02}" type="datetimeFigureOut">
               <a:rPr lang="ko-KR" altLang="en-US" smtClean="0"/>
-              <a:t>2026-08-03</a:t>
+              <a:t>2026-08-04</a:t>
             </a:fld>
             <a:endParaRPr lang="ko-KR" altLang="en-US"/>
           </a:p>
@@ -3903,7 +3909,7 @@
           <a:p>
             <a:fld id="{7612FBA5-57BE-4E0D-B9AB-8FA0886BAC02}" type="datetimeFigureOut">
               <a:rPr lang="ko-KR" altLang="en-US" smtClean="0"/>
-              <a:t>2026-08-03</a:t>
+              <a:t>2026-08-04</a:t>
             </a:fld>
             <a:endParaRPr lang="ko-KR" altLang="en-US"/>
           </a:p>
@@ -15016,6 +15022,6171 @@
 </p:sld>
 </file>
 
+<file path=ppt/slides/slide20.xml><?xml version="1.0" encoding="utf-8"?>
+<p:sld xmlns:a="http://schemas.openxmlformats.org/drawingml/2006/main" xmlns:r="http://schemas.openxmlformats.org/officeDocument/2006/relationships" xmlns:p="http://schemas.openxmlformats.org/presentationml/2006/main">
+  <p:cSld>
+    <p:spTree>
+      <p:nvGrpSpPr>
+        <p:cNvPr id="1" name="">
+          <a:extLst>
+            <a:ext uri="{FF2B5EF4-FFF2-40B4-BE49-F238E27FC236}">
+              <a16:creationId xmlns:a16="http://schemas.microsoft.com/office/drawing/2014/main" id="{C4FEA9B8-E696-A43B-A5EC-D137F681B2AF}"/>
+            </a:ext>
+          </a:extLst>
+        </p:cNvPr>
+        <p:cNvGrpSpPr/>
+        <p:nvPr/>
+      </p:nvGrpSpPr>
+      <p:grpSpPr>
+        <a:xfrm>
+          <a:off x="0" y="0"/>
+          <a:ext cx="0" cy="0"/>
+          <a:chOff x="0" y="0"/>
+          <a:chExt cx="0" cy="0"/>
+        </a:xfrm>
+      </p:grpSpPr>
+      <p:sp>
+        <p:nvSpPr>
+          <p:cNvPr id="2" name="제목 1">
+            <a:extLst>
+              <a:ext uri="{FF2B5EF4-FFF2-40B4-BE49-F238E27FC236}">
+                <a16:creationId xmlns:a16="http://schemas.microsoft.com/office/drawing/2014/main" id="{D8ECFFFB-484D-BABE-8516-C4E0327C0C5B}"/>
+              </a:ext>
+            </a:extLst>
+          </p:cNvPr>
+          <p:cNvSpPr>
+            <a:spLocks noGrp="1"/>
+          </p:cNvSpPr>
+          <p:nvPr>
+            <p:ph type="ctrTitle"/>
+          </p:nvPr>
+        </p:nvSpPr>
+        <p:spPr>
+          <a:xfrm>
+            <a:off x="1524000" y="2235200"/>
+            <a:ext cx="9144000" cy="2387600"/>
+          </a:xfrm>
+        </p:spPr>
+        <p:txBody>
+          <a:bodyPr>
+            <a:normAutofit fontScale="90000"/>
+          </a:bodyPr>
+          <a:lstStyle/>
+          <a:p>
+            <a:r>
+              <a:rPr lang="en-US" altLang="ko-KR" dirty="0"/>
+              <a:t>UI update</a:t>
+            </a:r>
+            <a:br>
+              <a:rPr lang="en-US" altLang="ko-KR" dirty="0"/>
+            </a:br>
+            <a:br>
+              <a:rPr lang="en-US" altLang="ko-KR" dirty="0"/>
+            </a:br>
+            <a:r>
+              <a:rPr lang="en-US" altLang="ko-KR" dirty="0"/>
+              <a:t>260804-</a:t>
+            </a:r>
+            <a:endParaRPr lang="ko-KR" altLang="en-US" dirty="0"/>
+          </a:p>
+        </p:txBody>
+      </p:sp>
+    </p:spTree>
+    <p:extLst>
+      <p:ext uri="{BB962C8B-B14F-4D97-AF65-F5344CB8AC3E}">
+        <p14:creationId xmlns:p14="http://schemas.microsoft.com/office/powerpoint/2010/main" val="2619648341"/>
+      </p:ext>
+    </p:extLst>
+  </p:cSld>
+  <p:clrMapOvr>
+    <a:masterClrMapping/>
+  </p:clrMapOvr>
+</p:sld>
+</file>
+
+<file path=ppt/slides/slide21.xml><?xml version="1.0" encoding="utf-8"?>
+<p:sld xmlns:a="http://schemas.openxmlformats.org/drawingml/2006/main" xmlns:r="http://schemas.openxmlformats.org/officeDocument/2006/relationships" xmlns:p="http://schemas.openxmlformats.org/presentationml/2006/main">
+  <p:cSld>
+    <p:spTree>
+      <p:nvGrpSpPr>
+        <p:cNvPr id="1" name="">
+          <a:extLst>
+            <a:ext uri="{FF2B5EF4-FFF2-40B4-BE49-F238E27FC236}">
+              <a16:creationId xmlns:a16="http://schemas.microsoft.com/office/drawing/2014/main" id="{1129EA57-C825-E996-D47D-2E77024493CE}"/>
+            </a:ext>
+          </a:extLst>
+        </p:cNvPr>
+        <p:cNvGrpSpPr/>
+        <p:nvPr/>
+      </p:nvGrpSpPr>
+      <p:grpSpPr>
+        <a:xfrm>
+          <a:off x="0" y="0"/>
+          <a:ext cx="0" cy="0"/>
+          <a:chOff x="0" y="0"/>
+          <a:chExt cx="0" cy="0"/>
+        </a:xfrm>
+      </p:grpSpPr>
+      <p:sp>
+        <p:nvSpPr>
+          <p:cNvPr id="4" name="직사각형 3">
+            <a:extLst>
+              <a:ext uri="{FF2B5EF4-FFF2-40B4-BE49-F238E27FC236}">
+                <a16:creationId xmlns:a16="http://schemas.microsoft.com/office/drawing/2014/main" id="{C5DF3F9C-913D-2B3E-6B46-D2A7BB5929CC}"/>
+              </a:ext>
+            </a:extLst>
+          </p:cNvPr>
+          <p:cNvSpPr/>
+          <p:nvPr/>
+        </p:nvSpPr>
+        <p:spPr>
+          <a:xfrm>
+            <a:off x="3904885" y="549000"/>
+            <a:ext cx="2880000" cy="5760000"/>
+          </a:xfrm>
+          <a:prstGeom prst="rect">
+            <a:avLst/>
+          </a:prstGeom>
+        </p:spPr>
+        <p:style>
+          <a:lnRef idx="2">
+            <a:schemeClr val="accent1">
+              <a:shade val="15000"/>
+            </a:schemeClr>
+          </a:lnRef>
+          <a:fillRef idx="1">
+            <a:schemeClr val="accent1"/>
+          </a:fillRef>
+          <a:effectRef idx="0">
+            <a:schemeClr val="accent1"/>
+          </a:effectRef>
+          <a:fontRef idx="minor">
+            <a:schemeClr val="lt1"/>
+          </a:fontRef>
+        </p:style>
+        <p:txBody>
+          <a:bodyPr rtlCol="0" anchor="ctr"/>
+          <a:lstStyle/>
+          <a:p>
+            <a:pPr algn="ctr"/>
+            <a:endParaRPr lang="ko-KR" altLang="en-US"/>
+          </a:p>
+        </p:txBody>
+      </p:sp>
+      <p:sp>
+        <p:nvSpPr>
+          <p:cNvPr id="11" name="TextBox 10">
+            <a:extLst>
+              <a:ext uri="{FF2B5EF4-FFF2-40B4-BE49-F238E27FC236}">
+                <a16:creationId xmlns:a16="http://schemas.microsoft.com/office/drawing/2014/main" id="{9C29AEBD-B085-1318-D80E-88229F9FA6A8}"/>
+              </a:ext>
+            </a:extLst>
+          </p:cNvPr>
+          <p:cNvSpPr txBox="1"/>
+          <p:nvPr/>
+        </p:nvSpPr>
+        <p:spPr>
+          <a:xfrm>
+            <a:off x="404039" y="341501"/>
+            <a:ext cx="3242676" cy="5440272"/>
+          </a:xfrm>
+          <a:prstGeom prst="rect">
+            <a:avLst/>
+          </a:prstGeom>
+          <a:noFill/>
+        </p:spPr>
+        <p:txBody>
+          <a:bodyPr wrap="square" rtlCol="0">
+            <a:spAutoFit/>
+          </a:bodyPr>
+          <a:lstStyle/>
+          <a:p>
+            <a:pPr>
+              <a:lnSpc>
+                <a:spcPct val="150000"/>
+              </a:lnSpc>
+            </a:pPr>
+            <a:r>
+              <a:rPr lang="ko-KR" altLang="en-US" b="1" dirty="0"/>
+              <a:t>모바일 화면 기준</a:t>
+            </a:r>
+            <a:r>
+              <a:rPr lang="en-US" altLang="ko-KR" b="1" dirty="0"/>
+              <a:t>,</a:t>
+            </a:r>
+            <a:endParaRPr lang="en-US" altLang="ko-KR" dirty="0"/>
+          </a:p>
+          <a:p>
+            <a:pPr marL="285750" indent="-285750">
+              <a:lnSpc>
+                <a:spcPct val="150000"/>
+              </a:lnSpc>
+              <a:buFont typeface="Arial" panose="020B0604020202020204" pitchFamily="34" charset="0"/>
+              <a:buChar char="•"/>
+            </a:pPr>
+            <a:r>
+              <a:rPr lang="en-US" altLang="ko-KR" dirty="0"/>
+              <a:t>1 </a:t>
+            </a:r>
+            <a:r>
+              <a:rPr lang="ko-KR" altLang="en-US" dirty="0"/>
+              <a:t>게임 시작 직후</a:t>
+            </a:r>
+            <a:endParaRPr lang="en-US" altLang="ko-KR" dirty="0"/>
+          </a:p>
+          <a:p>
+            <a:pPr marL="285750" indent="-285750">
+              <a:lnSpc>
+                <a:spcPct val="150000"/>
+              </a:lnSpc>
+              <a:buFont typeface="Arial" panose="020B0604020202020204" pitchFamily="34" charset="0"/>
+              <a:buChar char="•"/>
+            </a:pPr>
+            <a:r>
+              <a:rPr lang="en-US" altLang="ko-KR" dirty="0"/>
+              <a:t>2 </a:t>
+            </a:r>
+            <a:r>
+              <a:rPr lang="ko-KR" altLang="en-US" dirty="0"/>
+              <a:t>상대방 차례</a:t>
+            </a:r>
+            <a:r>
+              <a:rPr lang="en-US" altLang="ko-KR" dirty="0"/>
+              <a:t>: </a:t>
+            </a:r>
+            <a:r>
+              <a:rPr lang="ko-KR" altLang="en-US" dirty="0"/>
+              <a:t>기다림</a:t>
+            </a:r>
+            <a:endParaRPr lang="en-US" altLang="ko-KR" dirty="0"/>
+          </a:p>
+          <a:p>
+            <a:pPr marL="285750" indent="-285750">
+              <a:lnSpc>
+                <a:spcPct val="150000"/>
+              </a:lnSpc>
+              <a:buFont typeface="Arial" panose="020B0604020202020204" pitchFamily="34" charset="0"/>
+              <a:buChar char="•"/>
+            </a:pPr>
+            <a:r>
+              <a:rPr lang="en-US" altLang="ko-KR" dirty="0"/>
+              <a:t>3 </a:t>
+            </a:r>
+            <a:r>
+              <a:rPr lang="ko-KR" altLang="en-US" dirty="0"/>
+              <a:t>시간이 흐름</a:t>
+            </a:r>
+            <a:endParaRPr lang="en-US" altLang="ko-KR" dirty="0"/>
+          </a:p>
+          <a:p>
+            <a:pPr marL="285750" indent="-285750">
+              <a:lnSpc>
+                <a:spcPct val="150000"/>
+              </a:lnSpc>
+              <a:buFont typeface="Arial" panose="020B0604020202020204" pitchFamily="34" charset="0"/>
+              <a:buChar char="•"/>
+            </a:pPr>
+            <a:r>
+              <a:rPr lang="en-US" altLang="ko-KR" dirty="0"/>
+              <a:t>4 </a:t>
+            </a:r>
+            <a:r>
+              <a:rPr lang="ko-KR" altLang="en-US" dirty="0"/>
+              <a:t>내 차례</a:t>
+            </a:r>
+            <a:r>
+              <a:rPr lang="en-US" altLang="ko-KR" dirty="0"/>
+              <a:t>: </a:t>
+            </a:r>
+            <a:r>
+              <a:rPr lang="ko-KR" altLang="en-US" dirty="0"/>
+              <a:t>포커스 됨</a:t>
+            </a:r>
+            <a:endParaRPr lang="en-US" altLang="ko-KR" dirty="0"/>
+          </a:p>
+          <a:p>
+            <a:pPr marL="285750" indent="-285750">
+              <a:lnSpc>
+                <a:spcPct val="150000"/>
+              </a:lnSpc>
+              <a:buFont typeface="Arial" panose="020B0604020202020204" pitchFamily="34" charset="0"/>
+              <a:buChar char="•"/>
+            </a:pPr>
+            <a:r>
+              <a:rPr lang="en-US" altLang="ko-KR" dirty="0"/>
+              <a:t>5 </a:t>
+            </a:r>
+            <a:r>
+              <a:rPr lang="ko-KR" altLang="en-US" dirty="0"/>
+              <a:t>고유 스킬 발동 체크</a:t>
+            </a:r>
+            <a:endParaRPr lang="en-US" altLang="ko-KR" dirty="0"/>
+          </a:p>
+          <a:p>
+            <a:pPr marL="285750" indent="-285750">
+              <a:lnSpc>
+                <a:spcPct val="150000"/>
+              </a:lnSpc>
+              <a:buFont typeface="Arial" panose="020B0604020202020204" pitchFamily="34" charset="0"/>
+              <a:buChar char="•"/>
+            </a:pPr>
+            <a:r>
+              <a:rPr lang="en-US" altLang="ko-KR" dirty="0"/>
+              <a:t>6</a:t>
+            </a:r>
+            <a:r>
+              <a:rPr lang="ko-KR" altLang="en-US" dirty="0"/>
+              <a:t> 고유 스킬 발동</a:t>
+            </a:r>
+            <a:endParaRPr lang="en-US" altLang="ko-KR" dirty="0"/>
+          </a:p>
+          <a:p>
+            <a:pPr marL="285750" indent="-285750">
+              <a:lnSpc>
+                <a:spcPct val="150000"/>
+              </a:lnSpc>
+              <a:buFont typeface="Arial" panose="020B0604020202020204" pitchFamily="34" charset="0"/>
+              <a:buChar char="•"/>
+            </a:pPr>
+            <a:r>
+              <a:rPr lang="en-US" altLang="ko-KR" dirty="0"/>
+              <a:t>7 </a:t>
+            </a:r>
+            <a:r>
+              <a:rPr lang="ko-KR" altLang="en-US" dirty="0"/>
+              <a:t>명령 이동</a:t>
+            </a:r>
+            <a:endParaRPr lang="en-US" altLang="ko-KR" dirty="0"/>
+          </a:p>
+          <a:p>
+            <a:pPr marL="285750" indent="-285750">
+              <a:lnSpc>
+                <a:spcPct val="150000"/>
+              </a:lnSpc>
+              <a:buFont typeface="Arial" panose="020B0604020202020204" pitchFamily="34" charset="0"/>
+              <a:buChar char="•"/>
+            </a:pPr>
+            <a:r>
+              <a:rPr lang="en-US" altLang="ko-KR" dirty="0"/>
+              <a:t>8 </a:t>
+            </a:r>
+            <a:r>
+              <a:rPr lang="ko-KR" altLang="en-US" dirty="0"/>
+              <a:t>명령 공격</a:t>
+            </a:r>
+            <a:endParaRPr lang="en-US" altLang="ko-KR" dirty="0"/>
+          </a:p>
+          <a:p>
+            <a:pPr marL="285750" indent="-285750">
+              <a:lnSpc>
+                <a:spcPct val="150000"/>
+              </a:lnSpc>
+              <a:buFont typeface="Arial" panose="020B0604020202020204" pitchFamily="34" charset="0"/>
+              <a:buChar char="•"/>
+            </a:pPr>
+            <a:r>
+              <a:rPr lang="en-US" altLang="ko-KR" dirty="0"/>
+              <a:t>9 </a:t>
+            </a:r>
+            <a:r>
+              <a:rPr lang="ko-KR" altLang="en-US" dirty="0"/>
+              <a:t>명령 책략</a:t>
+            </a:r>
+            <a:endParaRPr lang="en-US" altLang="ko-KR" dirty="0"/>
+          </a:p>
+          <a:p>
+            <a:pPr marL="285750" indent="-285750">
+              <a:lnSpc>
+                <a:spcPct val="150000"/>
+              </a:lnSpc>
+              <a:buFont typeface="Arial" panose="020B0604020202020204" pitchFamily="34" charset="0"/>
+              <a:buChar char="•"/>
+            </a:pPr>
+            <a:r>
+              <a:rPr lang="en-US" altLang="ko-KR" dirty="0"/>
+              <a:t>10 </a:t>
+            </a:r>
+            <a:r>
+              <a:rPr lang="ko-KR" altLang="en-US" dirty="0"/>
+              <a:t>명령 명상</a:t>
+            </a:r>
+            <a:endParaRPr lang="en-US" altLang="ko-KR" dirty="0"/>
+          </a:p>
+          <a:p>
+            <a:pPr marL="285750" indent="-285750">
+              <a:lnSpc>
+                <a:spcPct val="150000"/>
+              </a:lnSpc>
+              <a:buFont typeface="Arial" panose="020B0604020202020204" pitchFamily="34" charset="0"/>
+              <a:buChar char="•"/>
+            </a:pPr>
+            <a:r>
+              <a:rPr lang="en-US" altLang="ko-KR" dirty="0"/>
+              <a:t>11 </a:t>
+            </a:r>
+            <a:r>
+              <a:rPr lang="ko-KR" altLang="en-US" dirty="0"/>
+              <a:t>아군</a:t>
+            </a:r>
+            <a:r>
+              <a:rPr lang="en-US" altLang="ko-KR" dirty="0"/>
+              <a:t>/</a:t>
+            </a:r>
+            <a:r>
+              <a:rPr lang="ko-KR" altLang="en-US" dirty="0"/>
+              <a:t>적군 기물 체크</a:t>
+            </a:r>
+            <a:endParaRPr lang="en-US" altLang="ko-KR" dirty="0"/>
+          </a:p>
+          <a:p>
+            <a:pPr marL="285750" indent="-285750">
+              <a:lnSpc>
+                <a:spcPct val="150000"/>
+              </a:lnSpc>
+              <a:buFont typeface="Arial" panose="020B0604020202020204" pitchFamily="34" charset="0"/>
+              <a:buChar char="•"/>
+            </a:pPr>
+            <a:r>
+              <a:rPr lang="en-US" altLang="ko-KR" dirty="0"/>
+              <a:t>11 </a:t>
+            </a:r>
+            <a:r>
+              <a:rPr lang="ko-KR" altLang="en-US" dirty="0" err="1"/>
+              <a:t>턴종료</a:t>
+            </a:r>
+            <a:endParaRPr lang="en-US" altLang="ko-KR" dirty="0"/>
+          </a:p>
+        </p:txBody>
+      </p:sp>
+      <p:pic>
+        <p:nvPicPr>
+          <p:cNvPr id="3" name="그림 2">
+            <a:extLst>
+              <a:ext uri="{FF2B5EF4-FFF2-40B4-BE49-F238E27FC236}">
+                <a16:creationId xmlns:a16="http://schemas.microsoft.com/office/drawing/2014/main" id="{EB7C0807-4BDE-02CE-0CFE-CC283C6D7DF0}"/>
+              </a:ext>
+            </a:extLst>
+          </p:cNvPr>
+          <p:cNvPicPr>
+            <a:picLocks noChangeAspect="1"/>
+          </p:cNvPicPr>
+          <p:nvPr/>
+        </p:nvPicPr>
+        <p:blipFill>
+          <a:blip r:embed="rId2"/>
+          <a:stretch>
+            <a:fillRect/>
+          </a:stretch>
+        </p:blipFill>
+        <p:spPr>
+          <a:xfrm>
+            <a:off x="3904885" y="1953035"/>
+            <a:ext cx="2885345" cy="2951930"/>
+          </a:xfrm>
+          <a:prstGeom prst="rect">
+            <a:avLst/>
+          </a:prstGeom>
+        </p:spPr>
+      </p:pic>
+      <p:pic>
+        <p:nvPicPr>
+          <p:cNvPr id="8" name="그림 7">
+            <a:extLst>
+              <a:ext uri="{FF2B5EF4-FFF2-40B4-BE49-F238E27FC236}">
+                <a16:creationId xmlns:a16="http://schemas.microsoft.com/office/drawing/2014/main" id="{82F51AE6-FEB0-8CBC-E06B-1DCB631E89B5}"/>
+              </a:ext>
+            </a:extLst>
+          </p:cNvPr>
+          <p:cNvPicPr>
+            <a:picLocks noChangeAspect="1"/>
+          </p:cNvPicPr>
+          <p:nvPr/>
+        </p:nvPicPr>
+        <p:blipFill>
+          <a:blip r:embed="rId3"/>
+          <a:stretch>
+            <a:fillRect/>
+          </a:stretch>
+        </p:blipFill>
+        <p:spPr>
+          <a:xfrm>
+            <a:off x="3972767" y="615530"/>
+            <a:ext cx="2746802" cy="690756"/>
+          </a:xfrm>
+          <a:prstGeom prst="rect">
+            <a:avLst/>
+          </a:prstGeom>
+        </p:spPr>
+      </p:pic>
+      <p:sp>
+        <p:nvSpPr>
+          <p:cNvPr id="5" name="순서도: 수행의 시작/종료 4">
+            <a:extLst>
+              <a:ext uri="{FF2B5EF4-FFF2-40B4-BE49-F238E27FC236}">
+                <a16:creationId xmlns:a16="http://schemas.microsoft.com/office/drawing/2014/main" id="{181E9B37-20D4-99A4-C682-A7AECCFBAF57}"/>
+              </a:ext>
+            </a:extLst>
+          </p:cNvPr>
+          <p:cNvSpPr/>
+          <p:nvPr/>
+        </p:nvSpPr>
+        <p:spPr>
+          <a:xfrm>
+            <a:off x="5848712" y="603431"/>
+            <a:ext cx="859971" cy="264728"/>
+          </a:xfrm>
+          <a:prstGeom prst="flowChartTerminator">
+            <a:avLst/>
+          </a:prstGeom>
+        </p:spPr>
+        <p:style>
+          <a:lnRef idx="2">
+            <a:schemeClr val="accent2">
+              <a:shade val="15000"/>
+            </a:schemeClr>
+          </a:lnRef>
+          <a:fillRef idx="1">
+            <a:schemeClr val="accent2"/>
+          </a:fillRef>
+          <a:effectRef idx="0">
+            <a:schemeClr val="accent2"/>
+          </a:effectRef>
+          <a:fontRef idx="minor">
+            <a:schemeClr val="lt1"/>
+          </a:fontRef>
+        </p:style>
+        <p:txBody>
+          <a:bodyPr rtlCol="0" anchor="ctr"/>
+          <a:lstStyle/>
+          <a:p>
+            <a:pPr algn="ctr"/>
+            <a:r>
+              <a:rPr lang="ko-KR" altLang="en-US" sz="1200" b="1" dirty="0"/>
+              <a:t>항복</a:t>
+            </a:r>
+          </a:p>
+        </p:txBody>
+      </p:sp>
+      <p:pic>
+        <p:nvPicPr>
+          <p:cNvPr id="10" name="그림 9">
+            <a:extLst>
+              <a:ext uri="{FF2B5EF4-FFF2-40B4-BE49-F238E27FC236}">
+                <a16:creationId xmlns:a16="http://schemas.microsoft.com/office/drawing/2014/main" id="{5470B712-61BE-AD74-CBCB-049B271714F8}"/>
+              </a:ext>
+            </a:extLst>
+          </p:cNvPr>
+          <p:cNvPicPr>
+            <a:picLocks noChangeAspect="1"/>
+          </p:cNvPicPr>
+          <p:nvPr/>
+        </p:nvPicPr>
+        <p:blipFill>
+          <a:blip r:embed="rId4"/>
+          <a:srcRect b="21463"/>
+          <a:stretch>
+            <a:fillRect/>
+          </a:stretch>
+        </p:blipFill>
+        <p:spPr>
+          <a:xfrm>
+            <a:off x="4869453" y="4962581"/>
+            <a:ext cx="1850116" cy="578247"/>
+          </a:xfrm>
+          <a:prstGeom prst="rect">
+            <a:avLst/>
+          </a:prstGeom>
+        </p:spPr>
+      </p:pic>
+      <p:pic>
+        <p:nvPicPr>
+          <p:cNvPr id="13" name="그림 12">
+            <a:extLst>
+              <a:ext uri="{FF2B5EF4-FFF2-40B4-BE49-F238E27FC236}">
+                <a16:creationId xmlns:a16="http://schemas.microsoft.com/office/drawing/2014/main" id="{BECCDD55-1874-A3D3-FDD0-813385BFF61C}"/>
+              </a:ext>
+            </a:extLst>
+          </p:cNvPr>
+          <p:cNvPicPr>
+            <a:picLocks noChangeAspect="1"/>
+          </p:cNvPicPr>
+          <p:nvPr/>
+        </p:nvPicPr>
+        <p:blipFill>
+          <a:blip r:embed="rId5"/>
+          <a:stretch>
+            <a:fillRect/>
+          </a:stretch>
+        </p:blipFill>
+        <p:spPr>
+          <a:xfrm>
+            <a:off x="3992542" y="4962581"/>
+            <a:ext cx="800141" cy="819192"/>
+          </a:xfrm>
+          <a:prstGeom prst="rect">
+            <a:avLst/>
+          </a:prstGeom>
+        </p:spPr>
+      </p:pic>
+      <p:grpSp>
+        <p:nvGrpSpPr>
+          <p:cNvPr id="24" name="그룹 23">
+            <a:extLst>
+              <a:ext uri="{FF2B5EF4-FFF2-40B4-BE49-F238E27FC236}">
+                <a16:creationId xmlns:a16="http://schemas.microsoft.com/office/drawing/2014/main" id="{2F0DB4D3-546D-61CE-AF7D-AEB9D5FBAD06}"/>
+              </a:ext>
+            </a:extLst>
+          </p:cNvPr>
+          <p:cNvGrpSpPr/>
+          <p:nvPr/>
+        </p:nvGrpSpPr>
+        <p:grpSpPr>
+          <a:xfrm>
+            <a:off x="3963367" y="5962689"/>
+            <a:ext cx="2799745" cy="268895"/>
+            <a:chOff x="4681825" y="5864715"/>
+            <a:chExt cx="3043238" cy="249851"/>
+          </a:xfrm>
+        </p:grpSpPr>
+        <p:sp>
+          <p:nvSpPr>
+            <p:cNvPr id="15" name="순서도: 수행의 시작/종료 14">
+              <a:extLst>
+                <a:ext uri="{FF2B5EF4-FFF2-40B4-BE49-F238E27FC236}">
+                  <a16:creationId xmlns:a16="http://schemas.microsoft.com/office/drawing/2014/main" id="{A855229E-2278-11D7-4395-D9567722FBAF}"/>
+                </a:ext>
+              </a:extLst>
+            </p:cNvPr>
+            <p:cNvSpPr/>
+            <p:nvPr/>
+          </p:nvSpPr>
+          <p:spPr>
+            <a:xfrm>
+              <a:off x="4681825" y="5864715"/>
+              <a:ext cx="562971" cy="244852"/>
+            </a:xfrm>
+            <a:prstGeom prst="flowChartTerminator">
+              <a:avLst/>
+            </a:prstGeom>
+          </p:spPr>
+          <p:style>
+            <a:lnRef idx="2">
+              <a:schemeClr val="accent3">
+                <a:shade val="15000"/>
+              </a:schemeClr>
+            </a:lnRef>
+            <a:fillRef idx="1">
+              <a:schemeClr val="accent3"/>
+            </a:fillRef>
+            <a:effectRef idx="0">
+              <a:schemeClr val="accent3"/>
+            </a:effectRef>
+            <a:fontRef idx="minor">
+              <a:schemeClr val="lt1"/>
+            </a:fontRef>
+          </p:style>
+          <p:txBody>
+            <a:bodyPr rtlCol="0" anchor="ctr"/>
+            <a:lstStyle/>
+            <a:p>
+              <a:pPr algn="ctr"/>
+              <a:r>
+                <a:rPr lang="ko-KR" altLang="en-US" sz="1100" b="1" dirty="0"/>
+                <a:t>이동</a:t>
+              </a:r>
+            </a:p>
+          </p:txBody>
+        </p:sp>
+        <p:sp>
+          <p:nvSpPr>
+            <p:cNvPr id="17" name="순서도: 수행의 시작/종료 16">
+              <a:extLst>
+                <a:ext uri="{FF2B5EF4-FFF2-40B4-BE49-F238E27FC236}">
+                  <a16:creationId xmlns:a16="http://schemas.microsoft.com/office/drawing/2014/main" id="{579F9B26-2A87-383E-3E9F-77AE48B6628A}"/>
+                </a:ext>
+              </a:extLst>
+            </p:cNvPr>
+            <p:cNvSpPr/>
+            <p:nvPr/>
+          </p:nvSpPr>
+          <p:spPr>
+            <a:xfrm>
+              <a:off x="5298348" y="5869714"/>
+              <a:ext cx="562971" cy="244852"/>
+            </a:xfrm>
+            <a:prstGeom prst="flowChartTerminator">
+              <a:avLst/>
+            </a:prstGeom>
+          </p:spPr>
+          <p:style>
+            <a:lnRef idx="2">
+              <a:schemeClr val="accent3">
+                <a:shade val="15000"/>
+              </a:schemeClr>
+            </a:lnRef>
+            <a:fillRef idx="1">
+              <a:schemeClr val="accent3"/>
+            </a:fillRef>
+            <a:effectRef idx="0">
+              <a:schemeClr val="accent3"/>
+            </a:effectRef>
+            <a:fontRef idx="minor">
+              <a:schemeClr val="lt1"/>
+            </a:fontRef>
+          </p:style>
+          <p:txBody>
+            <a:bodyPr rtlCol="0" anchor="ctr"/>
+            <a:lstStyle/>
+            <a:p>
+              <a:pPr algn="ctr"/>
+              <a:r>
+                <a:rPr lang="ko-KR" altLang="en-US" sz="1100" b="1" dirty="0"/>
+                <a:t>공격</a:t>
+              </a:r>
+            </a:p>
+          </p:txBody>
+        </p:sp>
+        <p:sp>
+          <p:nvSpPr>
+            <p:cNvPr id="19" name="순서도: 수행의 시작/종료 18">
+              <a:extLst>
+                <a:ext uri="{FF2B5EF4-FFF2-40B4-BE49-F238E27FC236}">
+                  <a16:creationId xmlns:a16="http://schemas.microsoft.com/office/drawing/2014/main" id="{0E670163-9949-C8D1-D1A8-156D0241FDA2}"/>
+                </a:ext>
+              </a:extLst>
+            </p:cNvPr>
+            <p:cNvSpPr/>
+            <p:nvPr/>
+          </p:nvSpPr>
+          <p:spPr>
+            <a:xfrm>
+              <a:off x="5917706" y="5864715"/>
+              <a:ext cx="562971" cy="244852"/>
+            </a:xfrm>
+            <a:prstGeom prst="flowChartTerminator">
+              <a:avLst/>
+            </a:prstGeom>
+          </p:spPr>
+          <p:style>
+            <a:lnRef idx="2">
+              <a:schemeClr val="accent3">
+                <a:shade val="15000"/>
+              </a:schemeClr>
+            </a:lnRef>
+            <a:fillRef idx="1">
+              <a:schemeClr val="accent3"/>
+            </a:fillRef>
+            <a:effectRef idx="0">
+              <a:schemeClr val="accent3"/>
+            </a:effectRef>
+            <a:fontRef idx="minor">
+              <a:schemeClr val="lt1"/>
+            </a:fontRef>
+          </p:style>
+          <p:txBody>
+            <a:bodyPr rtlCol="0" anchor="ctr"/>
+            <a:lstStyle/>
+            <a:p>
+              <a:pPr algn="ctr"/>
+              <a:r>
+                <a:rPr lang="ko-KR" altLang="en-US" sz="1100" b="1" dirty="0"/>
+                <a:t>책략</a:t>
+              </a:r>
+            </a:p>
+          </p:txBody>
+        </p:sp>
+        <p:sp>
+          <p:nvSpPr>
+            <p:cNvPr id="21" name="순서도: 수행의 시작/종료 20">
+              <a:extLst>
+                <a:ext uri="{FF2B5EF4-FFF2-40B4-BE49-F238E27FC236}">
+                  <a16:creationId xmlns:a16="http://schemas.microsoft.com/office/drawing/2014/main" id="{F0404DDA-DD36-4395-49DA-A633A8A71287}"/>
+                </a:ext>
+              </a:extLst>
+            </p:cNvPr>
+            <p:cNvSpPr/>
+            <p:nvPr/>
+          </p:nvSpPr>
+          <p:spPr>
+            <a:xfrm>
+              <a:off x="6539899" y="5864715"/>
+              <a:ext cx="562971" cy="244852"/>
+            </a:xfrm>
+            <a:prstGeom prst="flowChartTerminator">
+              <a:avLst/>
+            </a:prstGeom>
+          </p:spPr>
+          <p:style>
+            <a:lnRef idx="2">
+              <a:schemeClr val="accent3">
+                <a:shade val="15000"/>
+              </a:schemeClr>
+            </a:lnRef>
+            <a:fillRef idx="1">
+              <a:schemeClr val="accent3"/>
+            </a:fillRef>
+            <a:effectRef idx="0">
+              <a:schemeClr val="accent3"/>
+            </a:effectRef>
+            <a:fontRef idx="minor">
+              <a:schemeClr val="lt1"/>
+            </a:fontRef>
+          </p:style>
+          <p:txBody>
+            <a:bodyPr rtlCol="0" anchor="ctr"/>
+            <a:lstStyle/>
+            <a:p>
+              <a:pPr algn="ctr"/>
+              <a:r>
+                <a:rPr lang="ko-KR" altLang="en-US" sz="1100" b="1" dirty="0"/>
+                <a:t>명상</a:t>
+              </a:r>
+            </a:p>
+          </p:txBody>
+        </p:sp>
+        <p:sp>
+          <p:nvSpPr>
+            <p:cNvPr id="23" name="순서도: 수행의 시작/종료 22">
+              <a:extLst>
+                <a:ext uri="{FF2B5EF4-FFF2-40B4-BE49-F238E27FC236}">
+                  <a16:creationId xmlns:a16="http://schemas.microsoft.com/office/drawing/2014/main" id="{5256B7B8-B701-1FAE-1789-3411F25F4904}"/>
+                </a:ext>
+              </a:extLst>
+            </p:cNvPr>
+            <p:cNvSpPr/>
+            <p:nvPr/>
+          </p:nvSpPr>
+          <p:spPr>
+            <a:xfrm>
+              <a:off x="7162092" y="5864715"/>
+              <a:ext cx="562971" cy="244852"/>
+            </a:xfrm>
+            <a:prstGeom prst="flowChartTerminator">
+              <a:avLst/>
+            </a:prstGeom>
+          </p:spPr>
+          <p:style>
+            <a:lnRef idx="2">
+              <a:schemeClr val="accent3">
+                <a:shade val="15000"/>
+              </a:schemeClr>
+            </a:lnRef>
+            <a:fillRef idx="1">
+              <a:schemeClr val="accent3"/>
+            </a:fillRef>
+            <a:effectRef idx="0">
+              <a:schemeClr val="accent3"/>
+            </a:effectRef>
+            <a:fontRef idx="minor">
+              <a:schemeClr val="lt1"/>
+            </a:fontRef>
+          </p:style>
+          <p:txBody>
+            <a:bodyPr rtlCol="0" anchor="ctr"/>
+            <a:lstStyle/>
+            <a:p>
+              <a:pPr algn="ctr"/>
+              <a:r>
+                <a:rPr lang="ko-KR" altLang="en-US" sz="1100" b="1" dirty="0"/>
+                <a:t>종료</a:t>
+              </a:r>
+            </a:p>
+          </p:txBody>
+        </p:sp>
+      </p:grpSp>
+      <p:sp>
+        <p:nvSpPr>
+          <p:cNvPr id="27" name="말풍선: 사각형 26">
+            <a:extLst>
+              <a:ext uri="{FF2B5EF4-FFF2-40B4-BE49-F238E27FC236}">
+                <a16:creationId xmlns:a16="http://schemas.microsoft.com/office/drawing/2014/main" id="{FF0E8D5C-5C85-F0A3-D2C8-B2084E0A2000}"/>
+              </a:ext>
+            </a:extLst>
+          </p:cNvPr>
+          <p:cNvSpPr/>
+          <p:nvPr/>
+        </p:nvSpPr>
+        <p:spPr>
+          <a:xfrm>
+            <a:off x="4057858" y="1355694"/>
+            <a:ext cx="2442526" cy="255814"/>
+          </a:xfrm>
+          <a:prstGeom prst="wedgeRectCallout">
+            <a:avLst>
+              <a:gd name="adj1" fmla="val -54826"/>
+              <a:gd name="adj2" fmla="val 41288"/>
+            </a:avLst>
+          </a:prstGeom>
+        </p:spPr>
+        <p:style>
+          <a:lnRef idx="1">
+            <a:schemeClr val="accent4"/>
+          </a:lnRef>
+          <a:fillRef idx="2">
+            <a:schemeClr val="accent4"/>
+          </a:fillRef>
+          <a:effectRef idx="1">
+            <a:schemeClr val="accent4"/>
+          </a:effectRef>
+          <a:fontRef idx="minor">
+            <a:schemeClr val="dk1"/>
+          </a:fontRef>
+        </p:style>
+        <p:txBody>
+          <a:bodyPr rtlCol="0" anchor="ctr"/>
+          <a:lstStyle/>
+          <a:p>
+            <a:pPr algn="ctr"/>
+            <a:endParaRPr lang="ko-KR" altLang="en-US"/>
+          </a:p>
+        </p:txBody>
+      </p:sp>
+      <p:sp>
+        <p:nvSpPr>
+          <p:cNvPr id="29" name="말풍선: 사각형 28">
+            <a:extLst>
+              <a:ext uri="{FF2B5EF4-FFF2-40B4-BE49-F238E27FC236}">
+                <a16:creationId xmlns:a16="http://schemas.microsoft.com/office/drawing/2014/main" id="{1A3D8482-0F4F-BA0D-ED45-AE3DBB29C139}"/>
+              </a:ext>
+            </a:extLst>
+          </p:cNvPr>
+          <p:cNvSpPr/>
+          <p:nvPr/>
+        </p:nvSpPr>
+        <p:spPr>
+          <a:xfrm>
+            <a:off x="4057858" y="1474961"/>
+            <a:ext cx="2442526" cy="255814"/>
+          </a:xfrm>
+          <a:prstGeom prst="wedgeRectCallout">
+            <a:avLst>
+              <a:gd name="adj1" fmla="val -54826"/>
+              <a:gd name="adj2" fmla="val 41288"/>
+            </a:avLst>
+          </a:prstGeom>
+        </p:spPr>
+        <p:style>
+          <a:lnRef idx="1">
+            <a:schemeClr val="accent4"/>
+          </a:lnRef>
+          <a:fillRef idx="2">
+            <a:schemeClr val="accent4"/>
+          </a:fillRef>
+          <a:effectRef idx="1">
+            <a:schemeClr val="accent4"/>
+          </a:effectRef>
+          <a:fontRef idx="minor">
+            <a:schemeClr val="dk1"/>
+          </a:fontRef>
+        </p:style>
+        <p:txBody>
+          <a:bodyPr rtlCol="0" anchor="ctr"/>
+          <a:lstStyle/>
+          <a:p>
+            <a:pPr algn="ctr"/>
+            <a:endParaRPr lang="ko-KR" altLang="en-US"/>
+          </a:p>
+        </p:txBody>
+      </p:sp>
+      <p:sp>
+        <p:nvSpPr>
+          <p:cNvPr id="31" name="말풍선: 사각형 30">
+            <a:extLst>
+              <a:ext uri="{FF2B5EF4-FFF2-40B4-BE49-F238E27FC236}">
+                <a16:creationId xmlns:a16="http://schemas.microsoft.com/office/drawing/2014/main" id="{3BB0E155-39CA-A38D-93C7-34F61277FB84}"/>
+              </a:ext>
+            </a:extLst>
+          </p:cNvPr>
+          <p:cNvSpPr/>
+          <p:nvPr/>
+        </p:nvSpPr>
+        <p:spPr>
+          <a:xfrm>
+            <a:off x="4138064" y="1574059"/>
+            <a:ext cx="2442526" cy="321360"/>
+          </a:xfrm>
+          <a:prstGeom prst="wedgeRectCallout">
+            <a:avLst>
+              <a:gd name="adj1" fmla="val -54826"/>
+              <a:gd name="adj2" fmla="val 41288"/>
+            </a:avLst>
+          </a:prstGeom>
+        </p:spPr>
+        <p:style>
+          <a:lnRef idx="1">
+            <a:schemeClr val="accent4"/>
+          </a:lnRef>
+          <a:fillRef idx="2">
+            <a:schemeClr val="accent4"/>
+          </a:fillRef>
+          <a:effectRef idx="1">
+            <a:schemeClr val="accent4"/>
+          </a:effectRef>
+          <a:fontRef idx="minor">
+            <a:schemeClr val="dk1"/>
+          </a:fontRef>
+        </p:style>
+        <p:txBody>
+          <a:bodyPr rtlCol="0" anchor="ctr"/>
+          <a:lstStyle/>
+          <a:p>
+            <a:r>
+              <a:rPr lang="ko-KR" altLang="en-US" sz="1200" dirty="0"/>
+              <a:t>조운이 이동했다</a:t>
+            </a:r>
+            <a:r>
+              <a:rPr lang="en-US" altLang="ko-KR" sz="1200" dirty="0"/>
+              <a:t>. (A3 </a:t>
+            </a:r>
+            <a:r>
+              <a:rPr lang="en-US" altLang="ko-KR" sz="1200" dirty="0">
+                <a:sym typeface="Wingdings" panose="05000000000000000000" pitchFamily="2" charset="2"/>
+              </a:rPr>
+              <a:t> E3)</a:t>
+            </a:r>
+            <a:endParaRPr lang="ko-KR" altLang="en-US" sz="1200" dirty="0"/>
+          </a:p>
+        </p:txBody>
+      </p:sp>
+      <p:sp>
+        <p:nvSpPr>
+          <p:cNvPr id="33" name="말풍선: 사각형 32">
+            <a:extLst>
+              <a:ext uri="{FF2B5EF4-FFF2-40B4-BE49-F238E27FC236}">
+                <a16:creationId xmlns:a16="http://schemas.microsoft.com/office/drawing/2014/main" id="{D9D44B71-113D-ADBA-5959-0676F4358358}"/>
+              </a:ext>
+            </a:extLst>
+          </p:cNvPr>
+          <p:cNvSpPr/>
+          <p:nvPr/>
+        </p:nvSpPr>
+        <p:spPr>
+          <a:xfrm>
+            <a:off x="7556178" y="1567665"/>
+            <a:ext cx="2442526" cy="321360"/>
+          </a:xfrm>
+          <a:prstGeom prst="wedgeRectCallout">
+            <a:avLst>
+              <a:gd name="adj1" fmla="val -54826"/>
+              <a:gd name="adj2" fmla="val 41288"/>
+            </a:avLst>
+          </a:prstGeom>
+        </p:spPr>
+        <p:style>
+          <a:lnRef idx="1">
+            <a:schemeClr val="accent4"/>
+          </a:lnRef>
+          <a:fillRef idx="2">
+            <a:schemeClr val="accent4"/>
+          </a:fillRef>
+          <a:effectRef idx="1">
+            <a:schemeClr val="accent4"/>
+          </a:effectRef>
+          <a:fontRef idx="minor">
+            <a:schemeClr val="dk1"/>
+          </a:fontRef>
+        </p:style>
+        <p:txBody>
+          <a:bodyPr rtlCol="0" anchor="ctr"/>
+          <a:lstStyle/>
+          <a:p>
+            <a:r>
+              <a:rPr lang="ko-KR" altLang="en-US" sz="1200" dirty="0"/>
+              <a:t>조운이 공격했다</a:t>
+            </a:r>
+            <a:r>
+              <a:rPr lang="en-US" altLang="ko-KR" sz="1200" dirty="0"/>
+              <a:t>. (</a:t>
+            </a:r>
+            <a:r>
+              <a:rPr lang="ko-KR" altLang="en-US" sz="1200" dirty="0" err="1"/>
+              <a:t>유봉</a:t>
+            </a:r>
+            <a:r>
+              <a:rPr lang="en-US" altLang="ko-KR" sz="1200" dirty="0"/>
+              <a:t>)</a:t>
+            </a:r>
+            <a:endParaRPr lang="ko-KR" altLang="en-US" sz="1200" dirty="0"/>
+          </a:p>
+        </p:txBody>
+      </p:sp>
+      <p:sp>
+        <p:nvSpPr>
+          <p:cNvPr id="35" name="말풍선: 사각형 34">
+            <a:extLst>
+              <a:ext uri="{FF2B5EF4-FFF2-40B4-BE49-F238E27FC236}">
+                <a16:creationId xmlns:a16="http://schemas.microsoft.com/office/drawing/2014/main" id="{DF142A1A-E508-CF53-4B54-61886830BBB4}"/>
+              </a:ext>
+            </a:extLst>
+          </p:cNvPr>
+          <p:cNvSpPr/>
+          <p:nvPr/>
+        </p:nvSpPr>
+        <p:spPr>
+          <a:xfrm>
+            <a:off x="7556178" y="1953035"/>
+            <a:ext cx="2442526" cy="321360"/>
+          </a:xfrm>
+          <a:prstGeom prst="wedgeRectCallout">
+            <a:avLst>
+              <a:gd name="adj1" fmla="val -54826"/>
+              <a:gd name="adj2" fmla="val 41288"/>
+            </a:avLst>
+          </a:prstGeom>
+        </p:spPr>
+        <p:style>
+          <a:lnRef idx="1">
+            <a:schemeClr val="accent4"/>
+          </a:lnRef>
+          <a:fillRef idx="2">
+            <a:schemeClr val="accent4"/>
+          </a:fillRef>
+          <a:effectRef idx="1">
+            <a:schemeClr val="accent4"/>
+          </a:effectRef>
+          <a:fontRef idx="minor">
+            <a:schemeClr val="dk1"/>
+          </a:fontRef>
+        </p:style>
+        <p:txBody>
+          <a:bodyPr rtlCol="0" anchor="ctr"/>
+          <a:lstStyle/>
+          <a:p>
+            <a:r>
+              <a:rPr lang="ko-KR" altLang="en-US" sz="1200" dirty="0"/>
+              <a:t>조운이 이동 했다</a:t>
+            </a:r>
+            <a:r>
+              <a:rPr lang="en-US" altLang="ko-KR" sz="1200" dirty="0"/>
+              <a:t>. (A3</a:t>
+            </a:r>
+            <a:r>
+              <a:rPr lang="en-US" altLang="ko-KR" sz="1200" dirty="0">
+                <a:sym typeface="Wingdings" panose="05000000000000000000" pitchFamily="2" charset="2"/>
+              </a:rPr>
+              <a:t> E3</a:t>
+            </a:r>
+            <a:r>
+              <a:rPr lang="en-US" altLang="ko-KR" sz="1200" dirty="0"/>
+              <a:t>)</a:t>
+            </a:r>
+            <a:endParaRPr lang="ko-KR" altLang="en-US" sz="1200" dirty="0"/>
+          </a:p>
+        </p:txBody>
+      </p:sp>
+      <p:sp>
+        <p:nvSpPr>
+          <p:cNvPr id="37" name="TextBox 36">
+            <a:extLst>
+              <a:ext uri="{FF2B5EF4-FFF2-40B4-BE49-F238E27FC236}">
+                <a16:creationId xmlns:a16="http://schemas.microsoft.com/office/drawing/2014/main" id="{0F6FE2C3-938A-9365-B031-B980AAD844EB}"/>
+              </a:ext>
+            </a:extLst>
+          </p:cNvPr>
+          <p:cNvSpPr txBox="1"/>
+          <p:nvPr/>
+        </p:nvSpPr>
+        <p:spPr>
+          <a:xfrm>
+            <a:off x="7371120" y="998413"/>
+            <a:ext cx="2981193" cy="369332"/>
+          </a:xfrm>
+          <a:prstGeom prst="rect">
+            <a:avLst/>
+          </a:prstGeom>
+          <a:noFill/>
+        </p:spPr>
+        <p:txBody>
+          <a:bodyPr wrap="square">
+            <a:spAutoFit/>
+          </a:bodyPr>
+          <a:lstStyle/>
+          <a:p>
+            <a:r>
+              <a:rPr lang="ko-KR" altLang="en-US" sz="1800" dirty="0"/>
+              <a:t>시스템 </a:t>
+            </a:r>
+            <a:r>
+              <a:rPr lang="ko-KR" altLang="en-US" sz="1800" dirty="0" err="1"/>
+              <a:t>대화창</a:t>
+            </a:r>
+            <a:r>
+              <a:rPr lang="ko-KR" altLang="en-US" sz="1800" dirty="0"/>
+              <a:t> 대화 예시</a:t>
+            </a:r>
+            <a:endParaRPr lang="ko-KR" altLang="en-US" dirty="0"/>
+          </a:p>
+        </p:txBody>
+      </p:sp>
+      <p:sp>
+        <p:nvSpPr>
+          <p:cNvPr id="39" name="말풍선: 사각형 38">
+            <a:extLst>
+              <a:ext uri="{FF2B5EF4-FFF2-40B4-BE49-F238E27FC236}">
+                <a16:creationId xmlns:a16="http://schemas.microsoft.com/office/drawing/2014/main" id="{9FA4EE28-466A-5F1F-3F2F-4A3EE6E395EB}"/>
+              </a:ext>
+            </a:extLst>
+          </p:cNvPr>
+          <p:cNvSpPr/>
+          <p:nvPr/>
+        </p:nvSpPr>
+        <p:spPr>
+          <a:xfrm>
+            <a:off x="7556178" y="2338405"/>
+            <a:ext cx="2442526" cy="321360"/>
+          </a:xfrm>
+          <a:prstGeom prst="wedgeRectCallout">
+            <a:avLst>
+              <a:gd name="adj1" fmla="val -54826"/>
+              <a:gd name="adj2" fmla="val 41288"/>
+            </a:avLst>
+          </a:prstGeom>
+        </p:spPr>
+        <p:style>
+          <a:lnRef idx="1">
+            <a:schemeClr val="accent4"/>
+          </a:lnRef>
+          <a:fillRef idx="2">
+            <a:schemeClr val="accent4"/>
+          </a:fillRef>
+          <a:effectRef idx="1">
+            <a:schemeClr val="accent4"/>
+          </a:effectRef>
+          <a:fontRef idx="minor">
+            <a:schemeClr val="dk1"/>
+          </a:fontRef>
+        </p:style>
+        <p:txBody>
+          <a:bodyPr rtlCol="0" anchor="ctr"/>
+          <a:lstStyle/>
+          <a:p>
+            <a:r>
+              <a:rPr lang="ko-KR" altLang="en-US" sz="1200" dirty="0"/>
+              <a:t>조운이 명상 했다</a:t>
+            </a:r>
+            <a:r>
+              <a:rPr lang="en-US" altLang="ko-KR" sz="1200" dirty="0"/>
+              <a:t>. (MP+2)</a:t>
+            </a:r>
+            <a:endParaRPr lang="ko-KR" altLang="en-US" sz="1200" dirty="0"/>
+          </a:p>
+        </p:txBody>
+      </p:sp>
+      <p:sp>
+        <p:nvSpPr>
+          <p:cNvPr id="41" name="말풍선: 사각형 40">
+            <a:extLst>
+              <a:ext uri="{FF2B5EF4-FFF2-40B4-BE49-F238E27FC236}">
+                <a16:creationId xmlns:a16="http://schemas.microsoft.com/office/drawing/2014/main" id="{5B907CD7-CC2D-B0B2-A798-A406D49D2F39}"/>
+              </a:ext>
+            </a:extLst>
+          </p:cNvPr>
+          <p:cNvSpPr/>
+          <p:nvPr/>
+        </p:nvSpPr>
+        <p:spPr>
+          <a:xfrm>
+            <a:off x="7556178" y="2740277"/>
+            <a:ext cx="2442526" cy="321360"/>
+          </a:xfrm>
+          <a:prstGeom prst="wedgeRectCallout">
+            <a:avLst>
+              <a:gd name="adj1" fmla="val -54826"/>
+              <a:gd name="adj2" fmla="val 41288"/>
+            </a:avLst>
+          </a:prstGeom>
+        </p:spPr>
+        <p:style>
+          <a:lnRef idx="1">
+            <a:schemeClr val="accent4"/>
+          </a:lnRef>
+          <a:fillRef idx="2">
+            <a:schemeClr val="accent4"/>
+          </a:fillRef>
+          <a:effectRef idx="1">
+            <a:schemeClr val="accent4"/>
+          </a:effectRef>
+          <a:fontRef idx="minor">
+            <a:schemeClr val="dk1"/>
+          </a:fontRef>
+        </p:style>
+        <p:txBody>
+          <a:bodyPr rtlCol="0" anchor="ctr"/>
+          <a:lstStyle/>
+          <a:p>
+            <a:r>
+              <a:rPr lang="ko-KR" altLang="en-US" sz="1200" dirty="0"/>
+              <a:t>조운이 </a:t>
+            </a:r>
+            <a:r>
+              <a:rPr lang="en-US" altLang="ko-KR" sz="1200" dirty="0"/>
+              <a:t>‘</a:t>
+            </a:r>
+            <a:r>
+              <a:rPr lang="ko-KR" altLang="en-US" sz="1200" dirty="0"/>
+              <a:t>고유기술</a:t>
+            </a:r>
+            <a:r>
+              <a:rPr lang="en-US" altLang="ko-KR" sz="1200" dirty="0"/>
+              <a:t>’ </a:t>
+            </a:r>
+            <a:r>
+              <a:rPr lang="ko-KR" altLang="en-US" sz="1200" dirty="0"/>
+              <a:t>을 발동했다</a:t>
+            </a:r>
+            <a:r>
+              <a:rPr lang="en-US" altLang="ko-KR" sz="1200" dirty="0"/>
+              <a:t>!</a:t>
+            </a:r>
+            <a:endParaRPr lang="ko-KR" altLang="en-US" sz="1200" dirty="0"/>
+          </a:p>
+        </p:txBody>
+      </p:sp>
+      <p:sp>
+        <p:nvSpPr>
+          <p:cNvPr id="43" name="말풍선: 사각형 42">
+            <a:extLst>
+              <a:ext uri="{FF2B5EF4-FFF2-40B4-BE49-F238E27FC236}">
+                <a16:creationId xmlns:a16="http://schemas.microsoft.com/office/drawing/2014/main" id="{97BC7B79-2BA9-F5FD-98DA-3B68833E315C}"/>
+              </a:ext>
+            </a:extLst>
+          </p:cNvPr>
+          <p:cNvSpPr/>
+          <p:nvPr/>
+        </p:nvSpPr>
+        <p:spPr>
+          <a:xfrm>
+            <a:off x="7752121" y="2981469"/>
+            <a:ext cx="2442526" cy="321360"/>
+          </a:xfrm>
+          <a:prstGeom prst="wedgeRectCallout">
+            <a:avLst>
+              <a:gd name="adj1" fmla="val -54826"/>
+              <a:gd name="adj2" fmla="val 41288"/>
+            </a:avLst>
+          </a:prstGeom>
+        </p:spPr>
+        <p:style>
+          <a:lnRef idx="1">
+            <a:schemeClr val="accent4"/>
+          </a:lnRef>
+          <a:fillRef idx="2">
+            <a:schemeClr val="accent4"/>
+          </a:fillRef>
+          <a:effectRef idx="1">
+            <a:schemeClr val="accent4"/>
+          </a:effectRef>
+          <a:fontRef idx="minor">
+            <a:schemeClr val="dk1"/>
+          </a:fontRef>
+        </p:style>
+        <p:txBody>
+          <a:bodyPr rtlCol="0" anchor="ctr"/>
+          <a:lstStyle/>
+          <a:p>
+            <a:r>
+              <a:rPr lang="en-US" altLang="ko-KR" sz="1200" dirty="0"/>
+              <a:t>(</a:t>
+            </a:r>
+            <a:r>
+              <a:rPr lang="ko-KR" altLang="en-US" sz="1200" dirty="0"/>
+              <a:t>간뇌도지 효과에 대한 설명</a:t>
+            </a:r>
+            <a:r>
+              <a:rPr lang="en-US" altLang="ko-KR" sz="1200" dirty="0"/>
+              <a:t>)</a:t>
+            </a:r>
+            <a:endParaRPr lang="ko-KR" altLang="en-US" sz="1200" dirty="0"/>
+          </a:p>
+        </p:txBody>
+      </p:sp>
+      <p:sp>
+        <p:nvSpPr>
+          <p:cNvPr id="45" name="말풍선: 사각형 44">
+            <a:extLst>
+              <a:ext uri="{FF2B5EF4-FFF2-40B4-BE49-F238E27FC236}">
+                <a16:creationId xmlns:a16="http://schemas.microsoft.com/office/drawing/2014/main" id="{86E61707-43BA-D838-2817-04BE5027426D}"/>
+              </a:ext>
+            </a:extLst>
+          </p:cNvPr>
+          <p:cNvSpPr/>
+          <p:nvPr/>
+        </p:nvSpPr>
+        <p:spPr>
+          <a:xfrm>
+            <a:off x="7556178" y="3544021"/>
+            <a:ext cx="2442526" cy="321360"/>
+          </a:xfrm>
+          <a:prstGeom prst="wedgeRectCallout">
+            <a:avLst>
+              <a:gd name="adj1" fmla="val -54826"/>
+              <a:gd name="adj2" fmla="val 41288"/>
+            </a:avLst>
+          </a:prstGeom>
+        </p:spPr>
+        <p:style>
+          <a:lnRef idx="1">
+            <a:schemeClr val="accent4"/>
+          </a:lnRef>
+          <a:fillRef idx="2">
+            <a:schemeClr val="accent4"/>
+          </a:fillRef>
+          <a:effectRef idx="1">
+            <a:schemeClr val="accent4"/>
+          </a:effectRef>
+          <a:fontRef idx="minor">
+            <a:schemeClr val="dk1"/>
+          </a:fontRef>
+        </p:style>
+        <p:txBody>
+          <a:bodyPr rtlCol="0" anchor="ctr"/>
+          <a:lstStyle/>
+          <a:p>
+            <a:r>
+              <a:rPr lang="ko-KR" altLang="en-US" sz="1200" dirty="0"/>
+              <a:t>조운이 퇴각했다</a:t>
+            </a:r>
+            <a:r>
+              <a:rPr lang="en-US" altLang="ko-KR" sz="1200" dirty="0"/>
+              <a:t>.</a:t>
+            </a:r>
+            <a:endParaRPr lang="ko-KR" altLang="en-US" sz="1200" dirty="0"/>
+          </a:p>
+        </p:txBody>
+      </p:sp>
+      <p:sp>
+        <p:nvSpPr>
+          <p:cNvPr id="49" name="말풍선: 사각형 48">
+            <a:extLst>
+              <a:ext uri="{FF2B5EF4-FFF2-40B4-BE49-F238E27FC236}">
+                <a16:creationId xmlns:a16="http://schemas.microsoft.com/office/drawing/2014/main" id="{25C00B79-E27E-5020-B2A2-05BD9649AC87}"/>
+              </a:ext>
+            </a:extLst>
+          </p:cNvPr>
+          <p:cNvSpPr/>
+          <p:nvPr/>
+        </p:nvSpPr>
+        <p:spPr>
+          <a:xfrm>
+            <a:off x="7556178" y="4106573"/>
+            <a:ext cx="2442526" cy="321360"/>
+          </a:xfrm>
+          <a:prstGeom prst="wedgeRectCallout">
+            <a:avLst>
+              <a:gd name="adj1" fmla="val -54826"/>
+              <a:gd name="adj2" fmla="val 41288"/>
+            </a:avLst>
+          </a:prstGeom>
+        </p:spPr>
+        <p:style>
+          <a:lnRef idx="1">
+            <a:schemeClr val="accent4"/>
+          </a:lnRef>
+          <a:fillRef idx="2">
+            <a:schemeClr val="accent4"/>
+          </a:fillRef>
+          <a:effectRef idx="1">
+            <a:schemeClr val="accent4"/>
+          </a:effectRef>
+          <a:fontRef idx="minor">
+            <a:schemeClr val="dk1"/>
+          </a:fontRef>
+        </p:style>
+        <p:txBody>
+          <a:bodyPr rtlCol="0" anchor="ctr"/>
+          <a:lstStyle/>
+          <a:p>
+            <a:r>
+              <a:rPr lang="ko-KR" altLang="en-US" sz="1200" dirty="0"/>
+              <a:t>조운이 </a:t>
+            </a:r>
+            <a:r>
+              <a:rPr lang="en-US" altLang="ko-KR" sz="1200" dirty="0"/>
+              <a:t>‘</a:t>
+            </a:r>
+            <a:r>
+              <a:rPr lang="ko-KR" altLang="en-US" sz="1200" dirty="0"/>
+              <a:t>공포</a:t>
+            </a:r>
+            <a:r>
+              <a:rPr lang="en-US" altLang="ko-KR" sz="1200" dirty="0"/>
+              <a:t>‘ </a:t>
+            </a:r>
+            <a:r>
+              <a:rPr lang="ko-KR" altLang="en-US" sz="1200" dirty="0"/>
+              <a:t>를 시전했다</a:t>
+            </a:r>
+            <a:r>
+              <a:rPr lang="en-US" altLang="ko-KR" sz="1200" dirty="0"/>
+              <a:t> (</a:t>
+            </a:r>
+            <a:r>
+              <a:rPr lang="ko-KR" altLang="en-US" sz="1200" dirty="0" err="1"/>
+              <a:t>유봉</a:t>
+            </a:r>
+            <a:r>
+              <a:rPr lang="en-US" altLang="ko-KR" sz="1200" dirty="0"/>
+              <a:t>)</a:t>
+            </a:r>
+            <a:endParaRPr lang="ko-KR" altLang="en-US" sz="1200" dirty="0"/>
+          </a:p>
+        </p:txBody>
+      </p:sp>
+      <p:sp>
+        <p:nvSpPr>
+          <p:cNvPr id="51" name="말풍선: 사각형 50">
+            <a:extLst>
+              <a:ext uri="{FF2B5EF4-FFF2-40B4-BE49-F238E27FC236}">
+                <a16:creationId xmlns:a16="http://schemas.microsoft.com/office/drawing/2014/main" id="{D8F13769-A3A7-B186-5483-9D2AF12C4043}"/>
+              </a:ext>
+            </a:extLst>
+          </p:cNvPr>
+          <p:cNvSpPr/>
+          <p:nvPr/>
+        </p:nvSpPr>
+        <p:spPr>
+          <a:xfrm>
+            <a:off x="7909787" y="4395273"/>
+            <a:ext cx="2442526" cy="321360"/>
+          </a:xfrm>
+          <a:prstGeom prst="wedgeRectCallout">
+            <a:avLst>
+              <a:gd name="adj1" fmla="val -54826"/>
+              <a:gd name="adj2" fmla="val 41288"/>
+            </a:avLst>
+          </a:prstGeom>
+        </p:spPr>
+        <p:style>
+          <a:lnRef idx="1">
+            <a:schemeClr val="accent4"/>
+          </a:lnRef>
+          <a:fillRef idx="2">
+            <a:schemeClr val="accent4"/>
+          </a:fillRef>
+          <a:effectRef idx="1">
+            <a:schemeClr val="accent4"/>
+          </a:effectRef>
+          <a:fontRef idx="minor">
+            <a:schemeClr val="dk1"/>
+          </a:fontRef>
+        </p:style>
+        <p:txBody>
+          <a:bodyPr rtlCol="0" anchor="ctr"/>
+          <a:lstStyle/>
+          <a:p>
+            <a:r>
+              <a:rPr lang="ko-KR" altLang="en-US" sz="1200" dirty="0"/>
+              <a:t>책략이 성공했다</a:t>
+            </a:r>
+            <a:r>
+              <a:rPr lang="en-US" altLang="ko-KR" sz="1200" dirty="0"/>
+              <a:t>!</a:t>
+            </a:r>
+            <a:r>
+              <a:rPr lang="ko-KR" altLang="en-US" sz="1200" dirty="0"/>
+              <a:t> </a:t>
+            </a:r>
+            <a:r>
+              <a:rPr lang="en-US" altLang="ko-KR" sz="1200" dirty="0"/>
+              <a:t>(</a:t>
+            </a:r>
+            <a:r>
+              <a:rPr lang="ko-KR" altLang="en-US" sz="1200" dirty="0" err="1"/>
+              <a:t>유봉</a:t>
+            </a:r>
+            <a:r>
+              <a:rPr lang="en-US" altLang="ko-KR" sz="1200" dirty="0"/>
+              <a:t> AT</a:t>
+            </a:r>
+            <a:r>
+              <a:rPr lang="ko-KR" altLang="en-US" sz="1200" dirty="0"/>
+              <a:t> 절반</a:t>
+            </a:r>
+            <a:r>
+              <a:rPr lang="en-US" altLang="ko-KR" sz="1200" dirty="0"/>
+              <a:t>)</a:t>
+            </a:r>
+            <a:endParaRPr lang="ko-KR" altLang="en-US" sz="1200" dirty="0"/>
+          </a:p>
+        </p:txBody>
+      </p:sp>
+      <p:sp>
+        <p:nvSpPr>
+          <p:cNvPr id="53" name="말풍선: 사각형 52">
+            <a:extLst>
+              <a:ext uri="{FF2B5EF4-FFF2-40B4-BE49-F238E27FC236}">
+                <a16:creationId xmlns:a16="http://schemas.microsoft.com/office/drawing/2014/main" id="{4E9F739A-8AB8-F275-7955-CEC93F8CE36B}"/>
+              </a:ext>
+            </a:extLst>
+          </p:cNvPr>
+          <p:cNvSpPr/>
+          <p:nvPr/>
+        </p:nvSpPr>
+        <p:spPr>
+          <a:xfrm>
+            <a:off x="7909787" y="4755873"/>
+            <a:ext cx="2442526" cy="321360"/>
+          </a:xfrm>
+          <a:prstGeom prst="wedgeRectCallout">
+            <a:avLst>
+              <a:gd name="adj1" fmla="val -54826"/>
+              <a:gd name="adj2" fmla="val 41288"/>
+            </a:avLst>
+          </a:prstGeom>
+        </p:spPr>
+        <p:style>
+          <a:lnRef idx="1">
+            <a:schemeClr val="accent4"/>
+          </a:lnRef>
+          <a:fillRef idx="2">
+            <a:schemeClr val="accent4"/>
+          </a:fillRef>
+          <a:effectRef idx="1">
+            <a:schemeClr val="accent4"/>
+          </a:effectRef>
+          <a:fontRef idx="minor">
+            <a:schemeClr val="dk1"/>
+          </a:fontRef>
+        </p:style>
+        <p:txBody>
+          <a:bodyPr rtlCol="0" anchor="ctr"/>
+          <a:lstStyle/>
+          <a:p>
+            <a:r>
+              <a:rPr lang="ko-KR" altLang="en-US" sz="1200" dirty="0"/>
+              <a:t>책략이 실패했다</a:t>
+            </a:r>
+            <a:r>
+              <a:rPr lang="en-US" altLang="ko-KR" sz="1200" dirty="0"/>
+              <a:t>.</a:t>
+            </a:r>
+            <a:r>
+              <a:rPr lang="ko-KR" altLang="en-US" sz="1200" dirty="0"/>
+              <a:t> </a:t>
+            </a:r>
+          </a:p>
+        </p:txBody>
+      </p:sp>
+    </p:spTree>
+    <p:extLst>
+      <p:ext uri="{BB962C8B-B14F-4D97-AF65-F5344CB8AC3E}">
+        <p14:creationId xmlns:p14="http://schemas.microsoft.com/office/powerpoint/2010/main" val="3577098664"/>
+      </p:ext>
+    </p:extLst>
+  </p:cSld>
+  <p:clrMapOvr>
+    <a:masterClrMapping/>
+  </p:clrMapOvr>
+</p:sld>
+</file>
+
+<file path=ppt/slides/slide22.xml><?xml version="1.0" encoding="utf-8"?>
+<p:sld xmlns:a="http://schemas.openxmlformats.org/drawingml/2006/main" xmlns:r="http://schemas.openxmlformats.org/officeDocument/2006/relationships" xmlns:p="http://schemas.openxmlformats.org/presentationml/2006/main">
+  <p:cSld>
+    <p:spTree>
+      <p:nvGrpSpPr>
+        <p:cNvPr id="1" name="">
+          <a:extLst>
+            <a:ext uri="{FF2B5EF4-FFF2-40B4-BE49-F238E27FC236}">
+              <a16:creationId xmlns:a16="http://schemas.microsoft.com/office/drawing/2014/main" id="{003B9149-7BD7-30C1-FE62-D6C454F91A8B}"/>
+            </a:ext>
+          </a:extLst>
+        </p:cNvPr>
+        <p:cNvGrpSpPr/>
+        <p:nvPr/>
+      </p:nvGrpSpPr>
+      <p:grpSpPr>
+        <a:xfrm>
+          <a:off x="0" y="0"/>
+          <a:ext cx="0" cy="0"/>
+          <a:chOff x="0" y="0"/>
+          <a:chExt cx="0" cy="0"/>
+        </a:xfrm>
+      </p:grpSpPr>
+      <p:sp>
+        <p:nvSpPr>
+          <p:cNvPr id="4" name="직사각형 3">
+            <a:extLst>
+              <a:ext uri="{FF2B5EF4-FFF2-40B4-BE49-F238E27FC236}">
+                <a16:creationId xmlns:a16="http://schemas.microsoft.com/office/drawing/2014/main" id="{459BC350-8C8D-508B-53F3-2A7AD7C8F2E6}"/>
+              </a:ext>
+            </a:extLst>
+          </p:cNvPr>
+          <p:cNvSpPr/>
+          <p:nvPr/>
+        </p:nvSpPr>
+        <p:spPr>
+          <a:xfrm>
+            <a:off x="4653327" y="549000"/>
+            <a:ext cx="2880000" cy="5760000"/>
+          </a:xfrm>
+          <a:prstGeom prst="rect">
+            <a:avLst/>
+          </a:prstGeom>
+        </p:spPr>
+        <p:style>
+          <a:lnRef idx="2">
+            <a:schemeClr val="accent1">
+              <a:shade val="15000"/>
+            </a:schemeClr>
+          </a:lnRef>
+          <a:fillRef idx="1">
+            <a:schemeClr val="accent1"/>
+          </a:fillRef>
+          <a:effectRef idx="0">
+            <a:schemeClr val="accent1"/>
+          </a:effectRef>
+          <a:fontRef idx="minor">
+            <a:schemeClr val="lt1"/>
+          </a:fontRef>
+        </p:style>
+        <p:txBody>
+          <a:bodyPr rtlCol="0" anchor="ctr"/>
+          <a:lstStyle/>
+          <a:p>
+            <a:pPr algn="ctr"/>
+            <a:endParaRPr lang="ko-KR" altLang="en-US"/>
+          </a:p>
+        </p:txBody>
+      </p:sp>
+      <p:pic>
+        <p:nvPicPr>
+          <p:cNvPr id="3" name="그림 2">
+            <a:extLst>
+              <a:ext uri="{FF2B5EF4-FFF2-40B4-BE49-F238E27FC236}">
+                <a16:creationId xmlns:a16="http://schemas.microsoft.com/office/drawing/2014/main" id="{D792BBC0-89C3-9EC3-82BA-F0B3FFAED25D}"/>
+              </a:ext>
+            </a:extLst>
+          </p:cNvPr>
+          <p:cNvPicPr>
+            <a:picLocks noChangeAspect="1"/>
+          </p:cNvPicPr>
+          <p:nvPr/>
+        </p:nvPicPr>
+        <p:blipFill>
+          <a:blip r:embed="rId2"/>
+          <a:stretch>
+            <a:fillRect/>
+          </a:stretch>
+        </p:blipFill>
+        <p:spPr>
+          <a:xfrm>
+            <a:off x="4653327" y="1953035"/>
+            <a:ext cx="2885345" cy="2951930"/>
+          </a:xfrm>
+          <a:prstGeom prst="rect">
+            <a:avLst/>
+          </a:prstGeom>
+        </p:spPr>
+      </p:pic>
+      <p:pic>
+        <p:nvPicPr>
+          <p:cNvPr id="8" name="그림 7">
+            <a:extLst>
+              <a:ext uri="{FF2B5EF4-FFF2-40B4-BE49-F238E27FC236}">
+                <a16:creationId xmlns:a16="http://schemas.microsoft.com/office/drawing/2014/main" id="{1AAD2199-DC81-B44D-1991-A9E1BA14EAE5}"/>
+              </a:ext>
+            </a:extLst>
+          </p:cNvPr>
+          <p:cNvPicPr>
+            <a:picLocks noChangeAspect="1"/>
+          </p:cNvPicPr>
+          <p:nvPr/>
+        </p:nvPicPr>
+        <p:blipFill>
+          <a:blip r:embed="rId3"/>
+          <a:stretch>
+            <a:fillRect/>
+          </a:stretch>
+        </p:blipFill>
+        <p:spPr>
+          <a:xfrm>
+            <a:off x="4721209" y="615530"/>
+            <a:ext cx="2746802" cy="690756"/>
+          </a:xfrm>
+          <a:prstGeom prst="rect">
+            <a:avLst/>
+          </a:prstGeom>
+        </p:spPr>
+      </p:pic>
+      <p:sp>
+        <p:nvSpPr>
+          <p:cNvPr id="5" name="순서도: 수행의 시작/종료 4">
+            <a:extLst>
+              <a:ext uri="{FF2B5EF4-FFF2-40B4-BE49-F238E27FC236}">
+                <a16:creationId xmlns:a16="http://schemas.microsoft.com/office/drawing/2014/main" id="{1FCE1608-399B-59E0-7116-0B8A987E00B0}"/>
+              </a:ext>
+            </a:extLst>
+          </p:cNvPr>
+          <p:cNvSpPr/>
+          <p:nvPr/>
+        </p:nvSpPr>
+        <p:spPr>
+          <a:xfrm>
+            <a:off x="6597154" y="603431"/>
+            <a:ext cx="859971" cy="264728"/>
+          </a:xfrm>
+          <a:prstGeom prst="flowChartTerminator">
+            <a:avLst/>
+          </a:prstGeom>
+        </p:spPr>
+        <p:style>
+          <a:lnRef idx="2">
+            <a:schemeClr val="accent2">
+              <a:shade val="15000"/>
+            </a:schemeClr>
+          </a:lnRef>
+          <a:fillRef idx="1">
+            <a:schemeClr val="accent2"/>
+          </a:fillRef>
+          <a:effectRef idx="0">
+            <a:schemeClr val="accent2"/>
+          </a:effectRef>
+          <a:fontRef idx="minor">
+            <a:schemeClr val="lt1"/>
+          </a:fontRef>
+        </p:style>
+        <p:txBody>
+          <a:bodyPr rtlCol="0" anchor="ctr"/>
+          <a:lstStyle/>
+          <a:p>
+            <a:pPr algn="ctr"/>
+            <a:r>
+              <a:rPr lang="ko-KR" altLang="en-US" sz="1200" b="1" dirty="0"/>
+              <a:t>항복</a:t>
+            </a:r>
+          </a:p>
+        </p:txBody>
+      </p:sp>
+      <p:pic>
+        <p:nvPicPr>
+          <p:cNvPr id="10" name="그림 9">
+            <a:extLst>
+              <a:ext uri="{FF2B5EF4-FFF2-40B4-BE49-F238E27FC236}">
+                <a16:creationId xmlns:a16="http://schemas.microsoft.com/office/drawing/2014/main" id="{CBEB9718-ADCD-297C-E28D-07AA86455771}"/>
+              </a:ext>
+            </a:extLst>
+          </p:cNvPr>
+          <p:cNvPicPr>
+            <a:picLocks noChangeAspect="1"/>
+          </p:cNvPicPr>
+          <p:nvPr/>
+        </p:nvPicPr>
+        <p:blipFill>
+          <a:blip r:embed="rId4"/>
+          <a:srcRect b="21463"/>
+          <a:stretch>
+            <a:fillRect/>
+          </a:stretch>
+        </p:blipFill>
+        <p:spPr>
+          <a:xfrm>
+            <a:off x="5617895" y="4962581"/>
+            <a:ext cx="1850116" cy="578247"/>
+          </a:xfrm>
+          <a:prstGeom prst="rect">
+            <a:avLst/>
+          </a:prstGeom>
+        </p:spPr>
+      </p:pic>
+      <p:pic>
+        <p:nvPicPr>
+          <p:cNvPr id="13" name="그림 12">
+            <a:extLst>
+              <a:ext uri="{FF2B5EF4-FFF2-40B4-BE49-F238E27FC236}">
+                <a16:creationId xmlns:a16="http://schemas.microsoft.com/office/drawing/2014/main" id="{64A9EFA8-4268-6A59-0DEC-8264010AE435}"/>
+              </a:ext>
+            </a:extLst>
+          </p:cNvPr>
+          <p:cNvPicPr>
+            <a:picLocks noChangeAspect="1"/>
+          </p:cNvPicPr>
+          <p:nvPr/>
+        </p:nvPicPr>
+        <p:blipFill>
+          <a:blip r:embed="rId5"/>
+          <a:stretch>
+            <a:fillRect/>
+          </a:stretch>
+        </p:blipFill>
+        <p:spPr>
+          <a:xfrm>
+            <a:off x="4740984" y="4962581"/>
+            <a:ext cx="800141" cy="819192"/>
+          </a:xfrm>
+          <a:prstGeom prst="rect">
+            <a:avLst/>
+          </a:prstGeom>
+        </p:spPr>
+      </p:pic>
+      <p:grpSp>
+        <p:nvGrpSpPr>
+          <p:cNvPr id="24" name="그룹 23">
+            <a:extLst>
+              <a:ext uri="{FF2B5EF4-FFF2-40B4-BE49-F238E27FC236}">
+                <a16:creationId xmlns:a16="http://schemas.microsoft.com/office/drawing/2014/main" id="{15E95600-C030-18D9-33E7-D450FA60C0EA}"/>
+              </a:ext>
+            </a:extLst>
+          </p:cNvPr>
+          <p:cNvGrpSpPr/>
+          <p:nvPr/>
+        </p:nvGrpSpPr>
+        <p:grpSpPr>
+          <a:xfrm>
+            <a:off x="4711809" y="5962689"/>
+            <a:ext cx="2799745" cy="268895"/>
+            <a:chOff x="4681825" y="5864715"/>
+            <a:chExt cx="3043238" cy="249851"/>
+          </a:xfrm>
+        </p:grpSpPr>
+        <p:sp>
+          <p:nvSpPr>
+            <p:cNvPr id="15" name="순서도: 수행의 시작/종료 14">
+              <a:extLst>
+                <a:ext uri="{FF2B5EF4-FFF2-40B4-BE49-F238E27FC236}">
+                  <a16:creationId xmlns:a16="http://schemas.microsoft.com/office/drawing/2014/main" id="{7A89AB9E-FE0F-5C1E-6C9D-B97086BB4817}"/>
+                </a:ext>
+              </a:extLst>
+            </p:cNvPr>
+            <p:cNvSpPr/>
+            <p:nvPr/>
+          </p:nvSpPr>
+          <p:spPr>
+            <a:xfrm>
+              <a:off x="4681825" y="5864715"/>
+              <a:ext cx="562971" cy="244852"/>
+            </a:xfrm>
+            <a:prstGeom prst="flowChartTerminator">
+              <a:avLst/>
+            </a:prstGeom>
+          </p:spPr>
+          <p:style>
+            <a:lnRef idx="2">
+              <a:schemeClr val="accent3">
+                <a:shade val="15000"/>
+              </a:schemeClr>
+            </a:lnRef>
+            <a:fillRef idx="1">
+              <a:schemeClr val="accent3"/>
+            </a:fillRef>
+            <a:effectRef idx="0">
+              <a:schemeClr val="accent3"/>
+            </a:effectRef>
+            <a:fontRef idx="minor">
+              <a:schemeClr val="lt1"/>
+            </a:fontRef>
+          </p:style>
+          <p:txBody>
+            <a:bodyPr rtlCol="0" anchor="ctr"/>
+            <a:lstStyle/>
+            <a:p>
+              <a:pPr algn="ctr"/>
+              <a:r>
+                <a:rPr lang="ko-KR" altLang="en-US" sz="1100" b="1" dirty="0"/>
+                <a:t>이동</a:t>
+              </a:r>
+            </a:p>
+          </p:txBody>
+        </p:sp>
+        <p:sp>
+          <p:nvSpPr>
+            <p:cNvPr id="17" name="순서도: 수행의 시작/종료 16">
+              <a:extLst>
+                <a:ext uri="{FF2B5EF4-FFF2-40B4-BE49-F238E27FC236}">
+                  <a16:creationId xmlns:a16="http://schemas.microsoft.com/office/drawing/2014/main" id="{15F17DE6-A901-95C0-D821-C66393F9D6D0}"/>
+                </a:ext>
+              </a:extLst>
+            </p:cNvPr>
+            <p:cNvSpPr/>
+            <p:nvPr/>
+          </p:nvSpPr>
+          <p:spPr>
+            <a:xfrm>
+              <a:off x="5298348" y="5869714"/>
+              <a:ext cx="562971" cy="244852"/>
+            </a:xfrm>
+            <a:prstGeom prst="flowChartTerminator">
+              <a:avLst/>
+            </a:prstGeom>
+          </p:spPr>
+          <p:style>
+            <a:lnRef idx="2">
+              <a:schemeClr val="accent3">
+                <a:shade val="15000"/>
+              </a:schemeClr>
+            </a:lnRef>
+            <a:fillRef idx="1">
+              <a:schemeClr val="accent3"/>
+            </a:fillRef>
+            <a:effectRef idx="0">
+              <a:schemeClr val="accent3"/>
+            </a:effectRef>
+            <a:fontRef idx="minor">
+              <a:schemeClr val="lt1"/>
+            </a:fontRef>
+          </p:style>
+          <p:txBody>
+            <a:bodyPr rtlCol="0" anchor="ctr"/>
+            <a:lstStyle/>
+            <a:p>
+              <a:pPr algn="ctr"/>
+              <a:r>
+                <a:rPr lang="ko-KR" altLang="en-US" sz="1100" b="1" dirty="0"/>
+                <a:t>공격</a:t>
+              </a:r>
+            </a:p>
+          </p:txBody>
+        </p:sp>
+        <p:sp>
+          <p:nvSpPr>
+            <p:cNvPr id="19" name="순서도: 수행의 시작/종료 18">
+              <a:extLst>
+                <a:ext uri="{FF2B5EF4-FFF2-40B4-BE49-F238E27FC236}">
+                  <a16:creationId xmlns:a16="http://schemas.microsoft.com/office/drawing/2014/main" id="{EA1D1C4B-9D2D-7381-87F6-417B5AB21EEC}"/>
+                </a:ext>
+              </a:extLst>
+            </p:cNvPr>
+            <p:cNvSpPr/>
+            <p:nvPr/>
+          </p:nvSpPr>
+          <p:spPr>
+            <a:xfrm>
+              <a:off x="5917706" y="5864715"/>
+              <a:ext cx="562971" cy="244852"/>
+            </a:xfrm>
+            <a:prstGeom prst="flowChartTerminator">
+              <a:avLst/>
+            </a:prstGeom>
+          </p:spPr>
+          <p:style>
+            <a:lnRef idx="2">
+              <a:schemeClr val="accent3">
+                <a:shade val="15000"/>
+              </a:schemeClr>
+            </a:lnRef>
+            <a:fillRef idx="1">
+              <a:schemeClr val="accent3"/>
+            </a:fillRef>
+            <a:effectRef idx="0">
+              <a:schemeClr val="accent3"/>
+            </a:effectRef>
+            <a:fontRef idx="minor">
+              <a:schemeClr val="lt1"/>
+            </a:fontRef>
+          </p:style>
+          <p:txBody>
+            <a:bodyPr rtlCol="0" anchor="ctr"/>
+            <a:lstStyle/>
+            <a:p>
+              <a:pPr algn="ctr"/>
+              <a:r>
+                <a:rPr lang="ko-KR" altLang="en-US" sz="1100" b="1" dirty="0"/>
+                <a:t>책략</a:t>
+              </a:r>
+            </a:p>
+          </p:txBody>
+        </p:sp>
+        <p:sp>
+          <p:nvSpPr>
+            <p:cNvPr id="21" name="순서도: 수행의 시작/종료 20">
+              <a:extLst>
+                <a:ext uri="{FF2B5EF4-FFF2-40B4-BE49-F238E27FC236}">
+                  <a16:creationId xmlns:a16="http://schemas.microsoft.com/office/drawing/2014/main" id="{88562828-DFCE-3B9F-EC64-D9EDEC0085DA}"/>
+                </a:ext>
+              </a:extLst>
+            </p:cNvPr>
+            <p:cNvSpPr/>
+            <p:nvPr/>
+          </p:nvSpPr>
+          <p:spPr>
+            <a:xfrm>
+              <a:off x="6539899" y="5864715"/>
+              <a:ext cx="562971" cy="244852"/>
+            </a:xfrm>
+            <a:prstGeom prst="flowChartTerminator">
+              <a:avLst/>
+            </a:prstGeom>
+          </p:spPr>
+          <p:style>
+            <a:lnRef idx="2">
+              <a:schemeClr val="accent3">
+                <a:shade val="15000"/>
+              </a:schemeClr>
+            </a:lnRef>
+            <a:fillRef idx="1">
+              <a:schemeClr val="accent3"/>
+            </a:fillRef>
+            <a:effectRef idx="0">
+              <a:schemeClr val="accent3"/>
+            </a:effectRef>
+            <a:fontRef idx="minor">
+              <a:schemeClr val="lt1"/>
+            </a:fontRef>
+          </p:style>
+          <p:txBody>
+            <a:bodyPr rtlCol="0" anchor="ctr"/>
+            <a:lstStyle/>
+            <a:p>
+              <a:pPr algn="ctr"/>
+              <a:r>
+                <a:rPr lang="ko-KR" altLang="en-US" sz="1100" b="1" dirty="0"/>
+                <a:t>명상</a:t>
+              </a:r>
+            </a:p>
+          </p:txBody>
+        </p:sp>
+        <p:sp>
+          <p:nvSpPr>
+            <p:cNvPr id="23" name="순서도: 수행의 시작/종료 22">
+              <a:extLst>
+                <a:ext uri="{FF2B5EF4-FFF2-40B4-BE49-F238E27FC236}">
+                  <a16:creationId xmlns:a16="http://schemas.microsoft.com/office/drawing/2014/main" id="{591F091C-DB4C-FF2A-1B9E-3EBD00CBDE3B}"/>
+                </a:ext>
+              </a:extLst>
+            </p:cNvPr>
+            <p:cNvSpPr/>
+            <p:nvPr/>
+          </p:nvSpPr>
+          <p:spPr>
+            <a:xfrm>
+              <a:off x="7162092" y="5864715"/>
+              <a:ext cx="562971" cy="244852"/>
+            </a:xfrm>
+            <a:prstGeom prst="flowChartTerminator">
+              <a:avLst/>
+            </a:prstGeom>
+          </p:spPr>
+          <p:style>
+            <a:lnRef idx="2">
+              <a:schemeClr val="accent3">
+                <a:shade val="15000"/>
+              </a:schemeClr>
+            </a:lnRef>
+            <a:fillRef idx="1">
+              <a:schemeClr val="accent3"/>
+            </a:fillRef>
+            <a:effectRef idx="0">
+              <a:schemeClr val="accent3"/>
+            </a:effectRef>
+            <a:fontRef idx="minor">
+              <a:schemeClr val="lt1"/>
+            </a:fontRef>
+          </p:style>
+          <p:txBody>
+            <a:bodyPr rtlCol="0" anchor="ctr"/>
+            <a:lstStyle/>
+            <a:p>
+              <a:pPr algn="ctr"/>
+              <a:r>
+                <a:rPr lang="ko-KR" altLang="en-US" sz="1100" b="1" dirty="0"/>
+                <a:t>종료</a:t>
+              </a:r>
+            </a:p>
+          </p:txBody>
+        </p:sp>
+      </p:grpSp>
+      <p:sp>
+        <p:nvSpPr>
+          <p:cNvPr id="27" name="말풍선: 사각형 26">
+            <a:extLst>
+              <a:ext uri="{FF2B5EF4-FFF2-40B4-BE49-F238E27FC236}">
+                <a16:creationId xmlns:a16="http://schemas.microsoft.com/office/drawing/2014/main" id="{CF81F5C9-50A9-5060-F770-96E2A3BB4FE0}"/>
+              </a:ext>
+            </a:extLst>
+          </p:cNvPr>
+          <p:cNvSpPr/>
+          <p:nvPr/>
+        </p:nvSpPr>
+        <p:spPr>
+          <a:xfrm>
+            <a:off x="4806300" y="1355694"/>
+            <a:ext cx="2442526" cy="255814"/>
+          </a:xfrm>
+          <a:prstGeom prst="wedgeRectCallout">
+            <a:avLst>
+              <a:gd name="adj1" fmla="val -54826"/>
+              <a:gd name="adj2" fmla="val 41288"/>
+            </a:avLst>
+          </a:prstGeom>
+        </p:spPr>
+        <p:style>
+          <a:lnRef idx="1">
+            <a:schemeClr val="accent4"/>
+          </a:lnRef>
+          <a:fillRef idx="2">
+            <a:schemeClr val="accent4"/>
+          </a:fillRef>
+          <a:effectRef idx="1">
+            <a:schemeClr val="accent4"/>
+          </a:effectRef>
+          <a:fontRef idx="minor">
+            <a:schemeClr val="dk1"/>
+          </a:fontRef>
+        </p:style>
+        <p:txBody>
+          <a:bodyPr rtlCol="0" anchor="ctr"/>
+          <a:lstStyle/>
+          <a:p>
+            <a:pPr algn="ctr"/>
+            <a:endParaRPr lang="ko-KR" altLang="en-US"/>
+          </a:p>
+        </p:txBody>
+      </p:sp>
+      <p:sp>
+        <p:nvSpPr>
+          <p:cNvPr id="29" name="말풍선: 사각형 28">
+            <a:extLst>
+              <a:ext uri="{FF2B5EF4-FFF2-40B4-BE49-F238E27FC236}">
+                <a16:creationId xmlns:a16="http://schemas.microsoft.com/office/drawing/2014/main" id="{8B453056-4D6A-5BB5-872E-9104FB7F99DC}"/>
+              </a:ext>
+            </a:extLst>
+          </p:cNvPr>
+          <p:cNvSpPr/>
+          <p:nvPr/>
+        </p:nvSpPr>
+        <p:spPr>
+          <a:xfrm>
+            <a:off x="4806300" y="1474961"/>
+            <a:ext cx="2442526" cy="255814"/>
+          </a:xfrm>
+          <a:prstGeom prst="wedgeRectCallout">
+            <a:avLst>
+              <a:gd name="adj1" fmla="val -54826"/>
+              <a:gd name="adj2" fmla="val 41288"/>
+            </a:avLst>
+          </a:prstGeom>
+        </p:spPr>
+        <p:style>
+          <a:lnRef idx="1">
+            <a:schemeClr val="accent4"/>
+          </a:lnRef>
+          <a:fillRef idx="2">
+            <a:schemeClr val="accent4"/>
+          </a:fillRef>
+          <a:effectRef idx="1">
+            <a:schemeClr val="accent4"/>
+          </a:effectRef>
+          <a:fontRef idx="minor">
+            <a:schemeClr val="dk1"/>
+          </a:fontRef>
+        </p:style>
+        <p:txBody>
+          <a:bodyPr rtlCol="0" anchor="ctr"/>
+          <a:lstStyle/>
+          <a:p>
+            <a:pPr algn="ctr"/>
+            <a:endParaRPr lang="ko-KR" altLang="en-US"/>
+          </a:p>
+        </p:txBody>
+      </p:sp>
+      <p:sp>
+        <p:nvSpPr>
+          <p:cNvPr id="31" name="말풍선: 사각형 30">
+            <a:extLst>
+              <a:ext uri="{FF2B5EF4-FFF2-40B4-BE49-F238E27FC236}">
+                <a16:creationId xmlns:a16="http://schemas.microsoft.com/office/drawing/2014/main" id="{E68257D4-DB44-DDAC-95DA-825B6279325A}"/>
+              </a:ext>
+            </a:extLst>
+          </p:cNvPr>
+          <p:cNvSpPr/>
+          <p:nvPr/>
+        </p:nvSpPr>
+        <p:spPr>
+          <a:xfrm>
+            <a:off x="4886506" y="1574059"/>
+            <a:ext cx="2442526" cy="321360"/>
+          </a:xfrm>
+          <a:prstGeom prst="wedgeRectCallout">
+            <a:avLst>
+              <a:gd name="adj1" fmla="val -54826"/>
+              <a:gd name="adj2" fmla="val 41288"/>
+            </a:avLst>
+          </a:prstGeom>
+        </p:spPr>
+        <p:style>
+          <a:lnRef idx="1">
+            <a:schemeClr val="accent4"/>
+          </a:lnRef>
+          <a:fillRef idx="2">
+            <a:schemeClr val="accent4"/>
+          </a:fillRef>
+          <a:effectRef idx="1">
+            <a:schemeClr val="accent4"/>
+          </a:effectRef>
+          <a:fontRef idx="minor">
+            <a:schemeClr val="dk1"/>
+          </a:fontRef>
+        </p:style>
+        <p:txBody>
+          <a:bodyPr rtlCol="0" anchor="ctr"/>
+          <a:lstStyle/>
+          <a:p>
+            <a:r>
+              <a:rPr lang="ko-KR" altLang="en-US" sz="1200" dirty="0"/>
+              <a:t>조운이 이동했다</a:t>
+            </a:r>
+            <a:r>
+              <a:rPr lang="en-US" altLang="ko-KR" sz="1200" dirty="0"/>
+              <a:t>. (A3 </a:t>
+            </a:r>
+            <a:r>
+              <a:rPr lang="en-US" altLang="ko-KR" sz="1200" dirty="0">
+                <a:sym typeface="Wingdings" panose="05000000000000000000" pitchFamily="2" charset="2"/>
+              </a:rPr>
+              <a:t> E3)</a:t>
+            </a:r>
+            <a:endParaRPr lang="ko-KR" altLang="en-US" sz="1200" dirty="0"/>
+          </a:p>
+        </p:txBody>
+      </p:sp>
+      <p:sp>
+        <p:nvSpPr>
+          <p:cNvPr id="2" name="사각형: 둥근 모서리 1">
+            <a:extLst>
+              <a:ext uri="{FF2B5EF4-FFF2-40B4-BE49-F238E27FC236}">
+                <a16:creationId xmlns:a16="http://schemas.microsoft.com/office/drawing/2014/main" id="{FA51F27B-264F-54AF-1A05-039E16882D93}"/>
+              </a:ext>
+            </a:extLst>
+          </p:cNvPr>
+          <p:cNvSpPr/>
+          <p:nvPr/>
+        </p:nvSpPr>
+        <p:spPr>
+          <a:xfrm>
+            <a:off x="5617895" y="5598444"/>
+            <a:ext cx="1839230" cy="281449"/>
+          </a:xfrm>
+          <a:prstGeom prst="roundRect">
+            <a:avLst/>
+          </a:prstGeom>
+        </p:spPr>
+        <p:style>
+          <a:lnRef idx="1">
+            <a:schemeClr val="accent5"/>
+          </a:lnRef>
+          <a:fillRef idx="2">
+            <a:schemeClr val="accent5"/>
+          </a:fillRef>
+          <a:effectRef idx="1">
+            <a:schemeClr val="accent5"/>
+          </a:effectRef>
+          <a:fontRef idx="minor">
+            <a:schemeClr val="dk1"/>
+          </a:fontRef>
+        </p:style>
+        <p:txBody>
+          <a:bodyPr rtlCol="0" anchor="ctr"/>
+          <a:lstStyle/>
+          <a:p>
+            <a:pPr algn="ctr"/>
+            <a:r>
+              <a:rPr lang="ko-KR" altLang="en-US" sz="1100" dirty="0"/>
+              <a:t>내가 걸린 버프</a:t>
+            </a:r>
+            <a:r>
+              <a:rPr lang="en-US" altLang="ko-KR" sz="1100" dirty="0"/>
+              <a:t>, </a:t>
+            </a:r>
+            <a:r>
+              <a:rPr lang="ko-KR" altLang="en-US" sz="1100" dirty="0" err="1"/>
+              <a:t>디버프들</a:t>
+            </a:r>
+            <a:endParaRPr lang="ko-KR" altLang="en-US" sz="1100" dirty="0"/>
+          </a:p>
+        </p:txBody>
+      </p:sp>
+      <p:sp>
+        <p:nvSpPr>
+          <p:cNvPr id="7" name="TextBox 6">
+            <a:extLst>
+              <a:ext uri="{FF2B5EF4-FFF2-40B4-BE49-F238E27FC236}">
+                <a16:creationId xmlns:a16="http://schemas.microsoft.com/office/drawing/2014/main" id="{518A9A8A-472B-D94F-A5D5-3542D8CF8921}"/>
+              </a:ext>
+            </a:extLst>
+          </p:cNvPr>
+          <p:cNvSpPr txBox="1"/>
+          <p:nvPr/>
+        </p:nvSpPr>
+        <p:spPr>
+          <a:xfrm>
+            <a:off x="404039" y="341501"/>
+            <a:ext cx="3242676" cy="869790"/>
+          </a:xfrm>
+          <a:prstGeom prst="rect">
+            <a:avLst/>
+          </a:prstGeom>
+          <a:noFill/>
+        </p:spPr>
+        <p:txBody>
+          <a:bodyPr wrap="square" rtlCol="0">
+            <a:spAutoFit/>
+          </a:bodyPr>
+          <a:lstStyle/>
+          <a:p>
+            <a:pPr>
+              <a:lnSpc>
+                <a:spcPct val="150000"/>
+              </a:lnSpc>
+            </a:pPr>
+            <a:r>
+              <a:rPr lang="ko-KR" altLang="en-US" b="1" dirty="0"/>
+              <a:t>모바일 화면 기준</a:t>
+            </a:r>
+            <a:r>
+              <a:rPr lang="en-US" altLang="ko-KR" b="1" dirty="0"/>
+              <a:t>,</a:t>
+            </a:r>
+            <a:endParaRPr lang="en-US" altLang="ko-KR" dirty="0"/>
+          </a:p>
+          <a:p>
+            <a:pPr marL="285750" indent="-285750">
+              <a:lnSpc>
+                <a:spcPct val="150000"/>
+              </a:lnSpc>
+              <a:buFont typeface="Arial" panose="020B0604020202020204" pitchFamily="34" charset="0"/>
+              <a:buChar char="•"/>
+            </a:pPr>
+            <a:r>
+              <a:rPr lang="en-US" altLang="ko-KR" b="1" dirty="0"/>
+              <a:t>4 </a:t>
+            </a:r>
+            <a:r>
+              <a:rPr lang="ko-KR" altLang="en-US" b="1" dirty="0"/>
+              <a:t>내 차례</a:t>
+            </a:r>
+            <a:r>
+              <a:rPr lang="en-US" altLang="ko-KR" b="1" dirty="0"/>
+              <a:t>: </a:t>
+            </a:r>
+            <a:r>
+              <a:rPr lang="ko-KR" altLang="en-US" b="1" dirty="0"/>
+              <a:t>포커스 됨</a:t>
+            </a:r>
+            <a:endParaRPr lang="en-US" altLang="ko-KR" b="1" dirty="0"/>
+          </a:p>
+        </p:txBody>
+      </p:sp>
+    </p:spTree>
+    <p:extLst>
+      <p:ext uri="{BB962C8B-B14F-4D97-AF65-F5344CB8AC3E}">
+        <p14:creationId xmlns:p14="http://schemas.microsoft.com/office/powerpoint/2010/main" val="1803039248"/>
+      </p:ext>
+    </p:extLst>
+  </p:cSld>
+  <p:clrMapOvr>
+    <a:masterClrMapping/>
+  </p:clrMapOvr>
+</p:sld>
+</file>
+
+<file path=ppt/slides/slide23.xml><?xml version="1.0" encoding="utf-8"?>
+<p:sld xmlns:a="http://schemas.openxmlformats.org/drawingml/2006/main" xmlns:r="http://schemas.openxmlformats.org/officeDocument/2006/relationships" xmlns:p="http://schemas.openxmlformats.org/presentationml/2006/main">
+  <p:cSld>
+    <p:spTree>
+      <p:nvGrpSpPr>
+        <p:cNvPr id="1" name="">
+          <a:extLst>
+            <a:ext uri="{FF2B5EF4-FFF2-40B4-BE49-F238E27FC236}">
+              <a16:creationId xmlns:a16="http://schemas.microsoft.com/office/drawing/2014/main" id="{6D324BEC-C5A9-0352-A75E-8EB83EC75679}"/>
+            </a:ext>
+          </a:extLst>
+        </p:cNvPr>
+        <p:cNvGrpSpPr/>
+        <p:nvPr/>
+      </p:nvGrpSpPr>
+      <p:grpSpPr>
+        <a:xfrm>
+          <a:off x="0" y="0"/>
+          <a:ext cx="0" cy="0"/>
+          <a:chOff x="0" y="0"/>
+          <a:chExt cx="0" cy="0"/>
+        </a:xfrm>
+      </p:grpSpPr>
+      <p:sp>
+        <p:nvSpPr>
+          <p:cNvPr id="4" name="직사각형 3">
+            <a:extLst>
+              <a:ext uri="{FF2B5EF4-FFF2-40B4-BE49-F238E27FC236}">
+                <a16:creationId xmlns:a16="http://schemas.microsoft.com/office/drawing/2014/main" id="{EB0132BE-9CC7-1549-4048-3CC848E3AF07}"/>
+              </a:ext>
+            </a:extLst>
+          </p:cNvPr>
+          <p:cNvSpPr/>
+          <p:nvPr/>
+        </p:nvSpPr>
+        <p:spPr>
+          <a:xfrm>
+            <a:off x="4653327" y="549000"/>
+            <a:ext cx="2880000" cy="5760000"/>
+          </a:xfrm>
+          <a:prstGeom prst="rect">
+            <a:avLst/>
+          </a:prstGeom>
+        </p:spPr>
+        <p:style>
+          <a:lnRef idx="2">
+            <a:schemeClr val="accent1">
+              <a:shade val="15000"/>
+            </a:schemeClr>
+          </a:lnRef>
+          <a:fillRef idx="1">
+            <a:schemeClr val="accent1"/>
+          </a:fillRef>
+          <a:effectRef idx="0">
+            <a:schemeClr val="accent1"/>
+          </a:effectRef>
+          <a:fontRef idx="minor">
+            <a:schemeClr val="lt1"/>
+          </a:fontRef>
+        </p:style>
+        <p:txBody>
+          <a:bodyPr rtlCol="0" anchor="ctr"/>
+          <a:lstStyle/>
+          <a:p>
+            <a:pPr algn="ctr"/>
+            <a:endParaRPr lang="ko-KR" altLang="en-US"/>
+          </a:p>
+        </p:txBody>
+      </p:sp>
+      <p:pic>
+        <p:nvPicPr>
+          <p:cNvPr id="3" name="그림 2">
+            <a:extLst>
+              <a:ext uri="{FF2B5EF4-FFF2-40B4-BE49-F238E27FC236}">
+                <a16:creationId xmlns:a16="http://schemas.microsoft.com/office/drawing/2014/main" id="{0EB01D27-C47A-CCE4-5CDF-4316B399B6C8}"/>
+              </a:ext>
+            </a:extLst>
+          </p:cNvPr>
+          <p:cNvPicPr>
+            <a:picLocks noChangeAspect="1"/>
+          </p:cNvPicPr>
+          <p:nvPr/>
+        </p:nvPicPr>
+        <p:blipFill>
+          <a:blip r:embed="rId2"/>
+          <a:stretch>
+            <a:fillRect/>
+          </a:stretch>
+        </p:blipFill>
+        <p:spPr>
+          <a:xfrm>
+            <a:off x="4653327" y="1953035"/>
+            <a:ext cx="2885345" cy="2951930"/>
+          </a:xfrm>
+          <a:prstGeom prst="rect">
+            <a:avLst/>
+          </a:prstGeom>
+        </p:spPr>
+      </p:pic>
+      <p:pic>
+        <p:nvPicPr>
+          <p:cNvPr id="8" name="그림 7">
+            <a:extLst>
+              <a:ext uri="{FF2B5EF4-FFF2-40B4-BE49-F238E27FC236}">
+                <a16:creationId xmlns:a16="http://schemas.microsoft.com/office/drawing/2014/main" id="{90DBED00-A46F-3B03-ADEA-35A81444CB32}"/>
+              </a:ext>
+            </a:extLst>
+          </p:cNvPr>
+          <p:cNvPicPr>
+            <a:picLocks noChangeAspect="1"/>
+          </p:cNvPicPr>
+          <p:nvPr/>
+        </p:nvPicPr>
+        <p:blipFill>
+          <a:blip r:embed="rId3"/>
+          <a:stretch>
+            <a:fillRect/>
+          </a:stretch>
+        </p:blipFill>
+        <p:spPr>
+          <a:xfrm>
+            <a:off x="4721209" y="615530"/>
+            <a:ext cx="2746802" cy="690756"/>
+          </a:xfrm>
+          <a:prstGeom prst="rect">
+            <a:avLst/>
+          </a:prstGeom>
+        </p:spPr>
+      </p:pic>
+      <p:sp>
+        <p:nvSpPr>
+          <p:cNvPr id="5" name="순서도: 수행의 시작/종료 4">
+            <a:extLst>
+              <a:ext uri="{FF2B5EF4-FFF2-40B4-BE49-F238E27FC236}">
+                <a16:creationId xmlns:a16="http://schemas.microsoft.com/office/drawing/2014/main" id="{701EA89D-9079-73A1-2FFC-A034D0B7BCF5}"/>
+              </a:ext>
+            </a:extLst>
+          </p:cNvPr>
+          <p:cNvSpPr/>
+          <p:nvPr/>
+        </p:nvSpPr>
+        <p:spPr>
+          <a:xfrm>
+            <a:off x="6597154" y="603431"/>
+            <a:ext cx="859971" cy="264728"/>
+          </a:xfrm>
+          <a:prstGeom prst="flowChartTerminator">
+            <a:avLst/>
+          </a:prstGeom>
+        </p:spPr>
+        <p:style>
+          <a:lnRef idx="2">
+            <a:schemeClr val="accent2">
+              <a:shade val="15000"/>
+            </a:schemeClr>
+          </a:lnRef>
+          <a:fillRef idx="1">
+            <a:schemeClr val="accent2"/>
+          </a:fillRef>
+          <a:effectRef idx="0">
+            <a:schemeClr val="accent2"/>
+          </a:effectRef>
+          <a:fontRef idx="minor">
+            <a:schemeClr val="lt1"/>
+          </a:fontRef>
+        </p:style>
+        <p:txBody>
+          <a:bodyPr rtlCol="0" anchor="ctr"/>
+          <a:lstStyle/>
+          <a:p>
+            <a:pPr algn="ctr"/>
+            <a:r>
+              <a:rPr lang="ko-KR" altLang="en-US" sz="1200" b="1" dirty="0"/>
+              <a:t>항복</a:t>
+            </a:r>
+          </a:p>
+        </p:txBody>
+      </p:sp>
+      <p:pic>
+        <p:nvPicPr>
+          <p:cNvPr id="10" name="그림 9">
+            <a:extLst>
+              <a:ext uri="{FF2B5EF4-FFF2-40B4-BE49-F238E27FC236}">
+                <a16:creationId xmlns:a16="http://schemas.microsoft.com/office/drawing/2014/main" id="{3A332B51-3717-4A08-71CB-30E43A1EBC4A}"/>
+              </a:ext>
+            </a:extLst>
+          </p:cNvPr>
+          <p:cNvPicPr>
+            <a:picLocks noChangeAspect="1"/>
+          </p:cNvPicPr>
+          <p:nvPr/>
+        </p:nvPicPr>
+        <p:blipFill>
+          <a:blip r:embed="rId4"/>
+          <a:srcRect b="21463"/>
+          <a:stretch>
+            <a:fillRect/>
+          </a:stretch>
+        </p:blipFill>
+        <p:spPr>
+          <a:xfrm>
+            <a:off x="5617895" y="4962581"/>
+            <a:ext cx="1850116" cy="578247"/>
+          </a:xfrm>
+          <a:prstGeom prst="rect">
+            <a:avLst/>
+          </a:prstGeom>
+        </p:spPr>
+      </p:pic>
+      <p:pic>
+        <p:nvPicPr>
+          <p:cNvPr id="13" name="그림 12">
+            <a:extLst>
+              <a:ext uri="{FF2B5EF4-FFF2-40B4-BE49-F238E27FC236}">
+                <a16:creationId xmlns:a16="http://schemas.microsoft.com/office/drawing/2014/main" id="{77036FA7-3AB9-D370-72C6-00200B92C812}"/>
+              </a:ext>
+            </a:extLst>
+          </p:cNvPr>
+          <p:cNvPicPr>
+            <a:picLocks noChangeAspect="1"/>
+          </p:cNvPicPr>
+          <p:nvPr/>
+        </p:nvPicPr>
+        <p:blipFill>
+          <a:blip r:embed="rId5"/>
+          <a:stretch>
+            <a:fillRect/>
+          </a:stretch>
+        </p:blipFill>
+        <p:spPr>
+          <a:xfrm>
+            <a:off x="4740984" y="4962581"/>
+            <a:ext cx="800141" cy="819192"/>
+          </a:xfrm>
+          <a:prstGeom prst="rect">
+            <a:avLst/>
+          </a:prstGeom>
+        </p:spPr>
+      </p:pic>
+      <p:grpSp>
+        <p:nvGrpSpPr>
+          <p:cNvPr id="24" name="그룹 23">
+            <a:extLst>
+              <a:ext uri="{FF2B5EF4-FFF2-40B4-BE49-F238E27FC236}">
+                <a16:creationId xmlns:a16="http://schemas.microsoft.com/office/drawing/2014/main" id="{04B4F912-4EEF-B50E-D541-89E571BB5423}"/>
+              </a:ext>
+            </a:extLst>
+          </p:cNvPr>
+          <p:cNvGrpSpPr/>
+          <p:nvPr/>
+        </p:nvGrpSpPr>
+        <p:grpSpPr>
+          <a:xfrm>
+            <a:off x="4711809" y="5962689"/>
+            <a:ext cx="2799745" cy="268895"/>
+            <a:chOff x="4681825" y="5864715"/>
+            <a:chExt cx="3043238" cy="249851"/>
+          </a:xfrm>
+        </p:grpSpPr>
+        <p:sp>
+          <p:nvSpPr>
+            <p:cNvPr id="15" name="순서도: 수행의 시작/종료 14">
+              <a:extLst>
+                <a:ext uri="{FF2B5EF4-FFF2-40B4-BE49-F238E27FC236}">
+                  <a16:creationId xmlns:a16="http://schemas.microsoft.com/office/drawing/2014/main" id="{4BBFC7D9-350D-263E-CD78-5AF68E8AB2EA}"/>
+                </a:ext>
+              </a:extLst>
+            </p:cNvPr>
+            <p:cNvSpPr/>
+            <p:nvPr/>
+          </p:nvSpPr>
+          <p:spPr>
+            <a:xfrm>
+              <a:off x="4681825" y="5864715"/>
+              <a:ext cx="562971" cy="244852"/>
+            </a:xfrm>
+            <a:prstGeom prst="flowChartTerminator">
+              <a:avLst/>
+            </a:prstGeom>
+          </p:spPr>
+          <p:style>
+            <a:lnRef idx="2">
+              <a:schemeClr val="accent3">
+                <a:shade val="15000"/>
+              </a:schemeClr>
+            </a:lnRef>
+            <a:fillRef idx="1">
+              <a:schemeClr val="accent3"/>
+            </a:fillRef>
+            <a:effectRef idx="0">
+              <a:schemeClr val="accent3"/>
+            </a:effectRef>
+            <a:fontRef idx="minor">
+              <a:schemeClr val="lt1"/>
+            </a:fontRef>
+          </p:style>
+          <p:txBody>
+            <a:bodyPr rtlCol="0" anchor="ctr"/>
+            <a:lstStyle/>
+            <a:p>
+              <a:pPr algn="ctr"/>
+              <a:r>
+                <a:rPr lang="ko-KR" altLang="en-US" sz="1100" b="1" dirty="0"/>
+                <a:t>이동</a:t>
+              </a:r>
+            </a:p>
+          </p:txBody>
+        </p:sp>
+        <p:sp>
+          <p:nvSpPr>
+            <p:cNvPr id="17" name="순서도: 수행의 시작/종료 16">
+              <a:extLst>
+                <a:ext uri="{FF2B5EF4-FFF2-40B4-BE49-F238E27FC236}">
+                  <a16:creationId xmlns:a16="http://schemas.microsoft.com/office/drawing/2014/main" id="{91791766-4B34-186F-F788-E3FDD0F6504B}"/>
+                </a:ext>
+              </a:extLst>
+            </p:cNvPr>
+            <p:cNvSpPr/>
+            <p:nvPr/>
+          </p:nvSpPr>
+          <p:spPr>
+            <a:xfrm>
+              <a:off x="5298348" y="5869714"/>
+              <a:ext cx="562971" cy="244852"/>
+            </a:xfrm>
+            <a:prstGeom prst="flowChartTerminator">
+              <a:avLst/>
+            </a:prstGeom>
+          </p:spPr>
+          <p:style>
+            <a:lnRef idx="2">
+              <a:schemeClr val="accent3">
+                <a:shade val="15000"/>
+              </a:schemeClr>
+            </a:lnRef>
+            <a:fillRef idx="1">
+              <a:schemeClr val="accent3"/>
+            </a:fillRef>
+            <a:effectRef idx="0">
+              <a:schemeClr val="accent3"/>
+            </a:effectRef>
+            <a:fontRef idx="minor">
+              <a:schemeClr val="lt1"/>
+            </a:fontRef>
+          </p:style>
+          <p:txBody>
+            <a:bodyPr rtlCol="0" anchor="ctr"/>
+            <a:lstStyle/>
+            <a:p>
+              <a:pPr algn="ctr"/>
+              <a:r>
+                <a:rPr lang="ko-KR" altLang="en-US" sz="1100" b="1" dirty="0"/>
+                <a:t>공격</a:t>
+              </a:r>
+            </a:p>
+          </p:txBody>
+        </p:sp>
+        <p:sp>
+          <p:nvSpPr>
+            <p:cNvPr id="19" name="순서도: 수행의 시작/종료 18">
+              <a:extLst>
+                <a:ext uri="{FF2B5EF4-FFF2-40B4-BE49-F238E27FC236}">
+                  <a16:creationId xmlns:a16="http://schemas.microsoft.com/office/drawing/2014/main" id="{193ECEE1-220A-EC05-64AB-050A111C8176}"/>
+                </a:ext>
+              </a:extLst>
+            </p:cNvPr>
+            <p:cNvSpPr/>
+            <p:nvPr/>
+          </p:nvSpPr>
+          <p:spPr>
+            <a:xfrm>
+              <a:off x="5917706" y="5864715"/>
+              <a:ext cx="562971" cy="244852"/>
+            </a:xfrm>
+            <a:prstGeom prst="flowChartTerminator">
+              <a:avLst/>
+            </a:prstGeom>
+          </p:spPr>
+          <p:style>
+            <a:lnRef idx="2">
+              <a:schemeClr val="accent3">
+                <a:shade val="15000"/>
+              </a:schemeClr>
+            </a:lnRef>
+            <a:fillRef idx="1">
+              <a:schemeClr val="accent3"/>
+            </a:fillRef>
+            <a:effectRef idx="0">
+              <a:schemeClr val="accent3"/>
+            </a:effectRef>
+            <a:fontRef idx="minor">
+              <a:schemeClr val="lt1"/>
+            </a:fontRef>
+          </p:style>
+          <p:txBody>
+            <a:bodyPr rtlCol="0" anchor="ctr"/>
+            <a:lstStyle/>
+            <a:p>
+              <a:pPr algn="ctr"/>
+              <a:r>
+                <a:rPr lang="ko-KR" altLang="en-US" sz="1100" b="1" dirty="0"/>
+                <a:t>책략</a:t>
+              </a:r>
+            </a:p>
+          </p:txBody>
+        </p:sp>
+        <p:sp>
+          <p:nvSpPr>
+            <p:cNvPr id="21" name="순서도: 수행의 시작/종료 20">
+              <a:extLst>
+                <a:ext uri="{FF2B5EF4-FFF2-40B4-BE49-F238E27FC236}">
+                  <a16:creationId xmlns:a16="http://schemas.microsoft.com/office/drawing/2014/main" id="{AB1BDAA7-7351-D5B5-4A5B-8B21A57B57D0}"/>
+                </a:ext>
+              </a:extLst>
+            </p:cNvPr>
+            <p:cNvSpPr/>
+            <p:nvPr/>
+          </p:nvSpPr>
+          <p:spPr>
+            <a:xfrm>
+              <a:off x="6539899" y="5864715"/>
+              <a:ext cx="562971" cy="244852"/>
+            </a:xfrm>
+            <a:prstGeom prst="flowChartTerminator">
+              <a:avLst/>
+            </a:prstGeom>
+          </p:spPr>
+          <p:style>
+            <a:lnRef idx="2">
+              <a:schemeClr val="accent3">
+                <a:shade val="15000"/>
+              </a:schemeClr>
+            </a:lnRef>
+            <a:fillRef idx="1">
+              <a:schemeClr val="accent3"/>
+            </a:fillRef>
+            <a:effectRef idx="0">
+              <a:schemeClr val="accent3"/>
+            </a:effectRef>
+            <a:fontRef idx="minor">
+              <a:schemeClr val="lt1"/>
+            </a:fontRef>
+          </p:style>
+          <p:txBody>
+            <a:bodyPr rtlCol="0" anchor="ctr"/>
+            <a:lstStyle/>
+            <a:p>
+              <a:pPr algn="ctr"/>
+              <a:r>
+                <a:rPr lang="ko-KR" altLang="en-US" sz="1100" b="1" dirty="0"/>
+                <a:t>명상</a:t>
+              </a:r>
+            </a:p>
+          </p:txBody>
+        </p:sp>
+        <p:sp>
+          <p:nvSpPr>
+            <p:cNvPr id="23" name="순서도: 수행의 시작/종료 22">
+              <a:extLst>
+                <a:ext uri="{FF2B5EF4-FFF2-40B4-BE49-F238E27FC236}">
+                  <a16:creationId xmlns:a16="http://schemas.microsoft.com/office/drawing/2014/main" id="{728A0FF1-5E17-4D53-75B8-6722A3CC81A3}"/>
+                </a:ext>
+              </a:extLst>
+            </p:cNvPr>
+            <p:cNvSpPr/>
+            <p:nvPr/>
+          </p:nvSpPr>
+          <p:spPr>
+            <a:xfrm>
+              <a:off x="7162092" y="5864715"/>
+              <a:ext cx="562971" cy="244852"/>
+            </a:xfrm>
+            <a:prstGeom prst="flowChartTerminator">
+              <a:avLst/>
+            </a:prstGeom>
+          </p:spPr>
+          <p:style>
+            <a:lnRef idx="2">
+              <a:schemeClr val="accent3">
+                <a:shade val="15000"/>
+              </a:schemeClr>
+            </a:lnRef>
+            <a:fillRef idx="1">
+              <a:schemeClr val="accent3"/>
+            </a:fillRef>
+            <a:effectRef idx="0">
+              <a:schemeClr val="accent3"/>
+            </a:effectRef>
+            <a:fontRef idx="minor">
+              <a:schemeClr val="lt1"/>
+            </a:fontRef>
+          </p:style>
+          <p:txBody>
+            <a:bodyPr rtlCol="0" anchor="ctr"/>
+            <a:lstStyle/>
+            <a:p>
+              <a:pPr algn="ctr"/>
+              <a:r>
+                <a:rPr lang="ko-KR" altLang="en-US" sz="1100" b="1" dirty="0"/>
+                <a:t>종료</a:t>
+              </a:r>
+            </a:p>
+          </p:txBody>
+        </p:sp>
+      </p:grpSp>
+      <p:sp>
+        <p:nvSpPr>
+          <p:cNvPr id="27" name="말풍선: 사각형 26">
+            <a:extLst>
+              <a:ext uri="{FF2B5EF4-FFF2-40B4-BE49-F238E27FC236}">
+                <a16:creationId xmlns:a16="http://schemas.microsoft.com/office/drawing/2014/main" id="{32E43CE4-2CC3-EDFB-0BFF-BB4572B9F7CF}"/>
+              </a:ext>
+            </a:extLst>
+          </p:cNvPr>
+          <p:cNvSpPr/>
+          <p:nvPr/>
+        </p:nvSpPr>
+        <p:spPr>
+          <a:xfrm>
+            <a:off x="4806300" y="1355694"/>
+            <a:ext cx="2442526" cy="255814"/>
+          </a:xfrm>
+          <a:prstGeom prst="wedgeRectCallout">
+            <a:avLst>
+              <a:gd name="adj1" fmla="val -54826"/>
+              <a:gd name="adj2" fmla="val 41288"/>
+            </a:avLst>
+          </a:prstGeom>
+        </p:spPr>
+        <p:style>
+          <a:lnRef idx="1">
+            <a:schemeClr val="accent4"/>
+          </a:lnRef>
+          <a:fillRef idx="2">
+            <a:schemeClr val="accent4"/>
+          </a:fillRef>
+          <a:effectRef idx="1">
+            <a:schemeClr val="accent4"/>
+          </a:effectRef>
+          <a:fontRef idx="minor">
+            <a:schemeClr val="dk1"/>
+          </a:fontRef>
+        </p:style>
+        <p:txBody>
+          <a:bodyPr rtlCol="0" anchor="ctr"/>
+          <a:lstStyle/>
+          <a:p>
+            <a:pPr algn="ctr"/>
+            <a:endParaRPr lang="ko-KR" altLang="en-US"/>
+          </a:p>
+        </p:txBody>
+      </p:sp>
+      <p:sp>
+        <p:nvSpPr>
+          <p:cNvPr id="29" name="말풍선: 사각형 28">
+            <a:extLst>
+              <a:ext uri="{FF2B5EF4-FFF2-40B4-BE49-F238E27FC236}">
+                <a16:creationId xmlns:a16="http://schemas.microsoft.com/office/drawing/2014/main" id="{F311CA1B-4E9B-0A88-69E1-57B16B54A18B}"/>
+              </a:ext>
+            </a:extLst>
+          </p:cNvPr>
+          <p:cNvSpPr/>
+          <p:nvPr/>
+        </p:nvSpPr>
+        <p:spPr>
+          <a:xfrm>
+            <a:off x="4806300" y="1474961"/>
+            <a:ext cx="2442526" cy="255814"/>
+          </a:xfrm>
+          <a:prstGeom prst="wedgeRectCallout">
+            <a:avLst>
+              <a:gd name="adj1" fmla="val -54826"/>
+              <a:gd name="adj2" fmla="val 41288"/>
+            </a:avLst>
+          </a:prstGeom>
+        </p:spPr>
+        <p:style>
+          <a:lnRef idx="1">
+            <a:schemeClr val="accent4"/>
+          </a:lnRef>
+          <a:fillRef idx="2">
+            <a:schemeClr val="accent4"/>
+          </a:fillRef>
+          <a:effectRef idx="1">
+            <a:schemeClr val="accent4"/>
+          </a:effectRef>
+          <a:fontRef idx="minor">
+            <a:schemeClr val="dk1"/>
+          </a:fontRef>
+        </p:style>
+        <p:txBody>
+          <a:bodyPr rtlCol="0" anchor="ctr"/>
+          <a:lstStyle/>
+          <a:p>
+            <a:pPr algn="ctr"/>
+            <a:endParaRPr lang="ko-KR" altLang="en-US"/>
+          </a:p>
+        </p:txBody>
+      </p:sp>
+      <p:sp>
+        <p:nvSpPr>
+          <p:cNvPr id="31" name="말풍선: 사각형 30">
+            <a:extLst>
+              <a:ext uri="{FF2B5EF4-FFF2-40B4-BE49-F238E27FC236}">
+                <a16:creationId xmlns:a16="http://schemas.microsoft.com/office/drawing/2014/main" id="{FC316F0C-6E2F-6439-9FDE-827395E5CB26}"/>
+              </a:ext>
+            </a:extLst>
+          </p:cNvPr>
+          <p:cNvSpPr/>
+          <p:nvPr/>
+        </p:nvSpPr>
+        <p:spPr>
+          <a:xfrm>
+            <a:off x="4886506" y="1574059"/>
+            <a:ext cx="2442526" cy="321360"/>
+          </a:xfrm>
+          <a:prstGeom prst="wedgeRectCallout">
+            <a:avLst>
+              <a:gd name="adj1" fmla="val -54826"/>
+              <a:gd name="adj2" fmla="val 41288"/>
+            </a:avLst>
+          </a:prstGeom>
+        </p:spPr>
+        <p:style>
+          <a:lnRef idx="1">
+            <a:schemeClr val="accent4"/>
+          </a:lnRef>
+          <a:fillRef idx="2">
+            <a:schemeClr val="accent4"/>
+          </a:fillRef>
+          <a:effectRef idx="1">
+            <a:schemeClr val="accent4"/>
+          </a:effectRef>
+          <a:fontRef idx="minor">
+            <a:schemeClr val="dk1"/>
+          </a:fontRef>
+        </p:style>
+        <p:txBody>
+          <a:bodyPr rtlCol="0" anchor="ctr"/>
+          <a:lstStyle/>
+          <a:p>
+            <a:r>
+              <a:rPr lang="ko-KR" altLang="en-US" sz="1200" dirty="0"/>
+              <a:t>조운이 이동했다</a:t>
+            </a:r>
+            <a:r>
+              <a:rPr lang="en-US" altLang="ko-KR" sz="1200" dirty="0"/>
+              <a:t>. (A3 </a:t>
+            </a:r>
+            <a:r>
+              <a:rPr lang="en-US" altLang="ko-KR" sz="1200" dirty="0">
+                <a:sym typeface="Wingdings" panose="05000000000000000000" pitchFamily="2" charset="2"/>
+              </a:rPr>
+              <a:t> E3)</a:t>
+            </a:r>
+            <a:endParaRPr lang="ko-KR" altLang="en-US" sz="1200" dirty="0"/>
+          </a:p>
+        </p:txBody>
+      </p:sp>
+      <p:sp>
+        <p:nvSpPr>
+          <p:cNvPr id="2" name="사각형: 둥근 모서리 1">
+            <a:extLst>
+              <a:ext uri="{FF2B5EF4-FFF2-40B4-BE49-F238E27FC236}">
+                <a16:creationId xmlns:a16="http://schemas.microsoft.com/office/drawing/2014/main" id="{DA50CB2C-8A1C-C042-7581-5F520FEEE837}"/>
+              </a:ext>
+            </a:extLst>
+          </p:cNvPr>
+          <p:cNvSpPr/>
+          <p:nvPr/>
+        </p:nvSpPr>
+        <p:spPr>
+          <a:xfrm>
+            <a:off x="5617895" y="5598444"/>
+            <a:ext cx="1839230" cy="281449"/>
+          </a:xfrm>
+          <a:prstGeom prst="roundRect">
+            <a:avLst/>
+          </a:prstGeom>
+        </p:spPr>
+        <p:style>
+          <a:lnRef idx="1">
+            <a:schemeClr val="accent5"/>
+          </a:lnRef>
+          <a:fillRef idx="2">
+            <a:schemeClr val="accent5"/>
+          </a:fillRef>
+          <a:effectRef idx="1">
+            <a:schemeClr val="accent5"/>
+          </a:effectRef>
+          <a:fontRef idx="minor">
+            <a:schemeClr val="dk1"/>
+          </a:fontRef>
+        </p:style>
+        <p:txBody>
+          <a:bodyPr rtlCol="0" anchor="ctr"/>
+          <a:lstStyle/>
+          <a:p>
+            <a:pPr algn="ctr"/>
+            <a:r>
+              <a:rPr lang="ko-KR" altLang="en-US" sz="1100" dirty="0"/>
+              <a:t>내가 걸린 버프</a:t>
+            </a:r>
+            <a:r>
+              <a:rPr lang="en-US" altLang="ko-KR" sz="1100" dirty="0"/>
+              <a:t>, </a:t>
+            </a:r>
+            <a:r>
+              <a:rPr lang="ko-KR" altLang="en-US" sz="1100" dirty="0" err="1"/>
+              <a:t>디버프들</a:t>
+            </a:r>
+            <a:endParaRPr lang="ko-KR" altLang="en-US" sz="1100" dirty="0"/>
+          </a:p>
+        </p:txBody>
+      </p:sp>
+      <p:sp>
+        <p:nvSpPr>
+          <p:cNvPr id="7" name="TextBox 6">
+            <a:extLst>
+              <a:ext uri="{FF2B5EF4-FFF2-40B4-BE49-F238E27FC236}">
+                <a16:creationId xmlns:a16="http://schemas.microsoft.com/office/drawing/2014/main" id="{5591E91C-8B31-F90A-016F-B39762D83C3B}"/>
+              </a:ext>
+            </a:extLst>
+          </p:cNvPr>
+          <p:cNvSpPr txBox="1"/>
+          <p:nvPr/>
+        </p:nvSpPr>
+        <p:spPr>
+          <a:xfrm>
+            <a:off x="404039" y="341501"/>
+            <a:ext cx="3242676" cy="869790"/>
+          </a:xfrm>
+          <a:prstGeom prst="rect">
+            <a:avLst/>
+          </a:prstGeom>
+          <a:noFill/>
+        </p:spPr>
+        <p:txBody>
+          <a:bodyPr wrap="square" rtlCol="0">
+            <a:spAutoFit/>
+          </a:bodyPr>
+          <a:lstStyle/>
+          <a:p>
+            <a:pPr>
+              <a:lnSpc>
+                <a:spcPct val="150000"/>
+              </a:lnSpc>
+            </a:pPr>
+            <a:r>
+              <a:rPr lang="ko-KR" altLang="en-US" b="1" dirty="0"/>
+              <a:t>모바일 화면 기준</a:t>
+            </a:r>
+            <a:r>
+              <a:rPr lang="en-US" altLang="ko-KR" b="1" dirty="0"/>
+              <a:t>,</a:t>
+            </a:r>
+            <a:endParaRPr lang="en-US" altLang="ko-KR" dirty="0"/>
+          </a:p>
+          <a:p>
+            <a:pPr marL="285750" indent="-285750">
+              <a:lnSpc>
+                <a:spcPct val="150000"/>
+              </a:lnSpc>
+              <a:buFont typeface="Arial" panose="020B0604020202020204" pitchFamily="34" charset="0"/>
+              <a:buChar char="•"/>
+            </a:pPr>
+            <a:r>
+              <a:rPr lang="en-US" altLang="ko-KR" b="1" dirty="0"/>
+              <a:t>5 </a:t>
+            </a:r>
+            <a:r>
+              <a:rPr lang="ko-KR" altLang="en-US" b="1" dirty="0"/>
+              <a:t>고유 스킬 발동 체크</a:t>
+            </a:r>
+          </a:p>
+        </p:txBody>
+      </p:sp>
+      <p:sp>
+        <p:nvSpPr>
+          <p:cNvPr id="6" name="사각형: 둥근 모서리 5">
+            <a:extLst>
+              <a:ext uri="{FF2B5EF4-FFF2-40B4-BE49-F238E27FC236}">
+                <a16:creationId xmlns:a16="http://schemas.microsoft.com/office/drawing/2014/main" id="{82251867-1A73-9925-86F5-910A6EA6C896}"/>
+              </a:ext>
+            </a:extLst>
+          </p:cNvPr>
+          <p:cNvSpPr/>
+          <p:nvPr/>
+        </p:nvSpPr>
+        <p:spPr>
+          <a:xfrm>
+            <a:off x="4895438" y="2669230"/>
+            <a:ext cx="2442526" cy="1766124"/>
+          </a:xfrm>
+          <a:prstGeom prst="roundRect">
+            <a:avLst>
+              <a:gd name="adj" fmla="val 8523"/>
+            </a:avLst>
+          </a:prstGeom>
+        </p:spPr>
+        <p:style>
+          <a:lnRef idx="1">
+            <a:schemeClr val="dk1"/>
+          </a:lnRef>
+          <a:fillRef idx="2">
+            <a:schemeClr val="dk1"/>
+          </a:fillRef>
+          <a:effectRef idx="1">
+            <a:schemeClr val="dk1"/>
+          </a:effectRef>
+          <a:fontRef idx="minor">
+            <a:schemeClr val="dk1"/>
+          </a:fontRef>
+        </p:style>
+        <p:txBody>
+          <a:bodyPr rtlCol="0" anchor="ctr"/>
+          <a:lstStyle/>
+          <a:p>
+            <a:r>
+              <a:rPr lang="ko-KR" altLang="en-US" sz="1600" b="1" dirty="0"/>
+              <a:t>고유 스킬 제목</a:t>
+            </a:r>
+            <a:endParaRPr lang="en-US" altLang="ko-KR" sz="1600" b="1" dirty="0"/>
+          </a:p>
+          <a:p>
+            <a:endParaRPr lang="en-US" altLang="ko-KR" sz="1400" b="1" dirty="0"/>
+          </a:p>
+          <a:p>
+            <a:pPr algn="ctr"/>
+            <a:endParaRPr lang="en-US" altLang="ko-KR" sz="1400" b="1" dirty="0"/>
+          </a:p>
+          <a:p>
+            <a:pPr algn="ctr"/>
+            <a:endParaRPr lang="en-US" altLang="ko-KR" sz="1400" b="1" dirty="0"/>
+          </a:p>
+          <a:p>
+            <a:pPr algn="ctr"/>
+            <a:r>
+              <a:rPr lang="ko-KR" altLang="en-US" sz="1400" b="1" dirty="0" err="1"/>
+              <a:t>발동하시겠습니까</a:t>
+            </a:r>
+            <a:r>
+              <a:rPr lang="en-US" altLang="ko-KR" sz="1400" b="1" dirty="0"/>
+              <a:t>?</a:t>
+            </a:r>
+          </a:p>
+          <a:p>
+            <a:pPr algn="ctr"/>
+            <a:endParaRPr lang="en-US" altLang="ko-KR" sz="1400" b="1" dirty="0"/>
+          </a:p>
+          <a:p>
+            <a:pPr algn="ctr"/>
+            <a:endParaRPr lang="ko-KR" altLang="en-US" sz="1400" b="1" dirty="0"/>
+          </a:p>
+        </p:txBody>
+      </p:sp>
+      <p:sp>
+        <p:nvSpPr>
+          <p:cNvPr id="11" name="사각형: 둥근 모서리 10">
+            <a:extLst>
+              <a:ext uri="{FF2B5EF4-FFF2-40B4-BE49-F238E27FC236}">
+                <a16:creationId xmlns:a16="http://schemas.microsoft.com/office/drawing/2014/main" id="{A99C7AAB-15AE-90E6-456D-2B35269DEC8B}"/>
+              </a:ext>
+            </a:extLst>
+          </p:cNvPr>
+          <p:cNvSpPr/>
+          <p:nvPr/>
+        </p:nvSpPr>
+        <p:spPr>
+          <a:xfrm>
+            <a:off x="4987070" y="3082941"/>
+            <a:ext cx="2241397" cy="509289"/>
+          </a:xfrm>
+          <a:prstGeom prst="roundRect">
+            <a:avLst/>
+          </a:prstGeom>
+        </p:spPr>
+        <p:style>
+          <a:lnRef idx="1">
+            <a:schemeClr val="accent4"/>
+          </a:lnRef>
+          <a:fillRef idx="2">
+            <a:schemeClr val="accent4"/>
+          </a:fillRef>
+          <a:effectRef idx="1">
+            <a:schemeClr val="accent4"/>
+          </a:effectRef>
+          <a:fontRef idx="minor">
+            <a:schemeClr val="dk1"/>
+          </a:fontRef>
+        </p:style>
+        <p:txBody>
+          <a:bodyPr rtlCol="0" anchor="ctr"/>
+          <a:lstStyle/>
+          <a:p>
+            <a:pPr algn="ctr"/>
+            <a:r>
+              <a:rPr lang="ko-KR" altLang="en-US" sz="1400" dirty="0"/>
+              <a:t>고유 스킬에 대한 </a:t>
+            </a:r>
+            <a:r>
+              <a:rPr lang="ko-KR" altLang="en-US" sz="1400" dirty="0" err="1"/>
+              <a:t>설명칸</a:t>
+            </a:r>
+            <a:endParaRPr lang="ko-KR" altLang="en-US" sz="1400" dirty="0"/>
+          </a:p>
+        </p:txBody>
+      </p:sp>
+      <p:sp>
+        <p:nvSpPr>
+          <p:cNvPr id="14" name="사각형: 둥근 모서리 13">
+            <a:extLst>
+              <a:ext uri="{FF2B5EF4-FFF2-40B4-BE49-F238E27FC236}">
+                <a16:creationId xmlns:a16="http://schemas.microsoft.com/office/drawing/2014/main" id="{16D50F89-D508-1597-E8C2-60C952D88FD4}"/>
+              </a:ext>
+            </a:extLst>
+          </p:cNvPr>
+          <p:cNvSpPr/>
+          <p:nvPr/>
+        </p:nvSpPr>
+        <p:spPr>
+          <a:xfrm>
+            <a:off x="6291114" y="4005941"/>
+            <a:ext cx="917128" cy="302484"/>
+          </a:xfrm>
+          <a:prstGeom prst="roundRect">
+            <a:avLst/>
+          </a:prstGeom>
+        </p:spPr>
+        <p:style>
+          <a:lnRef idx="1">
+            <a:schemeClr val="accent6"/>
+          </a:lnRef>
+          <a:fillRef idx="2">
+            <a:schemeClr val="accent6"/>
+          </a:fillRef>
+          <a:effectRef idx="1">
+            <a:schemeClr val="accent6"/>
+          </a:effectRef>
+          <a:fontRef idx="minor">
+            <a:schemeClr val="dk1"/>
+          </a:fontRef>
+        </p:style>
+        <p:txBody>
+          <a:bodyPr rtlCol="0" anchor="ctr"/>
+          <a:lstStyle/>
+          <a:p>
+            <a:pPr algn="ctr"/>
+            <a:r>
+              <a:rPr lang="ko-KR" altLang="en-US" sz="1400" b="1" dirty="0"/>
+              <a:t>예</a:t>
+            </a:r>
+          </a:p>
+        </p:txBody>
+      </p:sp>
+      <p:sp>
+        <p:nvSpPr>
+          <p:cNvPr id="18" name="사각형: 둥근 모서리 17">
+            <a:extLst>
+              <a:ext uri="{FF2B5EF4-FFF2-40B4-BE49-F238E27FC236}">
+                <a16:creationId xmlns:a16="http://schemas.microsoft.com/office/drawing/2014/main" id="{AF28A231-357A-86A6-E052-D4901C08A419}"/>
+              </a:ext>
+            </a:extLst>
+          </p:cNvPr>
+          <p:cNvSpPr/>
+          <p:nvPr/>
+        </p:nvSpPr>
+        <p:spPr>
+          <a:xfrm>
+            <a:off x="5079402" y="4005941"/>
+            <a:ext cx="917128" cy="302484"/>
+          </a:xfrm>
+          <a:prstGeom prst="roundRect">
+            <a:avLst/>
+          </a:prstGeom>
+        </p:spPr>
+        <p:style>
+          <a:lnRef idx="1">
+            <a:schemeClr val="accent6"/>
+          </a:lnRef>
+          <a:fillRef idx="2">
+            <a:schemeClr val="accent6"/>
+          </a:fillRef>
+          <a:effectRef idx="1">
+            <a:schemeClr val="accent6"/>
+          </a:effectRef>
+          <a:fontRef idx="minor">
+            <a:schemeClr val="dk1"/>
+          </a:fontRef>
+        </p:style>
+        <p:txBody>
+          <a:bodyPr rtlCol="0" anchor="ctr"/>
+          <a:lstStyle/>
+          <a:p>
+            <a:pPr algn="ctr"/>
+            <a:r>
+              <a:rPr lang="ko-KR" altLang="en-US" sz="1400" b="1"/>
+              <a:t>아니오</a:t>
+            </a:r>
+            <a:endParaRPr lang="ko-KR" altLang="en-US" sz="1400" b="1" dirty="0"/>
+          </a:p>
+        </p:txBody>
+      </p:sp>
+      <p:sp>
+        <p:nvSpPr>
+          <p:cNvPr id="22" name="직사각형 21">
+            <a:extLst>
+              <a:ext uri="{FF2B5EF4-FFF2-40B4-BE49-F238E27FC236}">
+                <a16:creationId xmlns:a16="http://schemas.microsoft.com/office/drawing/2014/main" id="{86C103E6-B8B3-1A7F-4338-CF8F7594D0A3}"/>
+              </a:ext>
+            </a:extLst>
+          </p:cNvPr>
+          <p:cNvSpPr/>
+          <p:nvPr/>
+        </p:nvSpPr>
+        <p:spPr>
+          <a:xfrm>
+            <a:off x="4676701" y="5937509"/>
+            <a:ext cx="2856626" cy="304961"/>
+          </a:xfrm>
+          <a:prstGeom prst="rect">
+            <a:avLst/>
+          </a:prstGeom>
+          <a:solidFill>
+            <a:schemeClr val="dk1">
+              <a:alpha val="80000"/>
+            </a:schemeClr>
+          </a:solidFill>
+        </p:spPr>
+        <p:style>
+          <a:lnRef idx="2">
+            <a:schemeClr val="dk1">
+              <a:shade val="15000"/>
+            </a:schemeClr>
+          </a:lnRef>
+          <a:fillRef idx="1">
+            <a:schemeClr val="dk1"/>
+          </a:fillRef>
+          <a:effectRef idx="0">
+            <a:schemeClr val="dk1"/>
+          </a:effectRef>
+          <a:fontRef idx="minor">
+            <a:schemeClr val="lt1"/>
+          </a:fontRef>
+        </p:style>
+        <p:txBody>
+          <a:bodyPr rtlCol="0" anchor="ctr"/>
+          <a:lstStyle/>
+          <a:p>
+            <a:pPr algn="ctr"/>
+            <a:endParaRPr lang="ko-KR" altLang="en-US"/>
+          </a:p>
+        </p:txBody>
+      </p:sp>
+    </p:spTree>
+    <p:extLst>
+      <p:ext uri="{BB962C8B-B14F-4D97-AF65-F5344CB8AC3E}">
+        <p14:creationId xmlns:p14="http://schemas.microsoft.com/office/powerpoint/2010/main" val="9062600"/>
+      </p:ext>
+    </p:extLst>
+  </p:cSld>
+  <p:clrMapOvr>
+    <a:masterClrMapping/>
+  </p:clrMapOvr>
+</p:sld>
+</file>
+
+<file path=ppt/slides/slide24.xml><?xml version="1.0" encoding="utf-8"?>
+<p:sld xmlns:a="http://schemas.openxmlformats.org/drawingml/2006/main" xmlns:r="http://schemas.openxmlformats.org/officeDocument/2006/relationships" xmlns:p="http://schemas.openxmlformats.org/presentationml/2006/main">
+  <p:cSld>
+    <p:spTree>
+      <p:nvGrpSpPr>
+        <p:cNvPr id="1" name="">
+          <a:extLst>
+            <a:ext uri="{FF2B5EF4-FFF2-40B4-BE49-F238E27FC236}">
+              <a16:creationId xmlns:a16="http://schemas.microsoft.com/office/drawing/2014/main" id="{0F998606-B986-66EB-63C9-916EEBB20535}"/>
+            </a:ext>
+          </a:extLst>
+        </p:cNvPr>
+        <p:cNvGrpSpPr/>
+        <p:nvPr/>
+      </p:nvGrpSpPr>
+      <p:grpSpPr>
+        <a:xfrm>
+          <a:off x="0" y="0"/>
+          <a:ext cx="0" cy="0"/>
+          <a:chOff x="0" y="0"/>
+          <a:chExt cx="0" cy="0"/>
+        </a:xfrm>
+      </p:grpSpPr>
+      <p:sp>
+        <p:nvSpPr>
+          <p:cNvPr id="7" name="TextBox 6">
+            <a:extLst>
+              <a:ext uri="{FF2B5EF4-FFF2-40B4-BE49-F238E27FC236}">
+                <a16:creationId xmlns:a16="http://schemas.microsoft.com/office/drawing/2014/main" id="{C03446C4-4B22-F370-4EDB-FF37D5CF636A}"/>
+              </a:ext>
+            </a:extLst>
+          </p:cNvPr>
+          <p:cNvSpPr txBox="1"/>
+          <p:nvPr/>
+        </p:nvSpPr>
+        <p:spPr>
+          <a:xfrm>
+            <a:off x="404039" y="341501"/>
+            <a:ext cx="3242676" cy="869790"/>
+          </a:xfrm>
+          <a:prstGeom prst="rect">
+            <a:avLst/>
+          </a:prstGeom>
+          <a:noFill/>
+        </p:spPr>
+        <p:txBody>
+          <a:bodyPr wrap="square" rtlCol="0">
+            <a:spAutoFit/>
+          </a:bodyPr>
+          <a:lstStyle/>
+          <a:p>
+            <a:pPr>
+              <a:lnSpc>
+                <a:spcPct val="150000"/>
+              </a:lnSpc>
+            </a:pPr>
+            <a:r>
+              <a:rPr lang="ko-KR" altLang="en-US" b="1" dirty="0"/>
+              <a:t>모바일 화면 기준</a:t>
+            </a:r>
+            <a:r>
+              <a:rPr lang="en-US" altLang="ko-KR" b="1" dirty="0"/>
+              <a:t>,</a:t>
+            </a:r>
+            <a:endParaRPr lang="en-US" altLang="ko-KR" dirty="0"/>
+          </a:p>
+          <a:p>
+            <a:pPr marL="285750" indent="-285750">
+              <a:lnSpc>
+                <a:spcPct val="150000"/>
+              </a:lnSpc>
+              <a:buFont typeface="Arial" panose="020B0604020202020204" pitchFamily="34" charset="0"/>
+              <a:buChar char="•"/>
+            </a:pPr>
+            <a:r>
+              <a:rPr lang="en-US" altLang="ko-KR" b="1" dirty="0"/>
+              <a:t>6 </a:t>
+            </a:r>
+            <a:r>
+              <a:rPr lang="ko-KR" altLang="en-US" b="1" dirty="0"/>
+              <a:t>고유 스킬 발동</a:t>
+            </a:r>
+          </a:p>
+        </p:txBody>
+      </p:sp>
+      <p:grpSp>
+        <p:nvGrpSpPr>
+          <p:cNvPr id="20" name="그룹 19">
+            <a:extLst>
+              <a:ext uri="{FF2B5EF4-FFF2-40B4-BE49-F238E27FC236}">
+                <a16:creationId xmlns:a16="http://schemas.microsoft.com/office/drawing/2014/main" id="{B4DCCD29-09FA-1AFE-4967-F5B747874264}"/>
+              </a:ext>
+            </a:extLst>
+          </p:cNvPr>
+          <p:cNvGrpSpPr/>
+          <p:nvPr/>
+        </p:nvGrpSpPr>
+        <p:grpSpPr>
+          <a:xfrm>
+            <a:off x="3287268" y="549000"/>
+            <a:ext cx="2890690" cy="5760000"/>
+            <a:chOff x="3287268" y="549000"/>
+            <a:chExt cx="2890690" cy="5760000"/>
+          </a:xfrm>
+        </p:grpSpPr>
+        <p:sp>
+          <p:nvSpPr>
+            <p:cNvPr id="4" name="직사각형 3">
+              <a:extLst>
+                <a:ext uri="{FF2B5EF4-FFF2-40B4-BE49-F238E27FC236}">
+                  <a16:creationId xmlns:a16="http://schemas.microsoft.com/office/drawing/2014/main" id="{22664E8F-3727-3247-B860-17AC873C8C63}"/>
+                </a:ext>
+              </a:extLst>
+            </p:cNvPr>
+            <p:cNvSpPr/>
+            <p:nvPr/>
+          </p:nvSpPr>
+          <p:spPr>
+            <a:xfrm>
+              <a:off x="3292613" y="549000"/>
+              <a:ext cx="2880000" cy="5760000"/>
+            </a:xfrm>
+            <a:prstGeom prst="rect">
+              <a:avLst/>
+            </a:prstGeom>
+          </p:spPr>
+          <p:style>
+            <a:lnRef idx="2">
+              <a:schemeClr val="accent1">
+                <a:shade val="15000"/>
+              </a:schemeClr>
+            </a:lnRef>
+            <a:fillRef idx="1">
+              <a:schemeClr val="accent1"/>
+            </a:fillRef>
+            <a:effectRef idx="0">
+              <a:schemeClr val="accent1"/>
+            </a:effectRef>
+            <a:fontRef idx="minor">
+              <a:schemeClr val="lt1"/>
+            </a:fontRef>
+          </p:style>
+          <p:txBody>
+            <a:bodyPr rtlCol="0" anchor="ctr"/>
+            <a:lstStyle/>
+            <a:p>
+              <a:pPr algn="ctr"/>
+              <a:endParaRPr lang="ko-KR" altLang="en-US"/>
+            </a:p>
+          </p:txBody>
+        </p:sp>
+        <p:pic>
+          <p:nvPicPr>
+            <p:cNvPr id="3" name="그림 2">
+              <a:extLst>
+                <a:ext uri="{FF2B5EF4-FFF2-40B4-BE49-F238E27FC236}">
+                  <a16:creationId xmlns:a16="http://schemas.microsoft.com/office/drawing/2014/main" id="{012211D7-AA0F-D3DD-C0AB-7549A3FB50CC}"/>
+                </a:ext>
+              </a:extLst>
+            </p:cNvPr>
+            <p:cNvPicPr>
+              <a:picLocks noChangeAspect="1"/>
+            </p:cNvPicPr>
+            <p:nvPr/>
+          </p:nvPicPr>
+          <p:blipFill>
+            <a:blip r:embed="rId2"/>
+            <a:stretch>
+              <a:fillRect/>
+            </a:stretch>
+          </p:blipFill>
+          <p:spPr>
+            <a:xfrm>
+              <a:off x="3292613" y="1953035"/>
+              <a:ext cx="2885345" cy="2951930"/>
+            </a:xfrm>
+            <a:prstGeom prst="rect">
+              <a:avLst/>
+            </a:prstGeom>
+          </p:spPr>
+        </p:pic>
+        <p:pic>
+          <p:nvPicPr>
+            <p:cNvPr id="8" name="그림 7">
+              <a:extLst>
+                <a:ext uri="{FF2B5EF4-FFF2-40B4-BE49-F238E27FC236}">
+                  <a16:creationId xmlns:a16="http://schemas.microsoft.com/office/drawing/2014/main" id="{3E3340D2-9563-774F-6E89-B65DE7295C28}"/>
+                </a:ext>
+              </a:extLst>
+            </p:cNvPr>
+            <p:cNvPicPr>
+              <a:picLocks noChangeAspect="1"/>
+            </p:cNvPicPr>
+            <p:nvPr/>
+          </p:nvPicPr>
+          <p:blipFill>
+            <a:blip r:embed="rId3"/>
+            <a:stretch>
+              <a:fillRect/>
+            </a:stretch>
+          </p:blipFill>
+          <p:spPr>
+            <a:xfrm>
+              <a:off x="3360495" y="615530"/>
+              <a:ext cx="2746802" cy="690756"/>
+            </a:xfrm>
+            <a:prstGeom prst="rect">
+              <a:avLst/>
+            </a:prstGeom>
+          </p:spPr>
+        </p:pic>
+        <p:sp>
+          <p:nvSpPr>
+            <p:cNvPr id="5" name="순서도: 수행의 시작/종료 4">
+              <a:extLst>
+                <a:ext uri="{FF2B5EF4-FFF2-40B4-BE49-F238E27FC236}">
+                  <a16:creationId xmlns:a16="http://schemas.microsoft.com/office/drawing/2014/main" id="{7F8ED0DB-8DE2-92CF-C0E4-AC6B9A3D1385}"/>
+                </a:ext>
+              </a:extLst>
+            </p:cNvPr>
+            <p:cNvSpPr/>
+            <p:nvPr/>
+          </p:nvSpPr>
+          <p:spPr>
+            <a:xfrm>
+              <a:off x="5236440" y="603431"/>
+              <a:ext cx="859971" cy="264728"/>
+            </a:xfrm>
+            <a:prstGeom prst="flowChartTerminator">
+              <a:avLst/>
+            </a:prstGeom>
+          </p:spPr>
+          <p:style>
+            <a:lnRef idx="2">
+              <a:schemeClr val="accent2">
+                <a:shade val="15000"/>
+              </a:schemeClr>
+            </a:lnRef>
+            <a:fillRef idx="1">
+              <a:schemeClr val="accent2"/>
+            </a:fillRef>
+            <a:effectRef idx="0">
+              <a:schemeClr val="accent2"/>
+            </a:effectRef>
+            <a:fontRef idx="minor">
+              <a:schemeClr val="lt1"/>
+            </a:fontRef>
+          </p:style>
+          <p:txBody>
+            <a:bodyPr rtlCol="0" anchor="ctr"/>
+            <a:lstStyle/>
+            <a:p>
+              <a:pPr algn="ctr"/>
+              <a:r>
+                <a:rPr lang="ko-KR" altLang="en-US" sz="1200" b="1" dirty="0"/>
+                <a:t>항복</a:t>
+              </a:r>
+            </a:p>
+          </p:txBody>
+        </p:sp>
+        <p:pic>
+          <p:nvPicPr>
+            <p:cNvPr id="10" name="그림 9">
+              <a:extLst>
+                <a:ext uri="{FF2B5EF4-FFF2-40B4-BE49-F238E27FC236}">
+                  <a16:creationId xmlns:a16="http://schemas.microsoft.com/office/drawing/2014/main" id="{DA147852-4ACE-B31F-DA26-58B760DD43DD}"/>
+                </a:ext>
+              </a:extLst>
+            </p:cNvPr>
+            <p:cNvPicPr>
+              <a:picLocks noChangeAspect="1"/>
+            </p:cNvPicPr>
+            <p:nvPr/>
+          </p:nvPicPr>
+          <p:blipFill>
+            <a:blip r:embed="rId4"/>
+            <a:srcRect b="21463"/>
+            <a:stretch>
+              <a:fillRect/>
+            </a:stretch>
+          </p:blipFill>
+          <p:spPr>
+            <a:xfrm>
+              <a:off x="4257181" y="4962581"/>
+              <a:ext cx="1850116" cy="578247"/>
+            </a:xfrm>
+            <a:prstGeom prst="rect">
+              <a:avLst/>
+            </a:prstGeom>
+          </p:spPr>
+        </p:pic>
+        <p:pic>
+          <p:nvPicPr>
+            <p:cNvPr id="13" name="그림 12">
+              <a:extLst>
+                <a:ext uri="{FF2B5EF4-FFF2-40B4-BE49-F238E27FC236}">
+                  <a16:creationId xmlns:a16="http://schemas.microsoft.com/office/drawing/2014/main" id="{2ABBF536-BFD7-F68F-9286-815D874D1EAD}"/>
+                </a:ext>
+              </a:extLst>
+            </p:cNvPr>
+            <p:cNvPicPr>
+              <a:picLocks noChangeAspect="1"/>
+            </p:cNvPicPr>
+            <p:nvPr/>
+          </p:nvPicPr>
+          <p:blipFill>
+            <a:blip r:embed="rId5"/>
+            <a:stretch>
+              <a:fillRect/>
+            </a:stretch>
+          </p:blipFill>
+          <p:spPr>
+            <a:xfrm>
+              <a:off x="3380270" y="4962581"/>
+              <a:ext cx="800141" cy="819192"/>
+            </a:xfrm>
+            <a:prstGeom prst="rect">
+              <a:avLst/>
+            </a:prstGeom>
+          </p:spPr>
+        </p:pic>
+        <p:grpSp>
+          <p:nvGrpSpPr>
+            <p:cNvPr id="24" name="그룹 23">
+              <a:extLst>
+                <a:ext uri="{FF2B5EF4-FFF2-40B4-BE49-F238E27FC236}">
+                  <a16:creationId xmlns:a16="http://schemas.microsoft.com/office/drawing/2014/main" id="{F1D3F900-9AB5-275D-6FE6-900B2D2D7AC7}"/>
+                </a:ext>
+              </a:extLst>
+            </p:cNvPr>
+            <p:cNvGrpSpPr/>
+            <p:nvPr/>
+          </p:nvGrpSpPr>
+          <p:grpSpPr>
+            <a:xfrm>
+              <a:off x="3351095" y="5962689"/>
+              <a:ext cx="2799745" cy="268895"/>
+              <a:chOff x="4681825" y="5864715"/>
+              <a:chExt cx="3043238" cy="249851"/>
+            </a:xfrm>
+          </p:grpSpPr>
+          <p:sp>
+            <p:nvSpPr>
+              <p:cNvPr id="15" name="순서도: 수행의 시작/종료 14">
+                <a:extLst>
+                  <a:ext uri="{FF2B5EF4-FFF2-40B4-BE49-F238E27FC236}">
+                    <a16:creationId xmlns:a16="http://schemas.microsoft.com/office/drawing/2014/main" id="{2AB6343E-FE1D-AA0B-B9B2-BF13D8352F86}"/>
+                  </a:ext>
+                </a:extLst>
+              </p:cNvPr>
+              <p:cNvSpPr/>
+              <p:nvPr/>
+            </p:nvSpPr>
+            <p:spPr>
+              <a:xfrm>
+                <a:off x="4681825" y="5864715"/>
+                <a:ext cx="562971" cy="244852"/>
+              </a:xfrm>
+              <a:prstGeom prst="flowChartTerminator">
+                <a:avLst/>
+              </a:prstGeom>
+            </p:spPr>
+            <p:style>
+              <a:lnRef idx="2">
+                <a:schemeClr val="accent3">
+                  <a:shade val="15000"/>
+                </a:schemeClr>
+              </a:lnRef>
+              <a:fillRef idx="1">
+                <a:schemeClr val="accent3"/>
+              </a:fillRef>
+              <a:effectRef idx="0">
+                <a:schemeClr val="accent3"/>
+              </a:effectRef>
+              <a:fontRef idx="minor">
+                <a:schemeClr val="lt1"/>
+              </a:fontRef>
+            </p:style>
+            <p:txBody>
+              <a:bodyPr rtlCol="0" anchor="ctr"/>
+              <a:lstStyle/>
+              <a:p>
+                <a:pPr algn="ctr"/>
+                <a:r>
+                  <a:rPr lang="ko-KR" altLang="en-US" sz="1100" b="1" dirty="0"/>
+                  <a:t>이동</a:t>
+                </a:r>
+              </a:p>
+            </p:txBody>
+          </p:sp>
+          <p:sp>
+            <p:nvSpPr>
+              <p:cNvPr id="17" name="순서도: 수행의 시작/종료 16">
+                <a:extLst>
+                  <a:ext uri="{FF2B5EF4-FFF2-40B4-BE49-F238E27FC236}">
+                    <a16:creationId xmlns:a16="http://schemas.microsoft.com/office/drawing/2014/main" id="{FBF68A22-29A0-B322-4720-58651351C3DE}"/>
+                  </a:ext>
+                </a:extLst>
+              </p:cNvPr>
+              <p:cNvSpPr/>
+              <p:nvPr/>
+            </p:nvSpPr>
+            <p:spPr>
+              <a:xfrm>
+                <a:off x="5298348" y="5869714"/>
+                <a:ext cx="562971" cy="244852"/>
+              </a:xfrm>
+              <a:prstGeom prst="flowChartTerminator">
+                <a:avLst/>
+              </a:prstGeom>
+            </p:spPr>
+            <p:style>
+              <a:lnRef idx="2">
+                <a:schemeClr val="accent3">
+                  <a:shade val="15000"/>
+                </a:schemeClr>
+              </a:lnRef>
+              <a:fillRef idx="1">
+                <a:schemeClr val="accent3"/>
+              </a:fillRef>
+              <a:effectRef idx="0">
+                <a:schemeClr val="accent3"/>
+              </a:effectRef>
+              <a:fontRef idx="minor">
+                <a:schemeClr val="lt1"/>
+              </a:fontRef>
+            </p:style>
+            <p:txBody>
+              <a:bodyPr rtlCol="0" anchor="ctr"/>
+              <a:lstStyle/>
+              <a:p>
+                <a:pPr algn="ctr"/>
+                <a:r>
+                  <a:rPr lang="ko-KR" altLang="en-US" sz="1100" b="1" dirty="0"/>
+                  <a:t>공격</a:t>
+                </a:r>
+              </a:p>
+            </p:txBody>
+          </p:sp>
+          <p:sp>
+            <p:nvSpPr>
+              <p:cNvPr id="19" name="순서도: 수행의 시작/종료 18">
+                <a:extLst>
+                  <a:ext uri="{FF2B5EF4-FFF2-40B4-BE49-F238E27FC236}">
+                    <a16:creationId xmlns:a16="http://schemas.microsoft.com/office/drawing/2014/main" id="{F3CE6FC6-51FA-8E9E-5E76-9833AF69DB04}"/>
+                  </a:ext>
+                </a:extLst>
+              </p:cNvPr>
+              <p:cNvSpPr/>
+              <p:nvPr/>
+            </p:nvSpPr>
+            <p:spPr>
+              <a:xfrm>
+                <a:off x="5917706" y="5864715"/>
+                <a:ext cx="562971" cy="244852"/>
+              </a:xfrm>
+              <a:prstGeom prst="flowChartTerminator">
+                <a:avLst/>
+              </a:prstGeom>
+            </p:spPr>
+            <p:style>
+              <a:lnRef idx="2">
+                <a:schemeClr val="accent3">
+                  <a:shade val="15000"/>
+                </a:schemeClr>
+              </a:lnRef>
+              <a:fillRef idx="1">
+                <a:schemeClr val="accent3"/>
+              </a:fillRef>
+              <a:effectRef idx="0">
+                <a:schemeClr val="accent3"/>
+              </a:effectRef>
+              <a:fontRef idx="minor">
+                <a:schemeClr val="lt1"/>
+              </a:fontRef>
+            </p:style>
+            <p:txBody>
+              <a:bodyPr rtlCol="0" anchor="ctr"/>
+              <a:lstStyle/>
+              <a:p>
+                <a:pPr algn="ctr"/>
+                <a:r>
+                  <a:rPr lang="ko-KR" altLang="en-US" sz="1100" b="1" dirty="0"/>
+                  <a:t>책략</a:t>
+                </a:r>
+              </a:p>
+            </p:txBody>
+          </p:sp>
+          <p:sp>
+            <p:nvSpPr>
+              <p:cNvPr id="21" name="순서도: 수행의 시작/종료 20">
+                <a:extLst>
+                  <a:ext uri="{FF2B5EF4-FFF2-40B4-BE49-F238E27FC236}">
+                    <a16:creationId xmlns:a16="http://schemas.microsoft.com/office/drawing/2014/main" id="{9A466F49-D630-F8A2-57EF-BBA5441BA505}"/>
+                  </a:ext>
+                </a:extLst>
+              </p:cNvPr>
+              <p:cNvSpPr/>
+              <p:nvPr/>
+            </p:nvSpPr>
+            <p:spPr>
+              <a:xfrm>
+                <a:off x="6539899" y="5864715"/>
+                <a:ext cx="562971" cy="244852"/>
+              </a:xfrm>
+              <a:prstGeom prst="flowChartTerminator">
+                <a:avLst/>
+              </a:prstGeom>
+            </p:spPr>
+            <p:style>
+              <a:lnRef idx="2">
+                <a:schemeClr val="accent3">
+                  <a:shade val="15000"/>
+                </a:schemeClr>
+              </a:lnRef>
+              <a:fillRef idx="1">
+                <a:schemeClr val="accent3"/>
+              </a:fillRef>
+              <a:effectRef idx="0">
+                <a:schemeClr val="accent3"/>
+              </a:effectRef>
+              <a:fontRef idx="minor">
+                <a:schemeClr val="lt1"/>
+              </a:fontRef>
+            </p:style>
+            <p:txBody>
+              <a:bodyPr rtlCol="0" anchor="ctr"/>
+              <a:lstStyle/>
+              <a:p>
+                <a:pPr algn="ctr"/>
+                <a:r>
+                  <a:rPr lang="ko-KR" altLang="en-US" sz="1100" b="1" dirty="0"/>
+                  <a:t>명상</a:t>
+                </a:r>
+              </a:p>
+            </p:txBody>
+          </p:sp>
+          <p:sp>
+            <p:nvSpPr>
+              <p:cNvPr id="23" name="순서도: 수행의 시작/종료 22">
+                <a:extLst>
+                  <a:ext uri="{FF2B5EF4-FFF2-40B4-BE49-F238E27FC236}">
+                    <a16:creationId xmlns:a16="http://schemas.microsoft.com/office/drawing/2014/main" id="{7EA622BA-FC72-62A7-DB82-F6FEA7177161}"/>
+                  </a:ext>
+                </a:extLst>
+              </p:cNvPr>
+              <p:cNvSpPr/>
+              <p:nvPr/>
+            </p:nvSpPr>
+            <p:spPr>
+              <a:xfrm>
+                <a:off x="7162092" y="5864715"/>
+                <a:ext cx="562971" cy="244852"/>
+              </a:xfrm>
+              <a:prstGeom prst="flowChartTerminator">
+                <a:avLst/>
+              </a:prstGeom>
+            </p:spPr>
+            <p:style>
+              <a:lnRef idx="2">
+                <a:schemeClr val="accent3">
+                  <a:shade val="15000"/>
+                </a:schemeClr>
+              </a:lnRef>
+              <a:fillRef idx="1">
+                <a:schemeClr val="accent3"/>
+              </a:fillRef>
+              <a:effectRef idx="0">
+                <a:schemeClr val="accent3"/>
+              </a:effectRef>
+              <a:fontRef idx="minor">
+                <a:schemeClr val="lt1"/>
+              </a:fontRef>
+            </p:style>
+            <p:txBody>
+              <a:bodyPr rtlCol="0" anchor="ctr"/>
+              <a:lstStyle/>
+              <a:p>
+                <a:pPr algn="ctr"/>
+                <a:r>
+                  <a:rPr lang="ko-KR" altLang="en-US" sz="1100" b="1" dirty="0"/>
+                  <a:t>종료</a:t>
+                </a:r>
+              </a:p>
+            </p:txBody>
+          </p:sp>
+        </p:grpSp>
+        <p:sp>
+          <p:nvSpPr>
+            <p:cNvPr id="27" name="말풍선: 사각형 26">
+              <a:extLst>
+                <a:ext uri="{FF2B5EF4-FFF2-40B4-BE49-F238E27FC236}">
+                  <a16:creationId xmlns:a16="http://schemas.microsoft.com/office/drawing/2014/main" id="{76ACB973-F9D3-4FDE-6F72-02BFDCF41F53}"/>
+                </a:ext>
+              </a:extLst>
+            </p:cNvPr>
+            <p:cNvSpPr/>
+            <p:nvPr/>
+          </p:nvSpPr>
+          <p:spPr>
+            <a:xfrm>
+              <a:off x="3445586" y="1355694"/>
+              <a:ext cx="2442526" cy="255814"/>
+            </a:xfrm>
+            <a:prstGeom prst="wedgeRectCallout">
+              <a:avLst>
+                <a:gd name="adj1" fmla="val -54826"/>
+                <a:gd name="adj2" fmla="val 41288"/>
+              </a:avLst>
+            </a:prstGeom>
+          </p:spPr>
+          <p:style>
+            <a:lnRef idx="1">
+              <a:schemeClr val="accent4"/>
+            </a:lnRef>
+            <a:fillRef idx="2">
+              <a:schemeClr val="accent4"/>
+            </a:fillRef>
+            <a:effectRef idx="1">
+              <a:schemeClr val="accent4"/>
+            </a:effectRef>
+            <a:fontRef idx="minor">
+              <a:schemeClr val="dk1"/>
+            </a:fontRef>
+          </p:style>
+          <p:txBody>
+            <a:bodyPr rtlCol="0" anchor="ctr"/>
+            <a:lstStyle/>
+            <a:p>
+              <a:pPr algn="ctr"/>
+              <a:endParaRPr lang="ko-KR" altLang="en-US"/>
+            </a:p>
+          </p:txBody>
+        </p:sp>
+        <p:sp>
+          <p:nvSpPr>
+            <p:cNvPr id="29" name="말풍선: 사각형 28">
+              <a:extLst>
+                <a:ext uri="{FF2B5EF4-FFF2-40B4-BE49-F238E27FC236}">
+                  <a16:creationId xmlns:a16="http://schemas.microsoft.com/office/drawing/2014/main" id="{D30BF73E-7728-6B3B-0CF1-DA0B42734CE3}"/>
+                </a:ext>
+              </a:extLst>
+            </p:cNvPr>
+            <p:cNvSpPr/>
+            <p:nvPr/>
+          </p:nvSpPr>
+          <p:spPr>
+            <a:xfrm>
+              <a:off x="3445586" y="1474961"/>
+              <a:ext cx="2442526" cy="255814"/>
+            </a:xfrm>
+            <a:prstGeom prst="wedgeRectCallout">
+              <a:avLst>
+                <a:gd name="adj1" fmla="val -54826"/>
+                <a:gd name="adj2" fmla="val 41288"/>
+              </a:avLst>
+            </a:prstGeom>
+          </p:spPr>
+          <p:style>
+            <a:lnRef idx="1">
+              <a:schemeClr val="accent4"/>
+            </a:lnRef>
+            <a:fillRef idx="2">
+              <a:schemeClr val="accent4"/>
+            </a:fillRef>
+            <a:effectRef idx="1">
+              <a:schemeClr val="accent4"/>
+            </a:effectRef>
+            <a:fontRef idx="minor">
+              <a:schemeClr val="dk1"/>
+            </a:fontRef>
+          </p:style>
+          <p:txBody>
+            <a:bodyPr rtlCol="0" anchor="ctr"/>
+            <a:lstStyle/>
+            <a:p>
+              <a:pPr algn="ctr"/>
+              <a:endParaRPr lang="ko-KR" altLang="en-US"/>
+            </a:p>
+          </p:txBody>
+        </p:sp>
+        <p:sp>
+          <p:nvSpPr>
+            <p:cNvPr id="31" name="말풍선: 사각형 30">
+              <a:extLst>
+                <a:ext uri="{FF2B5EF4-FFF2-40B4-BE49-F238E27FC236}">
+                  <a16:creationId xmlns:a16="http://schemas.microsoft.com/office/drawing/2014/main" id="{46BCB92C-D1C5-725B-AAE8-C6901D076AA5}"/>
+                </a:ext>
+              </a:extLst>
+            </p:cNvPr>
+            <p:cNvSpPr/>
+            <p:nvPr/>
+          </p:nvSpPr>
+          <p:spPr>
+            <a:xfrm>
+              <a:off x="3525792" y="1574059"/>
+              <a:ext cx="2442526" cy="321360"/>
+            </a:xfrm>
+            <a:prstGeom prst="wedgeRectCallout">
+              <a:avLst>
+                <a:gd name="adj1" fmla="val -54826"/>
+                <a:gd name="adj2" fmla="val 41288"/>
+              </a:avLst>
+            </a:prstGeom>
+          </p:spPr>
+          <p:style>
+            <a:lnRef idx="1">
+              <a:schemeClr val="accent4"/>
+            </a:lnRef>
+            <a:fillRef idx="2">
+              <a:schemeClr val="accent4"/>
+            </a:fillRef>
+            <a:effectRef idx="1">
+              <a:schemeClr val="accent4"/>
+            </a:effectRef>
+            <a:fontRef idx="minor">
+              <a:schemeClr val="dk1"/>
+            </a:fontRef>
+          </p:style>
+          <p:txBody>
+            <a:bodyPr rtlCol="0" anchor="ctr"/>
+            <a:lstStyle/>
+            <a:p>
+              <a:r>
+                <a:rPr lang="ko-KR" altLang="en-US" sz="1200" dirty="0"/>
+                <a:t>조운이 </a:t>
+              </a:r>
+              <a:r>
+                <a:rPr lang="en-US" altLang="ko-KR" sz="1200" dirty="0"/>
+                <a:t>‘</a:t>
+              </a:r>
+              <a:r>
+                <a:rPr lang="ko-KR" altLang="en-US" sz="1200" dirty="0"/>
+                <a:t>고유기술</a:t>
+              </a:r>
+              <a:r>
+                <a:rPr lang="en-US" altLang="ko-KR" sz="1200" dirty="0"/>
+                <a:t>’ </a:t>
+              </a:r>
+              <a:r>
+                <a:rPr lang="ko-KR" altLang="en-US" sz="1200" dirty="0"/>
+                <a:t>을 발동했다</a:t>
+              </a:r>
+              <a:r>
+                <a:rPr lang="en-US" altLang="ko-KR" sz="1200" dirty="0"/>
+                <a:t>!</a:t>
+              </a:r>
+              <a:endParaRPr lang="ko-KR" altLang="en-US" sz="1200" dirty="0"/>
+            </a:p>
+          </p:txBody>
+        </p:sp>
+        <p:sp>
+          <p:nvSpPr>
+            <p:cNvPr id="2" name="사각형: 둥근 모서리 1">
+              <a:extLst>
+                <a:ext uri="{FF2B5EF4-FFF2-40B4-BE49-F238E27FC236}">
+                  <a16:creationId xmlns:a16="http://schemas.microsoft.com/office/drawing/2014/main" id="{6E18342B-6105-B5F3-66C3-A202D5B0B814}"/>
+                </a:ext>
+              </a:extLst>
+            </p:cNvPr>
+            <p:cNvSpPr/>
+            <p:nvPr/>
+          </p:nvSpPr>
+          <p:spPr>
+            <a:xfrm>
+              <a:off x="4257181" y="5598444"/>
+              <a:ext cx="1839230" cy="281449"/>
+            </a:xfrm>
+            <a:prstGeom prst="roundRect">
+              <a:avLst/>
+            </a:prstGeom>
+          </p:spPr>
+          <p:style>
+            <a:lnRef idx="1">
+              <a:schemeClr val="accent5"/>
+            </a:lnRef>
+            <a:fillRef idx="2">
+              <a:schemeClr val="accent5"/>
+            </a:fillRef>
+            <a:effectRef idx="1">
+              <a:schemeClr val="accent5"/>
+            </a:effectRef>
+            <a:fontRef idx="minor">
+              <a:schemeClr val="dk1"/>
+            </a:fontRef>
+          </p:style>
+          <p:txBody>
+            <a:bodyPr rtlCol="0" anchor="ctr"/>
+            <a:lstStyle/>
+            <a:p>
+              <a:pPr algn="ctr"/>
+              <a:r>
+                <a:rPr lang="ko-KR" altLang="en-US" sz="1100" dirty="0"/>
+                <a:t>내가 걸린 버프</a:t>
+              </a:r>
+              <a:r>
+                <a:rPr lang="en-US" altLang="ko-KR" sz="1100" dirty="0"/>
+                <a:t>, </a:t>
+              </a:r>
+              <a:r>
+                <a:rPr lang="ko-KR" altLang="en-US" sz="1100" dirty="0" err="1"/>
+                <a:t>디버프들</a:t>
+              </a:r>
+              <a:endParaRPr lang="ko-KR" altLang="en-US" sz="1100" dirty="0"/>
+            </a:p>
+          </p:txBody>
+        </p:sp>
+        <p:sp>
+          <p:nvSpPr>
+            <p:cNvPr id="16" name="직사각형 15">
+              <a:extLst>
+                <a:ext uri="{FF2B5EF4-FFF2-40B4-BE49-F238E27FC236}">
+                  <a16:creationId xmlns:a16="http://schemas.microsoft.com/office/drawing/2014/main" id="{87550D73-6FEB-1FA3-FF32-9EBD04C8CE55}"/>
+                </a:ext>
+              </a:extLst>
+            </p:cNvPr>
+            <p:cNvSpPr/>
+            <p:nvPr/>
+          </p:nvSpPr>
+          <p:spPr>
+            <a:xfrm>
+              <a:off x="3292613" y="1978215"/>
+              <a:ext cx="2880000" cy="2891218"/>
+            </a:xfrm>
+            <a:prstGeom prst="rect">
+              <a:avLst/>
+            </a:prstGeom>
+            <a:solidFill>
+              <a:schemeClr val="dk1">
+                <a:alpha val="80000"/>
+              </a:schemeClr>
+            </a:solidFill>
+          </p:spPr>
+          <p:style>
+            <a:lnRef idx="2">
+              <a:schemeClr val="dk1">
+                <a:shade val="15000"/>
+              </a:schemeClr>
+            </a:lnRef>
+            <a:fillRef idx="1">
+              <a:schemeClr val="dk1"/>
+            </a:fillRef>
+            <a:effectRef idx="0">
+              <a:schemeClr val="dk1"/>
+            </a:effectRef>
+            <a:fontRef idx="minor">
+              <a:schemeClr val="lt1"/>
+            </a:fontRef>
+          </p:style>
+          <p:txBody>
+            <a:bodyPr rtlCol="0" anchor="ctr"/>
+            <a:lstStyle/>
+            <a:p>
+              <a:pPr algn="ctr"/>
+              <a:endParaRPr lang="ko-KR" altLang="en-US"/>
+            </a:p>
+          </p:txBody>
+        </p:sp>
+        <p:pic>
+          <p:nvPicPr>
+            <p:cNvPr id="12" name="그림 11">
+              <a:extLst>
+                <a:ext uri="{FF2B5EF4-FFF2-40B4-BE49-F238E27FC236}">
+                  <a16:creationId xmlns:a16="http://schemas.microsoft.com/office/drawing/2014/main" id="{A09A723A-6918-F564-F499-A08891954479}"/>
+                </a:ext>
+              </a:extLst>
+            </p:cNvPr>
+            <p:cNvPicPr>
+              <a:picLocks noChangeAspect="1"/>
+            </p:cNvPicPr>
+            <p:nvPr/>
+          </p:nvPicPr>
+          <p:blipFill>
+            <a:blip r:embed="rId6">
+              <a:extLst>
+                <a:ext uri="{28A0092B-C50C-407E-A947-70E740481C1C}">
+                  <a14:useLocalDpi xmlns:a14="http://schemas.microsoft.com/office/drawing/2010/main" val="0"/>
+                </a:ext>
+              </a:extLst>
+            </a:blip>
+            <a:stretch>
+              <a:fillRect/>
+            </a:stretch>
+          </p:blipFill>
+          <p:spPr>
+            <a:xfrm>
+              <a:off x="3287268" y="3134810"/>
+              <a:ext cx="2880001" cy="578841"/>
+            </a:xfrm>
+            <a:prstGeom prst="rect">
+              <a:avLst/>
+            </a:prstGeom>
+          </p:spPr>
+        </p:pic>
+      </p:grpSp>
+      <p:grpSp>
+        <p:nvGrpSpPr>
+          <p:cNvPr id="22" name="그룹 21">
+            <a:extLst>
+              <a:ext uri="{FF2B5EF4-FFF2-40B4-BE49-F238E27FC236}">
+                <a16:creationId xmlns:a16="http://schemas.microsoft.com/office/drawing/2014/main" id="{9D21602D-5BB1-0799-E3C8-700A497E35B9}"/>
+              </a:ext>
+            </a:extLst>
+          </p:cNvPr>
+          <p:cNvGrpSpPr/>
+          <p:nvPr/>
+        </p:nvGrpSpPr>
+        <p:grpSpPr>
+          <a:xfrm>
+            <a:off x="7477295" y="549000"/>
+            <a:ext cx="2885345" cy="5760000"/>
+            <a:chOff x="3292613" y="549000"/>
+            <a:chExt cx="2885345" cy="5760000"/>
+          </a:xfrm>
+        </p:grpSpPr>
+        <p:sp>
+          <p:nvSpPr>
+            <p:cNvPr id="25" name="직사각형 24">
+              <a:extLst>
+                <a:ext uri="{FF2B5EF4-FFF2-40B4-BE49-F238E27FC236}">
+                  <a16:creationId xmlns:a16="http://schemas.microsoft.com/office/drawing/2014/main" id="{0F702BEC-9347-C22F-3FEA-F31A1ABA7F80}"/>
+                </a:ext>
+              </a:extLst>
+            </p:cNvPr>
+            <p:cNvSpPr/>
+            <p:nvPr/>
+          </p:nvSpPr>
+          <p:spPr>
+            <a:xfrm>
+              <a:off x="3292613" y="549000"/>
+              <a:ext cx="2880000" cy="5760000"/>
+            </a:xfrm>
+            <a:prstGeom prst="rect">
+              <a:avLst/>
+            </a:prstGeom>
+          </p:spPr>
+          <p:style>
+            <a:lnRef idx="2">
+              <a:schemeClr val="accent1">
+                <a:shade val="15000"/>
+              </a:schemeClr>
+            </a:lnRef>
+            <a:fillRef idx="1">
+              <a:schemeClr val="accent1"/>
+            </a:fillRef>
+            <a:effectRef idx="0">
+              <a:schemeClr val="accent1"/>
+            </a:effectRef>
+            <a:fontRef idx="minor">
+              <a:schemeClr val="lt1"/>
+            </a:fontRef>
+          </p:style>
+          <p:txBody>
+            <a:bodyPr rtlCol="0" anchor="ctr"/>
+            <a:lstStyle/>
+            <a:p>
+              <a:pPr algn="ctr"/>
+              <a:endParaRPr lang="ko-KR" altLang="en-US"/>
+            </a:p>
+          </p:txBody>
+        </p:sp>
+        <p:pic>
+          <p:nvPicPr>
+            <p:cNvPr id="26" name="그림 25">
+              <a:extLst>
+                <a:ext uri="{FF2B5EF4-FFF2-40B4-BE49-F238E27FC236}">
+                  <a16:creationId xmlns:a16="http://schemas.microsoft.com/office/drawing/2014/main" id="{1550EC84-13A9-CA91-A9C5-55DE4E2DD28A}"/>
+                </a:ext>
+              </a:extLst>
+            </p:cNvPr>
+            <p:cNvPicPr>
+              <a:picLocks noChangeAspect="1"/>
+            </p:cNvPicPr>
+            <p:nvPr/>
+          </p:nvPicPr>
+          <p:blipFill>
+            <a:blip r:embed="rId2"/>
+            <a:stretch>
+              <a:fillRect/>
+            </a:stretch>
+          </p:blipFill>
+          <p:spPr>
+            <a:xfrm>
+              <a:off x="3292613" y="1953035"/>
+              <a:ext cx="2885345" cy="2951930"/>
+            </a:xfrm>
+            <a:prstGeom prst="rect">
+              <a:avLst/>
+            </a:prstGeom>
+          </p:spPr>
+        </p:pic>
+        <p:pic>
+          <p:nvPicPr>
+            <p:cNvPr id="28" name="그림 27">
+              <a:extLst>
+                <a:ext uri="{FF2B5EF4-FFF2-40B4-BE49-F238E27FC236}">
+                  <a16:creationId xmlns:a16="http://schemas.microsoft.com/office/drawing/2014/main" id="{35EF1A29-F537-F8C0-663C-0563DA2A1D02}"/>
+                </a:ext>
+              </a:extLst>
+            </p:cNvPr>
+            <p:cNvPicPr>
+              <a:picLocks noChangeAspect="1"/>
+            </p:cNvPicPr>
+            <p:nvPr/>
+          </p:nvPicPr>
+          <p:blipFill>
+            <a:blip r:embed="rId3"/>
+            <a:stretch>
+              <a:fillRect/>
+            </a:stretch>
+          </p:blipFill>
+          <p:spPr>
+            <a:xfrm>
+              <a:off x="3360495" y="615530"/>
+              <a:ext cx="2746802" cy="690756"/>
+            </a:xfrm>
+            <a:prstGeom prst="rect">
+              <a:avLst/>
+            </a:prstGeom>
+          </p:spPr>
+        </p:pic>
+        <p:sp>
+          <p:nvSpPr>
+            <p:cNvPr id="30" name="순서도: 수행의 시작/종료 29">
+              <a:extLst>
+                <a:ext uri="{FF2B5EF4-FFF2-40B4-BE49-F238E27FC236}">
+                  <a16:creationId xmlns:a16="http://schemas.microsoft.com/office/drawing/2014/main" id="{05033DDA-02CF-365C-847F-AE85108EC6AD}"/>
+                </a:ext>
+              </a:extLst>
+            </p:cNvPr>
+            <p:cNvSpPr/>
+            <p:nvPr/>
+          </p:nvSpPr>
+          <p:spPr>
+            <a:xfrm>
+              <a:off x="5236440" y="603431"/>
+              <a:ext cx="859971" cy="264728"/>
+            </a:xfrm>
+            <a:prstGeom prst="flowChartTerminator">
+              <a:avLst/>
+            </a:prstGeom>
+          </p:spPr>
+          <p:style>
+            <a:lnRef idx="2">
+              <a:schemeClr val="accent2">
+                <a:shade val="15000"/>
+              </a:schemeClr>
+            </a:lnRef>
+            <a:fillRef idx="1">
+              <a:schemeClr val="accent2"/>
+            </a:fillRef>
+            <a:effectRef idx="0">
+              <a:schemeClr val="accent2"/>
+            </a:effectRef>
+            <a:fontRef idx="minor">
+              <a:schemeClr val="lt1"/>
+            </a:fontRef>
+          </p:style>
+          <p:txBody>
+            <a:bodyPr rtlCol="0" anchor="ctr"/>
+            <a:lstStyle/>
+            <a:p>
+              <a:pPr algn="ctr"/>
+              <a:r>
+                <a:rPr lang="ko-KR" altLang="en-US" sz="1200" b="1" dirty="0"/>
+                <a:t>항복</a:t>
+              </a:r>
+            </a:p>
+          </p:txBody>
+        </p:sp>
+        <p:pic>
+          <p:nvPicPr>
+            <p:cNvPr id="32" name="그림 31">
+              <a:extLst>
+                <a:ext uri="{FF2B5EF4-FFF2-40B4-BE49-F238E27FC236}">
+                  <a16:creationId xmlns:a16="http://schemas.microsoft.com/office/drawing/2014/main" id="{9398FC0A-FD41-536E-F927-9A74373B383B}"/>
+                </a:ext>
+              </a:extLst>
+            </p:cNvPr>
+            <p:cNvPicPr>
+              <a:picLocks noChangeAspect="1"/>
+            </p:cNvPicPr>
+            <p:nvPr/>
+          </p:nvPicPr>
+          <p:blipFill>
+            <a:blip r:embed="rId4"/>
+            <a:srcRect b="21463"/>
+            <a:stretch>
+              <a:fillRect/>
+            </a:stretch>
+          </p:blipFill>
+          <p:spPr>
+            <a:xfrm>
+              <a:off x="4257181" y="4962581"/>
+              <a:ext cx="1850116" cy="578247"/>
+            </a:xfrm>
+            <a:prstGeom prst="rect">
+              <a:avLst/>
+            </a:prstGeom>
+          </p:spPr>
+        </p:pic>
+        <p:pic>
+          <p:nvPicPr>
+            <p:cNvPr id="33" name="그림 32">
+              <a:extLst>
+                <a:ext uri="{FF2B5EF4-FFF2-40B4-BE49-F238E27FC236}">
+                  <a16:creationId xmlns:a16="http://schemas.microsoft.com/office/drawing/2014/main" id="{54D30564-A855-CB1D-E069-C3F12331DD77}"/>
+                </a:ext>
+              </a:extLst>
+            </p:cNvPr>
+            <p:cNvPicPr>
+              <a:picLocks noChangeAspect="1"/>
+            </p:cNvPicPr>
+            <p:nvPr/>
+          </p:nvPicPr>
+          <p:blipFill>
+            <a:blip r:embed="rId5"/>
+            <a:stretch>
+              <a:fillRect/>
+            </a:stretch>
+          </p:blipFill>
+          <p:spPr>
+            <a:xfrm>
+              <a:off x="3380270" y="4962581"/>
+              <a:ext cx="800141" cy="819192"/>
+            </a:xfrm>
+            <a:prstGeom prst="rect">
+              <a:avLst/>
+            </a:prstGeom>
+          </p:spPr>
+        </p:pic>
+        <p:grpSp>
+          <p:nvGrpSpPr>
+            <p:cNvPr id="34" name="그룹 33">
+              <a:extLst>
+                <a:ext uri="{FF2B5EF4-FFF2-40B4-BE49-F238E27FC236}">
+                  <a16:creationId xmlns:a16="http://schemas.microsoft.com/office/drawing/2014/main" id="{6454493C-5E49-DE26-9A34-8848C2780EF8}"/>
+                </a:ext>
+              </a:extLst>
+            </p:cNvPr>
+            <p:cNvGrpSpPr/>
+            <p:nvPr/>
+          </p:nvGrpSpPr>
+          <p:grpSpPr>
+            <a:xfrm>
+              <a:off x="3351095" y="5962689"/>
+              <a:ext cx="2799745" cy="268895"/>
+              <a:chOff x="4681825" y="5864715"/>
+              <a:chExt cx="3043238" cy="249851"/>
+            </a:xfrm>
+          </p:grpSpPr>
+          <p:sp>
+            <p:nvSpPr>
+              <p:cNvPr id="41" name="순서도: 수행의 시작/종료 40">
+                <a:extLst>
+                  <a:ext uri="{FF2B5EF4-FFF2-40B4-BE49-F238E27FC236}">
+                    <a16:creationId xmlns:a16="http://schemas.microsoft.com/office/drawing/2014/main" id="{83B00953-5514-A6DD-9F17-431CE0B0CF25}"/>
+                  </a:ext>
+                </a:extLst>
+              </p:cNvPr>
+              <p:cNvSpPr/>
+              <p:nvPr/>
+            </p:nvSpPr>
+            <p:spPr>
+              <a:xfrm>
+                <a:off x="4681825" y="5864715"/>
+                <a:ext cx="562971" cy="244852"/>
+              </a:xfrm>
+              <a:prstGeom prst="flowChartTerminator">
+                <a:avLst/>
+              </a:prstGeom>
+            </p:spPr>
+            <p:style>
+              <a:lnRef idx="2">
+                <a:schemeClr val="accent3">
+                  <a:shade val="15000"/>
+                </a:schemeClr>
+              </a:lnRef>
+              <a:fillRef idx="1">
+                <a:schemeClr val="accent3"/>
+              </a:fillRef>
+              <a:effectRef idx="0">
+                <a:schemeClr val="accent3"/>
+              </a:effectRef>
+              <a:fontRef idx="minor">
+                <a:schemeClr val="lt1"/>
+              </a:fontRef>
+            </p:style>
+            <p:txBody>
+              <a:bodyPr rtlCol="0" anchor="ctr"/>
+              <a:lstStyle/>
+              <a:p>
+                <a:pPr algn="ctr"/>
+                <a:r>
+                  <a:rPr lang="ko-KR" altLang="en-US" sz="1100" b="1" dirty="0"/>
+                  <a:t>이동</a:t>
+                </a:r>
+              </a:p>
+            </p:txBody>
+          </p:sp>
+          <p:sp>
+            <p:nvSpPr>
+              <p:cNvPr id="42" name="순서도: 수행의 시작/종료 41">
+                <a:extLst>
+                  <a:ext uri="{FF2B5EF4-FFF2-40B4-BE49-F238E27FC236}">
+                    <a16:creationId xmlns:a16="http://schemas.microsoft.com/office/drawing/2014/main" id="{02F77AC8-4602-B6E2-C970-C32FA7CD8BF8}"/>
+                  </a:ext>
+                </a:extLst>
+              </p:cNvPr>
+              <p:cNvSpPr/>
+              <p:nvPr/>
+            </p:nvSpPr>
+            <p:spPr>
+              <a:xfrm>
+                <a:off x="5298348" y="5869714"/>
+                <a:ext cx="562971" cy="244852"/>
+              </a:xfrm>
+              <a:prstGeom prst="flowChartTerminator">
+                <a:avLst/>
+              </a:prstGeom>
+            </p:spPr>
+            <p:style>
+              <a:lnRef idx="2">
+                <a:schemeClr val="accent3">
+                  <a:shade val="15000"/>
+                </a:schemeClr>
+              </a:lnRef>
+              <a:fillRef idx="1">
+                <a:schemeClr val="accent3"/>
+              </a:fillRef>
+              <a:effectRef idx="0">
+                <a:schemeClr val="accent3"/>
+              </a:effectRef>
+              <a:fontRef idx="minor">
+                <a:schemeClr val="lt1"/>
+              </a:fontRef>
+            </p:style>
+            <p:txBody>
+              <a:bodyPr rtlCol="0" anchor="ctr"/>
+              <a:lstStyle/>
+              <a:p>
+                <a:pPr algn="ctr"/>
+                <a:r>
+                  <a:rPr lang="ko-KR" altLang="en-US" sz="1100" b="1" dirty="0"/>
+                  <a:t>공격</a:t>
+                </a:r>
+              </a:p>
+            </p:txBody>
+          </p:sp>
+          <p:sp>
+            <p:nvSpPr>
+              <p:cNvPr id="43" name="순서도: 수행의 시작/종료 42">
+                <a:extLst>
+                  <a:ext uri="{FF2B5EF4-FFF2-40B4-BE49-F238E27FC236}">
+                    <a16:creationId xmlns:a16="http://schemas.microsoft.com/office/drawing/2014/main" id="{ABB6CB53-A968-C31F-0CDB-51E8130C5DDD}"/>
+                  </a:ext>
+                </a:extLst>
+              </p:cNvPr>
+              <p:cNvSpPr/>
+              <p:nvPr/>
+            </p:nvSpPr>
+            <p:spPr>
+              <a:xfrm>
+                <a:off x="5917706" y="5864715"/>
+                <a:ext cx="562971" cy="244852"/>
+              </a:xfrm>
+              <a:prstGeom prst="flowChartTerminator">
+                <a:avLst/>
+              </a:prstGeom>
+            </p:spPr>
+            <p:style>
+              <a:lnRef idx="2">
+                <a:schemeClr val="accent3">
+                  <a:shade val="15000"/>
+                </a:schemeClr>
+              </a:lnRef>
+              <a:fillRef idx="1">
+                <a:schemeClr val="accent3"/>
+              </a:fillRef>
+              <a:effectRef idx="0">
+                <a:schemeClr val="accent3"/>
+              </a:effectRef>
+              <a:fontRef idx="minor">
+                <a:schemeClr val="lt1"/>
+              </a:fontRef>
+            </p:style>
+            <p:txBody>
+              <a:bodyPr rtlCol="0" anchor="ctr"/>
+              <a:lstStyle/>
+              <a:p>
+                <a:pPr algn="ctr"/>
+                <a:r>
+                  <a:rPr lang="ko-KR" altLang="en-US" sz="1100" b="1" dirty="0"/>
+                  <a:t>책략</a:t>
+                </a:r>
+              </a:p>
+            </p:txBody>
+          </p:sp>
+          <p:sp>
+            <p:nvSpPr>
+              <p:cNvPr id="44" name="순서도: 수행의 시작/종료 43">
+                <a:extLst>
+                  <a:ext uri="{FF2B5EF4-FFF2-40B4-BE49-F238E27FC236}">
+                    <a16:creationId xmlns:a16="http://schemas.microsoft.com/office/drawing/2014/main" id="{890BCFEE-B53F-66AD-7694-D1FA06F66A25}"/>
+                  </a:ext>
+                </a:extLst>
+              </p:cNvPr>
+              <p:cNvSpPr/>
+              <p:nvPr/>
+            </p:nvSpPr>
+            <p:spPr>
+              <a:xfrm>
+                <a:off x="6539899" y="5864715"/>
+                <a:ext cx="562971" cy="244852"/>
+              </a:xfrm>
+              <a:prstGeom prst="flowChartTerminator">
+                <a:avLst/>
+              </a:prstGeom>
+            </p:spPr>
+            <p:style>
+              <a:lnRef idx="2">
+                <a:schemeClr val="accent3">
+                  <a:shade val="15000"/>
+                </a:schemeClr>
+              </a:lnRef>
+              <a:fillRef idx="1">
+                <a:schemeClr val="accent3"/>
+              </a:fillRef>
+              <a:effectRef idx="0">
+                <a:schemeClr val="accent3"/>
+              </a:effectRef>
+              <a:fontRef idx="minor">
+                <a:schemeClr val="lt1"/>
+              </a:fontRef>
+            </p:style>
+            <p:txBody>
+              <a:bodyPr rtlCol="0" anchor="ctr"/>
+              <a:lstStyle/>
+              <a:p>
+                <a:pPr algn="ctr"/>
+                <a:r>
+                  <a:rPr lang="ko-KR" altLang="en-US" sz="1100" b="1" dirty="0"/>
+                  <a:t>명상</a:t>
+                </a:r>
+              </a:p>
+            </p:txBody>
+          </p:sp>
+          <p:sp>
+            <p:nvSpPr>
+              <p:cNvPr id="45" name="순서도: 수행의 시작/종료 44">
+                <a:extLst>
+                  <a:ext uri="{FF2B5EF4-FFF2-40B4-BE49-F238E27FC236}">
+                    <a16:creationId xmlns:a16="http://schemas.microsoft.com/office/drawing/2014/main" id="{140763AB-8DC2-D4E5-1C2C-55C57029C325}"/>
+                  </a:ext>
+                </a:extLst>
+              </p:cNvPr>
+              <p:cNvSpPr/>
+              <p:nvPr/>
+            </p:nvSpPr>
+            <p:spPr>
+              <a:xfrm>
+                <a:off x="7162092" y="5864715"/>
+                <a:ext cx="562971" cy="244852"/>
+              </a:xfrm>
+              <a:prstGeom prst="flowChartTerminator">
+                <a:avLst/>
+              </a:prstGeom>
+            </p:spPr>
+            <p:style>
+              <a:lnRef idx="2">
+                <a:schemeClr val="accent3">
+                  <a:shade val="15000"/>
+                </a:schemeClr>
+              </a:lnRef>
+              <a:fillRef idx="1">
+                <a:schemeClr val="accent3"/>
+              </a:fillRef>
+              <a:effectRef idx="0">
+                <a:schemeClr val="accent3"/>
+              </a:effectRef>
+              <a:fontRef idx="minor">
+                <a:schemeClr val="lt1"/>
+              </a:fontRef>
+            </p:style>
+            <p:txBody>
+              <a:bodyPr rtlCol="0" anchor="ctr"/>
+              <a:lstStyle/>
+              <a:p>
+                <a:pPr algn="ctr"/>
+                <a:r>
+                  <a:rPr lang="ko-KR" altLang="en-US" sz="1100" b="1" dirty="0"/>
+                  <a:t>종료</a:t>
+                </a:r>
+              </a:p>
+            </p:txBody>
+          </p:sp>
+        </p:grpSp>
+        <p:sp>
+          <p:nvSpPr>
+            <p:cNvPr id="35" name="말풍선: 사각형 34">
+              <a:extLst>
+                <a:ext uri="{FF2B5EF4-FFF2-40B4-BE49-F238E27FC236}">
+                  <a16:creationId xmlns:a16="http://schemas.microsoft.com/office/drawing/2014/main" id="{7FD0FF5F-30A3-8491-0C51-6F0ACCE9F9BD}"/>
+                </a:ext>
+              </a:extLst>
+            </p:cNvPr>
+            <p:cNvSpPr/>
+            <p:nvPr/>
+          </p:nvSpPr>
+          <p:spPr>
+            <a:xfrm>
+              <a:off x="3445586" y="1355694"/>
+              <a:ext cx="2442526" cy="255814"/>
+            </a:xfrm>
+            <a:prstGeom prst="wedgeRectCallout">
+              <a:avLst>
+                <a:gd name="adj1" fmla="val -54826"/>
+                <a:gd name="adj2" fmla="val 41288"/>
+              </a:avLst>
+            </a:prstGeom>
+          </p:spPr>
+          <p:style>
+            <a:lnRef idx="1">
+              <a:schemeClr val="accent4"/>
+            </a:lnRef>
+            <a:fillRef idx="2">
+              <a:schemeClr val="accent4"/>
+            </a:fillRef>
+            <a:effectRef idx="1">
+              <a:schemeClr val="accent4"/>
+            </a:effectRef>
+            <a:fontRef idx="minor">
+              <a:schemeClr val="dk1"/>
+            </a:fontRef>
+          </p:style>
+          <p:txBody>
+            <a:bodyPr rtlCol="0" anchor="ctr"/>
+            <a:lstStyle/>
+            <a:p>
+              <a:pPr algn="ctr"/>
+              <a:endParaRPr lang="ko-KR" altLang="en-US"/>
+            </a:p>
+          </p:txBody>
+        </p:sp>
+        <p:sp>
+          <p:nvSpPr>
+            <p:cNvPr id="36" name="말풍선: 사각형 35">
+              <a:extLst>
+                <a:ext uri="{FF2B5EF4-FFF2-40B4-BE49-F238E27FC236}">
+                  <a16:creationId xmlns:a16="http://schemas.microsoft.com/office/drawing/2014/main" id="{67514FEC-547A-7759-595B-77F6A2AA3537}"/>
+                </a:ext>
+              </a:extLst>
+            </p:cNvPr>
+            <p:cNvSpPr/>
+            <p:nvPr/>
+          </p:nvSpPr>
+          <p:spPr>
+            <a:xfrm>
+              <a:off x="3445586" y="1474961"/>
+              <a:ext cx="2442526" cy="255814"/>
+            </a:xfrm>
+            <a:prstGeom prst="wedgeRectCallout">
+              <a:avLst>
+                <a:gd name="adj1" fmla="val -54826"/>
+                <a:gd name="adj2" fmla="val 41288"/>
+              </a:avLst>
+            </a:prstGeom>
+          </p:spPr>
+          <p:style>
+            <a:lnRef idx="1">
+              <a:schemeClr val="accent4"/>
+            </a:lnRef>
+            <a:fillRef idx="2">
+              <a:schemeClr val="accent4"/>
+            </a:fillRef>
+            <a:effectRef idx="1">
+              <a:schemeClr val="accent4"/>
+            </a:effectRef>
+            <a:fontRef idx="minor">
+              <a:schemeClr val="dk1"/>
+            </a:fontRef>
+          </p:style>
+          <p:txBody>
+            <a:bodyPr rtlCol="0" anchor="ctr"/>
+            <a:lstStyle/>
+            <a:p>
+              <a:pPr algn="ctr"/>
+              <a:endParaRPr lang="ko-KR" altLang="en-US"/>
+            </a:p>
+          </p:txBody>
+        </p:sp>
+        <p:sp>
+          <p:nvSpPr>
+            <p:cNvPr id="37" name="말풍선: 사각형 36">
+              <a:extLst>
+                <a:ext uri="{FF2B5EF4-FFF2-40B4-BE49-F238E27FC236}">
+                  <a16:creationId xmlns:a16="http://schemas.microsoft.com/office/drawing/2014/main" id="{092D88D2-6CC2-B0F3-1926-D000CBAE08BC}"/>
+                </a:ext>
+              </a:extLst>
+            </p:cNvPr>
+            <p:cNvSpPr/>
+            <p:nvPr/>
+          </p:nvSpPr>
+          <p:spPr>
+            <a:xfrm>
+              <a:off x="3525792" y="1574059"/>
+              <a:ext cx="2442526" cy="321360"/>
+            </a:xfrm>
+            <a:prstGeom prst="wedgeRectCallout">
+              <a:avLst>
+                <a:gd name="adj1" fmla="val -54826"/>
+                <a:gd name="adj2" fmla="val 41288"/>
+              </a:avLst>
+            </a:prstGeom>
+          </p:spPr>
+          <p:style>
+            <a:lnRef idx="1">
+              <a:schemeClr val="accent4"/>
+            </a:lnRef>
+            <a:fillRef idx="2">
+              <a:schemeClr val="accent4"/>
+            </a:fillRef>
+            <a:effectRef idx="1">
+              <a:schemeClr val="accent4"/>
+            </a:effectRef>
+            <a:fontRef idx="minor">
+              <a:schemeClr val="dk1"/>
+            </a:fontRef>
+          </p:style>
+          <p:txBody>
+            <a:bodyPr rtlCol="0" anchor="ctr"/>
+            <a:lstStyle/>
+            <a:p>
+              <a:r>
+                <a:rPr lang="en-US" altLang="ko-KR" sz="1200" dirty="0"/>
+                <a:t>(</a:t>
+              </a:r>
+              <a:r>
+                <a:rPr lang="ko-KR" altLang="en-US" sz="1200" dirty="0"/>
+                <a:t>간뇌도지 효과에 대한 설명</a:t>
+              </a:r>
+              <a:r>
+                <a:rPr lang="en-US" altLang="ko-KR" sz="1200" dirty="0"/>
+                <a:t>)</a:t>
+              </a:r>
+              <a:endParaRPr lang="ko-KR" altLang="en-US" sz="1200" dirty="0"/>
+            </a:p>
+          </p:txBody>
+        </p:sp>
+        <p:sp>
+          <p:nvSpPr>
+            <p:cNvPr id="38" name="사각형: 둥근 모서리 37">
+              <a:extLst>
+                <a:ext uri="{FF2B5EF4-FFF2-40B4-BE49-F238E27FC236}">
+                  <a16:creationId xmlns:a16="http://schemas.microsoft.com/office/drawing/2014/main" id="{8ECAD45A-DE8B-138C-8D52-D3FBB3DBC947}"/>
+                </a:ext>
+              </a:extLst>
+            </p:cNvPr>
+            <p:cNvSpPr/>
+            <p:nvPr/>
+          </p:nvSpPr>
+          <p:spPr>
+            <a:xfrm>
+              <a:off x="4257181" y="5598444"/>
+              <a:ext cx="1839230" cy="281449"/>
+            </a:xfrm>
+            <a:prstGeom prst="roundRect">
+              <a:avLst/>
+            </a:prstGeom>
+          </p:spPr>
+          <p:style>
+            <a:lnRef idx="1">
+              <a:schemeClr val="accent5"/>
+            </a:lnRef>
+            <a:fillRef idx="2">
+              <a:schemeClr val="accent5"/>
+            </a:fillRef>
+            <a:effectRef idx="1">
+              <a:schemeClr val="accent5"/>
+            </a:effectRef>
+            <a:fontRef idx="minor">
+              <a:schemeClr val="dk1"/>
+            </a:fontRef>
+          </p:style>
+          <p:txBody>
+            <a:bodyPr rtlCol="0" anchor="ctr"/>
+            <a:lstStyle/>
+            <a:p>
+              <a:pPr algn="ctr"/>
+              <a:r>
+                <a:rPr lang="ko-KR" altLang="en-US" sz="1100" dirty="0"/>
+                <a:t>내가 걸린 버프</a:t>
+              </a:r>
+              <a:r>
+                <a:rPr lang="en-US" altLang="ko-KR" sz="1100" dirty="0"/>
+                <a:t>, </a:t>
+              </a:r>
+              <a:r>
+                <a:rPr lang="ko-KR" altLang="en-US" sz="1100" dirty="0" err="1"/>
+                <a:t>디버프들</a:t>
+              </a:r>
+              <a:endParaRPr lang="ko-KR" altLang="en-US" sz="1100" dirty="0"/>
+            </a:p>
+          </p:txBody>
+        </p:sp>
+      </p:grpSp>
+      <p:sp>
+        <p:nvSpPr>
+          <p:cNvPr id="46" name="화살표: 오른쪽 45">
+            <a:extLst>
+              <a:ext uri="{FF2B5EF4-FFF2-40B4-BE49-F238E27FC236}">
+                <a16:creationId xmlns:a16="http://schemas.microsoft.com/office/drawing/2014/main" id="{D90ED766-62C2-6B51-48B2-BF0CBD00E837}"/>
+              </a:ext>
+            </a:extLst>
+          </p:cNvPr>
+          <p:cNvSpPr/>
+          <p:nvPr/>
+        </p:nvSpPr>
+        <p:spPr>
+          <a:xfrm>
+            <a:off x="6553200" y="3234404"/>
+            <a:ext cx="729343" cy="479247"/>
+          </a:xfrm>
+          <a:prstGeom prst="rightArrow">
+            <a:avLst/>
+          </a:prstGeom>
+        </p:spPr>
+        <p:style>
+          <a:lnRef idx="2">
+            <a:schemeClr val="accent1">
+              <a:shade val="15000"/>
+            </a:schemeClr>
+          </a:lnRef>
+          <a:fillRef idx="1">
+            <a:schemeClr val="accent1"/>
+          </a:fillRef>
+          <a:effectRef idx="0">
+            <a:schemeClr val="accent1"/>
+          </a:effectRef>
+          <a:fontRef idx="minor">
+            <a:schemeClr val="lt1"/>
+          </a:fontRef>
+        </p:style>
+        <p:txBody>
+          <a:bodyPr rtlCol="0" anchor="ctr"/>
+          <a:lstStyle/>
+          <a:p>
+            <a:pPr algn="ctr"/>
+            <a:endParaRPr lang="ko-KR" altLang="en-US"/>
+          </a:p>
+        </p:txBody>
+      </p:sp>
+      <p:sp>
+        <p:nvSpPr>
+          <p:cNvPr id="48" name="직사각형 47">
+            <a:extLst>
+              <a:ext uri="{FF2B5EF4-FFF2-40B4-BE49-F238E27FC236}">
+                <a16:creationId xmlns:a16="http://schemas.microsoft.com/office/drawing/2014/main" id="{1012D9C3-282F-5269-2C0A-FD2388EA88BC}"/>
+              </a:ext>
+            </a:extLst>
+          </p:cNvPr>
+          <p:cNvSpPr/>
+          <p:nvPr/>
+        </p:nvSpPr>
+        <p:spPr>
+          <a:xfrm>
+            <a:off x="3303500" y="5937509"/>
+            <a:ext cx="2863769" cy="288695"/>
+          </a:xfrm>
+          <a:prstGeom prst="rect">
+            <a:avLst/>
+          </a:prstGeom>
+          <a:solidFill>
+            <a:schemeClr val="dk1">
+              <a:alpha val="80000"/>
+            </a:schemeClr>
+          </a:solidFill>
+        </p:spPr>
+        <p:style>
+          <a:lnRef idx="2">
+            <a:schemeClr val="dk1">
+              <a:shade val="15000"/>
+            </a:schemeClr>
+          </a:lnRef>
+          <a:fillRef idx="1">
+            <a:schemeClr val="dk1"/>
+          </a:fillRef>
+          <a:effectRef idx="0">
+            <a:schemeClr val="dk1"/>
+          </a:effectRef>
+          <a:fontRef idx="minor">
+            <a:schemeClr val="lt1"/>
+          </a:fontRef>
+        </p:style>
+        <p:txBody>
+          <a:bodyPr rtlCol="0" anchor="ctr"/>
+          <a:lstStyle/>
+          <a:p>
+            <a:pPr algn="ctr"/>
+            <a:endParaRPr lang="ko-KR" altLang="en-US"/>
+          </a:p>
+        </p:txBody>
+      </p:sp>
+    </p:spTree>
+    <p:extLst>
+      <p:ext uri="{BB962C8B-B14F-4D97-AF65-F5344CB8AC3E}">
+        <p14:creationId xmlns:p14="http://schemas.microsoft.com/office/powerpoint/2010/main" val="3853579054"/>
+      </p:ext>
+    </p:extLst>
+  </p:cSld>
+  <p:clrMapOvr>
+    <a:masterClrMapping/>
+  </p:clrMapOvr>
+</p:sld>
+</file>
+
+<file path=ppt/slides/slide25.xml><?xml version="1.0" encoding="utf-8"?>
+<p:sld xmlns:a="http://schemas.openxmlformats.org/drawingml/2006/main" xmlns:r="http://schemas.openxmlformats.org/officeDocument/2006/relationships" xmlns:p="http://schemas.openxmlformats.org/presentationml/2006/main">
+  <p:cSld>
+    <p:spTree>
+      <p:nvGrpSpPr>
+        <p:cNvPr id="1" name="">
+          <a:extLst>
+            <a:ext uri="{FF2B5EF4-FFF2-40B4-BE49-F238E27FC236}">
+              <a16:creationId xmlns:a16="http://schemas.microsoft.com/office/drawing/2014/main" id="{EC29CC5A-8D13-B325-1F8C-C457C36C343E}"/>
+            </a:ext>
+          </a:extLst>
+        </p:cNvPr>
+        <p:cNvGrpSpPr/>
+        <p:nvPr/>
+      </p:nvGrpSpPr>
+      <p:grpSpPr>
+        <a:xfrm>
+          <a:off x="0" y="0"/>
+          <a:ext cx="0" cy="0"/>
+          <a:chOff x="0" y="0"/>
+          <a:chExt cx="0" cy="0"/>
+        </a:xfrm>
+      </p:grpSpPr>
+      <p:sp>
+        <p:nvSpPr>
+          <p:cNvPr id="7" name="TextBox 6">
+            <a:extLst>
+              <a:ext uri="{FF2B5EF4-FFF2-40B4-BE49-F238E27FC236}">
+                <a16:creationId xmlns:a16="http://schemas.microsoft.com/office/drawing/2014/main" id="{1524B174-9C88-9495-9715-A2A0D676DADD}"/>
+              </a:ext>
+            </a:extLst>
+          </p:cNvPr>
+          <p:cNvSpPr txBox="1"/>
+          <p:nvPr/>
+        </p:nvSpPr>
+        <p:spPr>
+          <a:xfrm>
+            <a:off x="404039" y="341501"/>
+            <a:ext cx="3242676" cy="869790"/>
+          </a:xfrm>
+          <a:prstGeom prst="rect">
+            <a:avLst/>
+          </a:prstGeom>
+          <a:noFill/>
+        </p:spPr>
+        <p:txBody>
+          <a:bodyPr wrap="square" rtlCol="0">
+            <a:spAutoFit/>
+          </a:bodyPr>
+          <a:lstStyle/>
+          <a:p>
+            <a:pPr>
+              <a:lnSpc>
+                <a:spcPct val="150000"/>
+              </a:lnSpc>
+            </a:pPr>
+            <a:r>
+              <a:rPr lang="ko-KR" altLang="en-US" b="1" dirty="0"/>
+              <a:t>모바일 화면 기준</a:t>
+            </a:r>
+            <a:r>
+              <a:rPr lang="en-US" altLang="ko-KR" b="1" dirty="0"/>
+              <a:t>,</a:t>
+            </a:r>
+            <a:endParaRPr lang="en-US" altLang="ko-KR" dirty="0"/>
+          </a:p>
+          <a:p>
+            <a:pPr marL="285750" indent="-285750">
+              <a:lnSpc>
+                <a:spcPct val="150000"/>
+              </a:lnSpc>
+              <a:buFont typeface="Arial" panose="020B0604020202020204" pitchFamily="34" charset="0"/>
+              <a:buChar char="•"/>
+            </a:pPr>
+            <a:r>
+              <a:rPr lang="en-US" altLang="ko-KR" b="1" dirty="0"/>
+              <a:t>11 </a:t>
+            </a:r>
+            <a:r>
+              <a:rPr lang="ko-KR" altLang="en-US" b="1" dirty="0"/>
+              <a:t>아군</a:t>
+            </a:r>
+            <a:r>
+              <a:rPr lang="en-US" altLang="ko-KR" b="1" dirty="0"/>
+              <a:t>/</a:t>
+            </a:r>
+            <a:r>
+              <a:rPr lang="ko-KR" altLang="en-US" b="1" dirty="0"/>
+              <a:t>적군 기물 체크</a:t>
+            </a:r>
+          </a:p>
+        </p:txBody>
+      </p:sp>
+      <p:grpSp>
+        <p:nvGrpSpPr>
+          <p:cNvPr id="14" name="그룹 13">
+            <a:extLst>
+              <a:ext uri="{FF2B5EF4-FFF2-40B4-BE49-F238E27FC236}">
+                <a16:creationId xmlns:a16="http://schemas.microsoft.com/office/drawing/2014/main" id="{3EE6DE7A-EF47-CE72-EB89-9AF9345AA305}"/>
+              </a:ext>
+            </a:extLst>
+          </p:cNvPr>
+          <p:cNvGrpSpPr/>
+          <p:nvPr/>
+        </p:nvGrpSpPr>
+        <p:grpSpPr>
+          <a:xfrm>
+            <a:off x="4653327" y="549000"/>
+            <a:ext cx="2885345" cy="5760000"/>
+            <a:chOff x="4653327" y="549000"/>
+            <a:chExt cx="2885345" cy="5760000"/>
+          </a:xfrm>
+        </p:grpSpPr>
+        <p:grpSp>
+          <p:nvGrpSpPr>
+            <p:cNvPr id="20" name="그룹 19">
+              <a:extLst>
+                <a:ext uri="{FF2B5EF4-FFF2-40B4-BE49-F238E27FC236}">
+                  <a16:creationId xmlns:a16="http://schemas.microsoft.com/office/drawing/2014/main" id="{B9FF1891-DE62-0DB6-21A9-4D87F6E8074F}"/>
+                </a:ext>
+              </a:extLst>
+            </p:cNvPr>
+            <p:cNvGrpSpPr/>
+            <p:nvPr/>
+          </p:nvGrpSpPr>
+          <p:grpSpPr>
+            <a:xfrm>
+              <a:off x="4653327" y="549000"/>
+              <a:ext cx="2885345" cy="5760000"/>
+              <a:chOff x="3292613" y="549000"/>
+              <a:chExt cx="2885345" cy="5760000"/>
+            </a:xfrm>
+          </p:grpSpPr>
+          <p:sp>
+            <p:nvSpPr>
+              <p:cNvPr id="4" name="직사각형 3">
+                <a:extLst>
+                  <a:ext uri="{FF2B5EF4-FFF2-40B4-BE49-F238E27FC236}">
+                    <a16:creationId xmlns:a16="http://schemas.microsoft.com/office/drawing/2014/main" id="{6793379C-A61A-0EAA-1625-64EAFE547BA2}"/>
+                  </a:ext>
+                </a:extLst>
+              </p:cNvPr>
+              <p:cNvSpPr/>
+              <p:nvPr/>
+            </p:nvSpPr>
+            <p:spPr>
+              <a:xfrm>
+                <a:off x="3292613" y="549000"/>
+                <a:ext cx="2880000" cy="5760000"/>
+              </a:xfrm>
+              <a:prstGeom prst="rect">
+                <a:avLst/>
+              </a:prstGeom>
+            </p:spPr>
+            <p:style>
+              <a:lnRef idx="2">
+                <a:schemeClr val="accent1">
+                  <a:shade val="15000"/>
+                </a:schemeClr>
+              </a:lnRef>
+              <a:fillRef idx="1">
+                <a:schemeClr val="accent1"/>
+              </a:fillRef>
+              <a:effectRef idx="0">
+                <a:schemeClr val="accent1"/>
+              </a:effectRef>
+              <a:fontRef idx="minor">
+                <a:schemeClr val="lt1"/>
+              </a:fontRef>
+            </p:style>
+            <p:txBody>
+              <a:bodyPr rtlCol="0" anchor="ctr"/>
+              <a:lstStyle/>
+              <a:p>
+                <a:pPr algn="ctr"/>
+                <a:endParaRPr lang="ko-KR" altLang="en-US"/>
+              </a:p>
+            </p:txBody>
+          </p:sp>
+          <p:pic>
+            <p:nvPicPr>
+              <p:cNvPr id="3" name="그림 2">
+                <a:extLst>
+                  <a:ext uri="{FF2B5EF4-FFF2-40B4-BE49-F238E27FC236}">
+                    <a16:creationId xmlns:a16="http://schemas.microsoft.com/office/drawing/2014/main" id="{B49137B6-6B9F-73B9-F4D3-A1F4BC6620EC}"/>
+                  </a:ext>
+                </a:extLst>
+              </p:cNvPr>
+              <p:cNvPicPr>
+                <a:picLocks noChangeAspect="1"/>
+              </p:cNvPicPr>
+              <p:nvPr/>
+            </p:nvPicPr>
+            <p:blipFill>
+              <a:blip r:embed="rId2"/>
+              <a:stretch>
+                <a:fillRect/>
+              </a:stretch>
+            </p:blipFill>
+            <p:spPr>
+              <a:xfrm>
+                <a:off x="3292613" y="1953035"/>
+                <a:ext cx="2885345" cy="2951930"/>
+              </a:xfrm>
+              <a:prstGeom prst="rect">
+                <a:avLst/>
+              </a:prstGeom>
+            </p:spPr>
+          </p:pic>
+          <p:pic>
+            <p:nvPicPr>
+              <p:cNvPr id="8" name="그림 7">
+                <a:extLst>
+                  <a:ext uri="{FF2B5EF4-FFF2-40B4-BE49-F238E27FC236}">
+                    <a16:creationId xmlns:a16="http://schemas.microsoft.com/office/drawing/2014/main" id="{359BC741-9C5F-81B4-BF61-28200D4D072F}"/>
+                  </a:ext>
+                </a:extLst>
+              </p:cNvPr>
+              <p:cNvPicPr>
+                <a:picLocks noChangeAspect="1"/>
+              </p:cNvPicPr>
+              <p:nvPr/>
+            </p:nvPicPr>
+            <p:blipFill>
+              <a:blip r:embed="rId3"/>
+              <a:stretch>
+                <a:fillRect/>
+              </a:stretch>
+            </p:blipFill>
+            <p:spPr>
+              <a:xfrm>
+                <a:off x="3360495" y="615530"/>
+                <a:ext cx="2746802" cy="690756"/>
+              </a:xfrm>
+              <a:prstGeom prst="rect">
+                <a:avLst/>
+              </a:prstGeom>
+            </p:spPr>
+          </p:pic>
+          <p:sp>
+            <p:nvSpPr>
+              <p:cNvPr id="5" name="순서도: 수행의 시작/종료 4">
+                <a:extLst>
+                  <a:ext uri="{FF2B5EF4-FFF2-40B4-BE49-F238E27FC236}">
+                    <a16:creationId xmlns:a16="http://schemas.microsoft.com/office/drawing/2014/main" id="{5C9F6BDB-A3C9-E41E-94CC-E02569FA398C}"/>
+                  </a:ext>
+                </a:extLst>
+              </p:cNvPr>
+              <p:cNvSpPr/>
+              <p:nvPr/>
+            </p:nvSpPr>
+            <p:spPr>
+              <a:xfrm>
+                <a:off x="5236440" y="603431"/>
+                <a:ext cx="859971" cy="264728"/>
+              </a:xfrm>
+              <a:prstGeom prst="flowChartTerminator">
+                <a:avLst/>
+              </a:prstGeom>
+            </p:spPr>
+            <p:style>
+              <a:lnRef idx="2">
+                <a:schemeClr val="accent2">
+                  <a:shade val="15000"/>
+                </a:schemeClr>
+              </a:lnRef>
+              <a:fillRef idx="1">
+                <a:schemeClr val="accent2"/>
+              </a:fillRef>
+              <a:effectRef idx="0">
+                <a:schemeClr val="accent2"/>
+              </a:effectRef>
+              <a:fontRef idx="minor">
+                <a:schemeClr val="lt1"/>
+              </a:fontRef>
+            </p:style>
+            <p:txBody>
+              <a:bodyPr rtlCol="0" anchor="ctr"/>
+              <a:lstStyle/>
+              <a:p>
+                <a:pPr algn="ctr"/>
+                <a:r>
+                  <a:rPr lang="ko-KR" altLang="en-US" sz="1200" b="1" dirty="0"/>
+                  <a:t>항복</a:t>
+                </a:r>
+              </a:p>
+            </p:txBody>
+          </p:sp>
+          <p:pic>
+            <p:nvPicPr>
+              <p:cNvPr id="10" name="그림 9">
+                <a:extLst>
+                  <a:ext uri="{FF2B5EF4-FFF2-40B4-BE49-F238E27FC236}">
+                    <a16:creationId xmlns:a16="http://schemas.microsoft.com/office/drawing/2014/main" id="{DCDE5A58-B8D4-1E0B-273A-ED33F3294939}"/>
+                  </a:ext>
+                </a:extLst>
+              </p:cNvPr>
+              <p:cNvPicPr>
+                <a:picLocks noChangeAspect="1"/>
+              </p:cNvPicPr>
+              <p:nvPr/>
+            </p:nvPicPr>
+            <p:blipFill>
+              <a:blip r:embed="rId4"/>
+              <a:srcRect b="21463"/>
+              <a:stretch>
+                <a:fillRect/>
+              </a:stretch>
+            </p:blipFill>
+            <p:spPr>
+              <a:xfrm>
+                <a:off x="4257181" y="4962581"/>
+                <a:ext cx="1850116" cy="578247"/>
+              </a:xfrm>
+              <a:prstGeom prst="rect">
+                <a:avLst/>
+              </a:prstGeom>
+            </p:spPr>
+          </p:pic>
+          <p:pic>
+            <p:nvPicPr>
+              <p:cNvPr id="13" name="그림 12">
+                <a:extLst>
+                  <a:ext uri="{FF2B5EF4-FFF2-40B4-BE49-F238E27FC236}">
+                    <a16:creationId xmlns:a16="http://schemas.microsoft.com/office/drawing/2014/main" id="{498D2AF2-2F17-A78A-9EE6-832FA3422A5F}"/>
+                  </a:ext>
+                </a:extLst>
+              </p:cNvPr>
+              <p:cNvPicPr>
+                <a:picLocks noChangeAspect="1"/>
+              </p:cNvPicPr>
+              <p:nvPr/>
+            </p:nvPicPr>
+            <p:blipFill>
+              <a:blip r:embed="rId5"/>
+              <a:stretch>
+                <a:fillRect/>
+              </a:stretch>
+            </p:blipFill>
+            <p:spPr>
+              <a:xfrm>
+                <a:off x="3380270" y="4962581"/>
+                <a:ext cx="800141" cy="819192"/>
+              </a:xfrm>
+              <a:prstGeom prst="rect">
+                <a:avLst/>
+              </a:prstGeom>
+            </p:spPr>
+          </p:pic>
+          <p:grpSp>
+            <p:nvGrpSpPr>
+              <p:cNvPr id="24" name="그룹 23">
+                <a:extLst>
+                  <a:ext uri="{FF2B5EF4-FFF2-40B4-BE49-F238E27FC236}">
+                    <a16:creationId xmlns:a16="http://schemas.microsoft.com/office/drawing/2014/main" id="{4A0D85B2-5EBF-B603-1357-178D8FDBCE5A}"/>
+                  </a:ext>
+                </a:extLst>
+              </p:cNvPr>
+              <p:cNvGrpSpPr/>
+              <p:nvPr/>
+            </p:nvGrpSpPr>
+            <p:grpSpPr>
+              <a:xfrm>
+                <a:off x="3351095" y="5962689"/>
+                <a:ext cx="2799745" cy="268895"/>
+                <a:chOff x="4681825" y="5864715"/>
+                <a:chExt cx="3043238" cy="249851"/>
+              </a:xfrm>
+            </p:grpSpPr>
+            <p:sp>
+              <p:nvSpPr>
+                <p:cNvPr id="15" name="순서도: 수행의 시작/종료 14">
+                  <a:extLst>
+                    <a:ext uri="{FF2B5EF4-FFF2-40B4-BE49-F238E27FC236}">
+                      <a16:creationId xmlns:a16="http://schemas.microsoft.com/office/drawing/2014/main" id="{B986416C-75DB-CDF6-F2FD-44C3C1E3F039}"/>
+                    </a:ext>
+                  </a:extLst>
+                </p:cNvPr>
+                <p:cNvSpPr/>
+                <p:nvPr/>
+              </p:nvSpPr>
+              <p:spPr>
+                <a:xfrm>
+                  <a:off x="4681825" y="5864715"/>
+                  <a:ext cx="562971" cy="244852"/>
+                </a:xfrm>
+                <a:prstGeom prst="flowChartTerminator">
+                  <a:avLst/>
+                </a:prstGeom>
+              </p:spPr>
+              <p:style>
+                <a:lnRef idx="2">
+                  <a:schemeClr val="accent3">
+                    <a:shade val="15000"/>
+                  </a:schemeClr>
+                </a:lnRef>
+                <a:fillRef idx="1">
+                  <a:schemeClr val="accent3"/>
+                </a:fillRef>
+                <a:effectRef idx="0">
+                  <a:schemeClr val="accent3"/>
+                </a:effectRef>
+                <a:fontRef idx="minor">
+                  <a:schemeClr val="lt1"/>
+                </a:fontRef>
+              </p:style>
+              <p:txBody>
+                <a:bodyPr rtlCol="0" anchor="ctr"/>
+                <a:lstStyle/>
+                <a:p>
+                  <a:pPr algn="ctr"/>
+                  <a:r>
+                    <a:rPr lang="ko-KR" altLang="en-US" sz="1100" b="1" dirty="0"/>
+                    <a:t>이동</a:t>
+                  </a:r>
+                </a:p>
+              </p:txBody>
+            </p:sp>
+            <p:sp>
+              <p:nvSpPr>
+                <p:cNvPr id="17" name="순서도: 수행의 시작/종료 16">
+                  <a:extLst>
+                    <a:ext uri="{FF2B5EF4-FFF2-40B4-BE49-F238E27FC236}">
+                      <a16:creationId xmlns:a16="http://schemas.microsoft.com/office/drawing/2014/main" id="{A10AB487-3ADC-2878-E7F7-1D1DA785A680}"/>
+                    </a:ext>
+                  </a:extLst>
+                </p:cNvPr>
+                <p:cNvSpPr/>
+                <p:nvPr/>
+              </p:nvSpPr>
+              <p:spPr>
+                <a:xfrm>
+                  <a:off x="5298348" y="5869714"/>
+                  <a:ext cx="562971" cy="244852"/>
+                </a:xfrm>
+                <a:prstGeom prst="flowChartTerminator">
+                  <a:avLst/>
+                </a:prstGeom>
+              </p:spPr>
+              <p:style>
+                <a:lnRef idx="2">
+                  <a:schemeClr val="accent3">
+                    <a:shade val="15000"/>
+                  </a:schemeClr>
+                </a:lnRef>
+                <a:fillRef idx="1">
+                  <a:schemeClr val="accent3"/>
+                </a:fillRef>
+                <a:effectRef idx="0">
+                  <a:schemeClr val="accent3"/>
+                </a:effectRef>
+                <a:fontRef idx="minor">
+                  <a:schemeClr val="lt1"/>
+                </a:fontRef>
+              </p:style>
+              <p:txBody>
+                <a:bodyPr rtlCol="0" anchor="ctr"/>
+                <a:lstStyle/>
+                <a:p>
+                  <a:pPr algn="ctr"/>
+                  <a:r>
+                    <a:rPr lang="ko-KR" altLang="en-US" sz="1100" b="1" dirty="0"/>
+                    <a:t>공격</a:t>
+                  </a:r>
+                </a:p>
+              </p:txBody>
+            </p:sp>
+            <p:sp>
+              <p:nvSpPr>
+                <p:cNvPr id="19" name="순서도: 수행의 시작/종료 18">
+                  <a:extLst>
+                    <a:ext uri="{FF2B5EF4-FFF2-40B4-BE49-F238E27FC236}">
+                      <a16:creationId xmlns:a16="http://schemas.microsoft.com/office/drawing/2014/main" id="{B9C8BE47-BC9C-6F76-628A-6DAE98E6DA38}"/>
+                    </a:ext>
+                  </a:extLst>
+                </p:cNvPr>
+                <p:cNvSpPr/>
+                <p:nvPr/>
+              </p:nvSpPr>
+              <p:spPr>
+                <a:xfrm>
+                  <a:off x="5917706" y="5864715"/>
+                  <a:ext cx="562971" cy="244852"/>
+                </a:xfrm>
+                <a:prstGeom prst="flowChartTerminator">
+                  <a:avLst/>
+                </a:prstGeom>
+              </p:spPr>
+              <p:style>
+                <a:lnRef idx="2">
+                  <a:schemeClr val="accent3">
+                    <a:shade val="15000"/>
+                  </a:schemeClr>
+                </a:lnRef>
+                <a:fillRef idx="1">
+                  <a:schemeClr val="accent3"/>
+                </a:fillRef>
+                <a:effectRef idx="0">
+                  <a:schemeClr val="accent3"/>
+                </a:effectRef>
+                <a:fontRef idx="minor">
+                  <a:schemeClr val="lt1"/>
+                </a:fontRef>
+              </p:style>
+              <p:txBody>
+                <a:bodyPr rtlCol="0" anchor="ctr"/>
+                <a:lstStyle/>
+                <a:p>
+                  <a:pPr algn="ctr"/>
+                  <a:r>
+                    <a:rPr lang="ko-KR" altLang="en-US" sz="1100" b="1" dirty="0"/>
+                    <a:t>책략</a:t>
+                  </a:r>
+                </a:p>
+              </p:txBody>
+            </p:sp>
+            <p:sp>
+              <p:nvSpPr>
+                <p:cNvPr id="21" name="순서도: 수행의 시작/종료 20">
+                  <a:extLst>
+                    <a:ext uri="{FF2B5EF4-FFF2-40B4-BE49-F238E27FC236}">
+                      <a16:creationId xmlns:a16="http://schemas.microsoft.com/office/drawing/2014/main" id="{7279EFD6-A289-F939-2BCC-EB4151CBFA3F}"/>
+                    </a:ext>
+                  </a:extLst>
+                </p:cNvPr>
+                <p:cNvSpPr/>
+                <p:nvPr/>
+              </p:nvSpPr>
+              <p:spPr>
+                <a:xfrm>
+                  <a:off x="6539899" y="5864715"/>
+                  <a:ext cx="562971" cy="244852"/>
+                </a:xfrm>
+                <a:prstGeom prst="flowChartTerminator">
+                  <a:avLst/>
+                </a:prstGeom>
+              </p:spPr>
+              <p:style>
+                <a:lnRef idx="2">
+                  <a:schemeClr val="accent3">
+                    <a:shade val="15000"/>
+                  </a:schemeClr>
+                </a:lnRef>
+                <a:fillRef idx="1">
+                  <a:schemeClr val="accent3"/>
+                </a:fillRef>
+                <a:effectRef idx="0">
+                  <a:schemeClr val="accent3"/>
+                </a:effectRef>
+                <a:fontRef idx="minor">
+                  <a:schemeClr val="lt1"/>
+                </a:fontRef>
+              </p:style>
+              <p:txBody>
+                <a:bodyPr rtlCol="0" anchor="ctr"/>
+                <a:lstStyle/>
+                <a:p>
+                  <a:pPr algn="ctr"/>
+                  <a:r>
+                    <a:rPr lang="ko-KR" altLang="en-US" sz="1100" b="1" dirty="0"/>
+                    <a:t>명상</a:t>
+                  </a:r>
+                </a:p>
+              </p:txBody>
+            </p:sp>
+            <p:sp>
+              <p:nvSpPr>
+                <p:cNvPr id="23" name="순서도: 수행의 시작/종료 22">
+                  <a:extLst>
+                    <a:ext uri="{FF2B5EF4-FFF2-40B4-BE49-F238E27FC236}">
+                      <a16:creationId xmlns:a16="http://schemas.microsoft.com/office/drawing/2014/main" id="{062B1639-BA55-2EA5-EA39-BC8C7C2BCAA1}"/>
+                    </a:ext>
+                  </a:extLst>
+                </p:cNvPr>
+                <p:cNvSpPr/>
+                <p:nvPr/>
+              </p:nvSpPr>
+              <p:spPr>
+                <a:xfrm>
+                  <a:off x="7162092" y="5864715"/>
+                  <a:ext cx="562971" cy="244852"/>
+                </a:xfrm>
+                <a:prstGeom prst="flowChartTerminator">
+                  <a:avLst/>
+                </a:prstGeom>
+              </p:spPr>
+              <p:style>
+                <a:lnRef idx="2">
+                  <a:schemeClr val="accent3">
+                    <a:shade val="15000"/>
+                  </a:schemeClr>
+                </a:lnRef>
+                <a:fillRef idx="1">
+                  <a:schemeClr val="accent3"/>
+                </a:fillRef>
+                <a:effectRef idx="0">
+                  <a:schemeClr val="accent3"/>
+                </a:effectRef>
+                <a:fontRef idx="minor">
+                  <a:schemeClr val="lt1"/>
+                </a:fontRef>
+              </p:style>
+              <p:txBody>
+                <a:bodyPr rtlCol="0" anchor="ctr"/>
+                <a:lstStyle/>
+                <a:p>
+                  <a:pPr algn="ctr"/>
+                  <a:r>
+                    <a:rPr lang="ko-KR" altLang="en-US" sz="1100" b="1" dirty="0"/>
+                    <a:t>종료</a:t>
+                  </a:r>
+                </a:p>
+              </p:txBody>
+            </p:sp>
+          </p:grpSp>
+          <p:sp>
+            <p:nvSpPr>
+              <p:cNvPr id="27" name="말풍선: 사각형 26">
+                <a:extLst>
+                  <a:ext uri="{FF2B5EF4-FFF2-40B4-BE49-F238E27FC236}">
+                    <a16:creationId xmlns:a16="http://schemas.microsoft.com/office/drawing/2014/main" id="{68FA12B8-E09C-A432-72C4-22F9AD364CF6}"/>
+                  </a:ext>
+                </a:extLst>
+              </p:cNvPr>
+              <p:cNvSpPr/>
+              <p:nvPr/>
+            </p:nvSpPr>
+            <p:spPr>
+              <a:xfrm>
+                <a:off x="3445586" y="1355694"/>
+                <a:ext cx="2442526" cy="255814"/>
+              </a:xfrm>
+              <a:prstGeom prst="wedgeRectCallout">
+                <a:avLst>
+                  <a:gd name="adj1" fmla="val -54826"/>
+                  <a:gd name="adj2" fmla="val 41288"/>
+                </a:avLst>
+              </a:prstGeom>
+            </p:spPr>
+            <p:style>
+              <a:lnRef idx="1">
+                <a:schemeClr val="accent4"/>
+              </a:lnRef>
+              <a:fillRef idx="2">
+                <a:schemeClr val="accent4"/>
+              </a:fillRef>
+              <a:effectRef idx="1">
+                <a:schemeClr val="accent4"/>
+              </a:effectRef>
+              <a:fontRef idx="minor">
+                <a:schemeClr val="dk1"/>
+              </a:fontRef>
+            </p:style>
+            <p:txBody>
+              <a:bodyPr rtlCol="0" anchor="ctr"/>
+              <a:lstStyle/>
+              <a:p>
+                <a:pPr algn="ctr"/>
+                <a:endParaRPr lang="ko-KR" altLang="en-US"/>
+              </a:p>
+            </p:txBody>
+          </p:sp>
+          <p:sp>
+            <p:nvSpPr>
+              <p:cNvPr id="29" name="말풍선: 사각형 28">
+                <a:extLst>
+                  <a:ext uri="{FF2B5EF4-FFF2-40B4-BE49-F238E27FC236}">
+                    <a16:creationId xmlns:a16="http://schemas.microsoft.com/office/drawing/2014/main" id="{1CCA06BD-AD35-DBF8-8C45-C917A5BBF155}"/>
+                  </a:ext>
+                </a:extLst>
+              </p:cNvPr>
+              <p:cNvSpPr/>
+              <p:nvPr/>
+            </p:nvSpPr>
+            <p:spPr>
+              <a:xfrm>
+                <a:off x="3445586" y="1474961"/>
+                <a:ext cx="2442526" cy="255814"/>
+              </a:xfrm>
+              <a:prstGeom prst="wedgeRectCallout">
+                <a:avLst>
+                  <a:gd name="adj1" fmla="val -54826"/>
+                  <a:gd name="adj2" fmla="val 41288"/>
+                </a:avLst>
+              </a:prstGeom>
+            </p:spPr>
+            <p:style>
+              <a:lnRef idx="1">
+                <a:schemeClr val="accent4"/>
+              </a:lnRef>
+              <a:fillRef idx="2">
+                <a:schemeClr val="accent4"/>
+              </a:fillRef>
+              <a:effectRef idx="1">
+                <a:schemeClr val="accent4"/>
+              </a:effectRef>
+              <a:fontRef idx="minor">
+                <a:schemeClr val="dk1"/>
+              </a:fontRef>
+            </p:style>
+            <p:txBody>
+              <a:bodyPr rtlCol="0" anchor="ctr"/>
+              <a:lstStyle/>
+              <a:p>
+                <a:pPr algn="ctr"/>
+                <a:endParaRPr lang="ko-KR" altLang="en-US"/>
+              </a:p>
+            </p:txBody>
+          </p:sp>
+          <p:sp>
+            <p:nvSpPr>
+              <p:cNvPr id="31" name="말풍선: 사각형 30">
+                <a:extLst>
+                  <a:ext uri="{FF2B5EF4-FFF2-40B4-BE49-F238E27FC236}">
+                    <a16:creationId xmlns:a16="http://schemas.microsoft.com/office/drawing/2014/main" id="{5FBA34B4-F4CC-98BE-0FB2-9CAB4A266D0F}"/>
+                  </a:ext>
+                </a:extLst>
+              </p:cNvPr>
+              <p:cNvSpPr/>
+              <p:nvPr/>
+            </p:nvSpPr>
+            <p:spPr>
+              <a:xfrm>
+                <a:off x="3525792" y="1574059"/>
+                <a:ext cx="2442526" cy="321360"/>
+              </a:xfrm>
+              <a:prstGeom prst="wedgeRectCallout">
+                <a:avLst>
+                  <a:gd name="adj1" fmla="val -54826"/>
+                  <a:gd name="adj2" fmla="val 41288"/>
+                </a:avLst>
+              </a:prstGeom>
+            </p:spPr>
+            <p:style>
+              <a:lnRef idx="1">
+                <a:schemeClr val="accent4"/>
+              </a:lnRef>
+              <a:fillRef idx="2">
+                <a:schemeClr val="accent4"/>
+              </a:fillRef>
+              <a:effectRef idx="1">
+                <a:schemeClr val="accent4"/>
+              </a:effectRef>
+              <a:fontRef idx="minor">
+                <a:schemeClr val="dk1"/>
+              </a:fontRef>
+            </p:style>
+            <p:txBody>
+              <a:bodyPr rtlCol="0" anchor="ctr"/>
+              <a:lstStyle/>
+              <a:p>
+                <a:r>
+                  <a:rPr lang="ko-KR" altLang="en-US" sz="1200" dirty="0"/>
+                  <a:t>조운이 </a:t>
+                </a:r>
+                <a:r>
+                  <a:rPr lang="en-US" altLang="ko-KR" sz="1200" dirty="0"/>
+                  <a:t>‘</a:t>
+                </a:r>
+                <a:r>
+                  <a:rPr lang="ko-KR" altLang="en-US" sz="1200" dirty="0"/>
+                  <a:t>고유기술</a:t>
+                </a:r>
+                <a:r>
+                  <a:rPr lang="en-US" altLang="ko-KR" sz="1200" dirty="0"/>
+                  <a:t>’ </a:t>
+                </a:r>
+                <a:r>
+                  <a:rPr lang="ko-KR" altLang="en-US" sz="1200" dirty="0"/>
+                  <a:t>을 발동했다</a:t>
+                </a:r>
+                <a:r>
+                  <a:rPr lang="en-US" altLang="ko-KR" sz="1200" dirty="0"/>
+                  <a:t>!</a:t>
+                </a:r>
+                <a:endParaRPr lang="ko-KR" altLang="en-US" sz="1200" dirty="0"/>
+              </a:p>
+            </p:txBody>
+          </p:sp>
+          <p:sp>
+            <p:nvSpPr>
+              <p:cNvPr id="2" name="사각형: 둥근 모서리 1">
+                <a:extLst>
+                  <a:ext uri="{FF2B5EF4-FFF2-40B4-BE49-F238E27FC236}">
+                    <a16:creationId xmlns:a16="http://schemas.microsoft.com/office/drawing/2014/main" id="{52D0CAB5-051B-6412-2950-E931DA260428}"/>
+                  </a:ext>
+                </a:extLst>
+              </p:cNvPr>
+              <p:cNvSpPr/>
+              <p:nvPr/>
+            </p:nvSpPr>
+            <p:spPr>
+              <a:xfrm>
+                <a:off x="4257181" y="5598444"/>
+                <a:ext cx="1839230" cy="281449"/>
+              </a:xfrm>
+              <a:prstGeom prst="roundRect">
+                <a:avLst/>
+              </a:prstGeom>
+            </p:spPr>
+            <p:style>
+              <a:lnRef idx="1">
+                <a:schemeClr val="accent5"/>
+              </a:lnRef>
+              <a:fillRef idx="2">
+                <a:schemeClr val="accent5"/>
+              </a:fillRef>
+              <a:effectRef idx="1">
+                <a:schemeClr val="accent5"/>
+              </a:effectRef>
+              <a:fontRef idx="minor">
+                <a:schemeClr val="dk1"/>
+              </a:fontRef>
+            </p:style>
+            <p:txBody>
+              <a:bodyPr rtlCol="0" anchor="ctr"/>
+              <a:lstStyle/>
+              <a:p>
+                <a:pPr algn="ctr"/>
+                <a:r>
+                  <a:rPr lang="ko-KR" altLang="en-US" sz="1100" dirty="0"/>
+                  <a:t>내가 걸린 버프</a:t>
+                </a:r>
+                <a:r>
+                  <a:rPr lang="en-US" altLang="ko-KR" sz="1100" dirty="0"/>
+                  <a:t>, </a:t>
+                </a:r>
+                <a:r>
+                  <a:rPr lang="ko-KR" altLang="en-US" sz="1100" dirty="0" err="1"/>
+                  <a:t>디버프들</a:t>
+                </a:r>
+                <a:endParaRPr lang="ko-KR" altLang="en-US" sz="1100" dirty="0"/>
+              </a:p>
+            </p:txBody>
+          </p:sp>
+        </p:grpSp>
+        <p:pic>
+          <p:nvPicPr>
+            <p:cNvPr id="9" name="그림 8">
+              <a:extLst>
+                <a:ext uri="{FF2B5EF4-FFF2-40B4-BE49-F238E27FC236}">
+                  <a16:creationId xmlns:a16="http://schemas.microsoft.com/office/drawing/2014/main" id="{049AA4A6-49AB-4A7F-6F18-3AADF20ACE2C}"/>
+                </a:ext>
+              </a:extLst>
+            </p:cNvPr>
+            <p:cNvPicPr>
+              <a:picLocks noChangeAspect="1"/>
+            </p:cNvPicPr>
+            <p:nvPr/>
+          </p:nvPicPr>
+          <p:blipFill>
+            <a:blip r:embed="rId6"/>
+            <a:stretch>
+              <a:fillRect/>
+            </a:stretch>
+          </p:blipFill>
+          <p:spPr>
+            <a:xfrm>
+              <a:off x="4823372" y="2236946"/>
+              <a:ext cx="1473276" cy="1625684"/>
+            </a:xfrm>
+            <a:prstGeom prst="rect">
+              <a:avLst/>
+            </a:prstGeom>
+          </p:spPr>
+        </p:pic>
+        <p:sp>
+          <p:nvSpPr>
+            <p:cNvPr id="11" name="직사각형 10">
+              <a:extLst>
+                <a:ext uri="{FF2B5EF4-FFF2-40B4-BE49-F238E27FC236}">
+                  <a16:creationId xmlns:a16="http://schemas.microsoft.com/office/drawing/2014/main" id="{BE14074E-AFC0-79BC-9BE2-A698F6E8F169}"/>
+                </a:ext>
+              </a:extLst>
+            </p:cNvPr>
+            <p:cNvSpPr/>
+            <p:nvPr/>
+          </p:nvSpPr>
+          <p:spPr>
+            <a:xfrm>
+              <a:off x="6548396" y="2786742"/>
+              <a:ext cx="222519" cy="304524"/>
+            </a:xfrm>
+            <a:prstGeom prst="rect">
+              <a:avLst/>
+            </a:prstGeom>
+            <a:noFill/>
+          </p:spPr>
+          <p:style>
+            <a:lnRef idx="2">
+              <a:schemeClr val="accent2"/>
+            </a:lnRef>
+            <a:fillRef idx="1">
+              <a:schemeClr val="lt1"/>
+            </a:fillRef>
+            <a:effectRef idx="0">
+              <a:schemeClr val="accent2"/>
+            </a:effectRef>
+            <a:fontRef idx="minor">
+              <a:schemeClr val="dk1"/>
+            </a:fontRef>
+          </p:style>
+          <p:txBody>
+            <a:bodyPr rtlCol="0" anchor="ctr"/>
+            <a:lstStyle/>
+            <a:p>
+              <a:pPr algn="ctr"/>
+              <a:endParaRPr lang="ko-KR" altLang="en-US"/>
+            </a:p>
+          </p:txBody>
+        </p:sp>
+      </p:grpSp>
+    </p:spTree>
+    <p:extLst>
+      <p:ext uri="{BB962C8B-B14F-4D97-AF65-F5344CB8AC3E}">
+        <p14:creationId xmlns:p14="http://schemas.microsoft.com/office/powerpoint/2010/main" val="39498196"/>
+      </p:ext>
+    </p:extLst>
+  </p:cSld>
+  <p:clrMapOvr>
+    <a:masterClrMapping/>
+  </p:clrMapOvr>
+</p:sld>
+</file>
+
 <file path=ppt/slides/slide3.xml><?xml version="1.0" encoding="utf-8"?>
 <p:sld xmlns:a="http://schemas.openxmlformats.org/drawingml/2006/main" xmlns:r="http://schemas.openxmlformats.org/officeDocument/2006/relationships" xmlns:p="http://schemas.openxmlformats.org/presentationml/2006/main">
   <p:cSld>

--- a/docs/삼국 약식 체스.pptx
+++ b/docs/삼국 약식 체스.pptx
@@ -5,7 +5,7 @@
     <p:sldMasterId id="2147483648" r:id="rId1"/>
   </p:sldMasterIdLst>
   <p:notesMasterIdLst>
-    <p:notesMasterId r:id="rId27"/>
+    <p:notesMasterId r:id="rId29"/>
   </p:notesMasterIdLst>
   <p:sldIdLst>
     <p:sldId id="256" r:id="rId2"/>
@@ -33,6 +33,8 @@
     <p:sldId id="281" r:id="rId24"/>
     <p:sldId id="282" r:id="rId25"/>
     <p:sldId id="283" r:id="rId26"/>
+    <p:sldId id="284" r:id="rId27"/>
+    <p:sldId id="285" r:id="rId28"/>
   </p:sldIdLst>
   <p:sldSz cx="12192000" cy="6858000"/>
   <p:notesSz cx="6858000" cy="9144000"/>
@@ -21187,6 +21189,323 @@
 </p:sld>
 </file>
 
+<file path=ppt/slides/slide26.xml><?xml version="1.0" encoding="utf-8"?>
+<p:sld xmlns:a="http://schemas.openxmlformats.org/drawingml/2006/main" xmlns:r="http://schemas.openxmlformats.org/officeDocument/2006/relationships" xmlns:p="http://schemas.openxmlformats.org/presentationml/2006/main">
+  <p:cSld>
+    <p:spTree>
+      <p:nvGrpSpPr>
+        <p:cNvPr id="1" name="">
+          <a:extLst>
+            <a:ext uri="{FF2B5EF4-FFF2-40B4-BE49-F238E27FC236}">
+              <a16:creationId xmlns:a16="http://schemas.microsoft.com/office/drawing/2014/main" id="{8A90A534-D67B-4DCB-7498-ED90F50CD5F5}"/>
+            </a:ext>
+          </a:extLst>
+        </p:cNvPr>
+        <p:cNvGrpSpPr/>
+        <p:nvPr/>
+      </p:nvGrpSpPr>
+      <p:grpSpPr>
+        <a:xfrm>
+          <a:off x="0" y="0"/>
+          <a:ext cx="0" cy="0"/>
+          <a:chOff x="0" y="0"/>
+          <a:chExt cx="0" cy="0"/>
+        </a:xfrm>
+      </p:grpSpPr>
+      <p:sp>
+        <p:nvSpPr>
+          <p:cNvPr id="2" name="제목 1">
+            <a:extLst>
+              <a:ext uri="{FF2B5EF4-FFF2-40B4-BE49-F238E27FC236}">
+                <a16:creationId xmlns:a16="http://schemas.microsoft.com/office/drawing/2014/main" id="{0A553496-F811-2773-6997-250579946D74}"/>
+              </a:ext>
+            </a:extLst>
+          </p:cNvPr>
+          <p:cNvSpPr>
+            <a:spLocks noGrp="1"/>
+          </p:cNvSpPr>
+          <p:nvPr>
+            <p:ph type="ctrTitle"/>
+          </p:nvPr>
+        </p:nvSpPr>
+        <p:spPr>
+          <a:xfrm>
+            <a:off x="1524000" y="2235200"/>
+            <a:ext cx="9144000" cy="2387600"/>
+          </a:xfrm>
+        </p:spPr>
+        <p:txBody>
+          <a:bodyPr>
+            <a:normAutofit fontScale="90000"/>
+          </a:bodyPr>
+          <a:lstStyle/>
+          <a:p>
+            <a:r>
+              <a:rPr lang="en-US" altLang="ko-KR" dirty="0"/>
+              <a:t>UI update</a:t>
+            </a:r>
+            <a:br>
+              <a:rPr lang="en-US" altLang="ko-KR" dirty="0"/>
+            </a:br>
+            <a:br>
+              <a:rPr lang="en-US" altLang="ko-KR" dirty="0"/>
+            </a:br>
+            <a:r>
+              <a:rPr lang="en-US" altLang="ko-KR" dirty="0"/>
+              <a:t>260804-</a:t>
+            </a:r>
+            <a:endParaRPr lang="ko-KR" altLang="en-US" dirty="0"/>
+          </a:p>
+        </p:txBody>
+      </p:sp>
+    </p:spTree>
+    <p:extLst>
+      <p:ext uri="{BB962C8B-B14F-4D97-AF65-F5344CB8AC3E}">
+        <p14:creationId xmlns:p14="http://schemas.microsoft.com/office/powerpoint/2010/main" val="3309231062"/>
+      </p:ext>
+    </p:extLst>
+  </p:cSld>
+  <p:clrMapOvr>
+    <a:masterClrMapping/>
+  </p:clrMapOvr>
+</p:sld>
+</file>
+
+<file path=ppt/slides/slide27.xml><?xml version="1.0" encoding="utf-8"?>
+<p:sld xmlns:a="http://schemas.openxmlformats.org/drawingml/2006/main" xmlns:r="http://schemas.openxmlformats.org/officeDocument/2006/relationships" xmlns:p="http://schemas.openxmlformats.org/presentationml/2006/main">
+  <p:cSld>
+    <p:spTree>
+      <p:nvGrpSpPr>
+        <p:cNvPr id="1" name="">
+          <a:extLst>
+            <a:ext uri="{FF2B5EF4-FFF2-40B4-BE49-F238E27FC236}">
+              <a16:creationId xmlns:a16="http://schemas.microsoft.com/office/drawing/2014/main" id="{955C47BD-ADDD-7990-3B48-28F17E5C56F7}"/>
+            </a:ext>
+          </a:extLst>
+        </p:cNvPr>
+        <p:cNvGrpSpPr/>
+        <p:nvPr/>
+      </p:nvGrpSpPr>
+      <p:grpSpPr>
+        <a:xfrm>
+          <a:off x="0" y="0"/>
+          <a:ext cx="0" cy="0"/>
+          <a:chOff x="0" y="0"/>
+          <a:chExt cx="0" cy="0"/>
+        </a:xfrm>
+      </p:grpSpPr>
+      <p:sp>
+        <p:nvSpPr>
+          <p:cNvPr id="4" name="직사각형 3">
+            <a:extLst>
+              <a:ext uri="{FF2B5EF4-FFF2-40B4-BE49-F238E27FC236}">
+                <a16:creationId xmlns:a16="http://schemas.microsoft.com/office/drawing/2014/main" id="{A40CEA44-0B04-2D91-3F01-9DFD201B8C50}"/>
+              </a:ext>
+            </a:extLst>
+          </p:cNvPr>
+          <p:cNvSpPr/>
+          <p:nvPr/>
+        </p:nvSpPr>
+        <p:spPr>
+          <a:xfrm>
+            <a:off x="3904885" y="549000"/>
+            <a:ext cx="2880000" cy="5760000"/>
+          </a:xfrm>
+          <a:prstGeom prst="rect">
+            <a:avLst/>
+          </a:prstGeom>
+        </p:spPr>
+        <p:style>
+          <a:lnRef idx="2">
+            <a:schemeClr val="accent1">
+              <a:shade val="15000"/>
+            </a:schemeClr>
+          </a:lnRef>
+          <a:fillRef idx="1">
+            <a:schemeClr val="accent1"/>
+          </a:fillRef>
+          <a:effectRef idx="0">
+            <a:schemeClr val="accent1"/>
+          </a:effectRef>
+          <a:fontRef idx="minor">
+            <a:schemeClr val="lt1"/>
+          </a:fontRef>
+        </p:style>
+        <p:txBody>
+          <a:bodyPr rtlCol="0" anchor="ctr"/>
+          <a:lstStyle/>
+          <a:p>
+            <a:pPr algn="ctr"/>
+            <a:endParaRPr lang="ko-KR" altLang="en-US"/>
+          </a:p>
+        </p:txBody>
+      </p:sp>
+      <p:sp>
+        <p:nvSpPr>
+          <p:cNvPr id="11" name="TextBox 10">
+            <a:extLst>
+              <a:ext uri="{FF2B5EF4-FFF2-40B4-BE49-F238E27FC236}">
+                <a16:creationId xmlns:a16="http://schemas.microsoft.com/office/drawing/2014/main" id="{10CEEB95-A58A-C2C8-4D72-3188596020F9}"/>
+              </a:ext>
+            </a:extLst>
+          </p:cNvPr>
+          <p:cNvSpPr txBox="1"/>
+          <p:nvPr/>
+        </p:nvSpPr>
+        <p:spPr>
+          <a:xfrm>
+            <a:off x="404039" y="341501"/>
+            <a:ext cx="3242676" cy="2947282"/>
+          </a:xfrm>
+          <a:prstGeom prst="rect">
+            <a:avLst/>
+          </a:prstGeom>
+          <a:noFill/>
+        </p:spPr>
+        <p:txBody>
+          <a:bodyPr wrap="square" rtlCol="0">
+            <a:spAutoFit/>
+          </a:bodyPr>
+          <a:lstStyle/>
+          <a:p>
+            <a:pPr>
+              <a:lnSpc>
+                <a:spcPct val="150000"/>
+              </a:lnSpc>
+            </a:pPr>
+            <a:r>
+              <a:rPr lang="ko-KR" altLang="en-US" b="1" dirty="0"/>
+              <a:t>모바일 화면 기준</a:t>
+            </a:r>
+            <a:r>
+              <a:rPr lang="en-US" altLang="ko-KR" b="1" dirty="0"/>
+              <a:t>,</a:t>
+            </a:r>
+            <a:endParaRPr lang="en-US" altLang="ko-KR" dirty="0"/>
+          </a:p>
+          <a:p>
+            <a:pPr marL="285750" indent="-285750">
+              <a:lnSpc>
+                <a:spcPct val="150000"/>
+              </a:lnSpc>
+              <a:buFont typeface="Arial" panose="020B0604020202020204" pitchFamily="34" charset="0"/>
+              <a:buChar char="•"/>
+            </a:pPr>
+            <a:r>
+              <a:rPr lang="en-US" altLang="ko-KR" dirty="0"/>
+              <a:t>1 </a:t>
+            </a:r>
+            <a:r>
+              <a:rPr lang="ko-KR" altLang="en-US" dirty="0"/>
+              <a:t>도시 메인 화면</a:t>
+            </a:r>
+            <a:endParaRPr lang="en-US" altLang="ko-KR" dirty="0"/>
+          </a:p>
+          <a:p>
+            <a:pPr marL="285750" indent="-285750">
+              <a:lnSpc>
+                <a:spcPct val="150000"/>
+              </a:lnSpc>
+              <a:buFont typeface="Arial" panose="020B0604020202020204" pitchFamily="34" charset="0"/>
+              <a:buChar char="•"/>
+            </a:pPr>
+            <a:r>
+              <a:rPr lang="en-US" altLang="ko-KR" dirty="0"/>
+              <a:t>2 </a:t>
+            </a:r>
+            <a:r>
+              <a:rPr lang="ko-KR" altLang="en-US" dirty="0"/>
+              <a:t>장수 관리</a:t>
+            </a:r>
+            <a:endParaRPr lang="en-US" altLang="ko-KR" dirty="0"/>
+          </a:p>
+          <a:p>
+            <a:pPr marL="285750" indent="-285750">
+              <a:lnSpc>
+                <a:spcPct val="150000"/>
+              </a:lnSpc>
+              <a:buFont typeface="Arial" panose="020B0604020202020204" pitchFamily="34" charset="0"/>
+              <a:buChar char="•"/>
+            </a:pPr>
+            <a:r>
+              <a:rPr lang="en-US" altLang="ko-KR" dirty="0"/>
+              <a:t>3 </a:t>
+            </a:r>
+            <a:r>
+              <a:rPr lang="ko-KR" altLang="en-US" dirty="0"/>
+              <a:t>도시 관리</a:t>
+            </a:r>
+            <a:endParaRPr lang="en-US" altLang="ko-KR" dirty="0"/>
+          </a:p>
+          <a:p>
+            <a:pPr marL="285750" indent="-285750">
+              <a:lnSpc>
+                <a:spcPct val="150000"/>
+              </a:lnSpc>
+              <a:buFont typeface="Arial" panose="020B0604020202020204" pitchFamily="34" charset="0"/>
+              <a:buChar char="•"/>
+            </a:pPr>
+            <a:r>
+              <a:rPr lang="en-US" altLang="ko-KR" dirty="0"/>
+              <a:t>4 AI </a:t>
+            </a:r>
+            <a:r>
+              <a:rPr lang="ko-KR" altLang="en-US" dirty="0"/>
+              <a:t>대전</a:t>
+            </a:r>
+            <a:endParaRPr lang="en-US" altLang="ko-KR" dirty="0"/>
+          </a:p>
+          <a:p>
+            <a:pPr marL="285750" indent="-285750">
+              <a:lnSpc>
+                <a:spcPct val="150000"/>
+              </a:lnSpc>
+              <a:buFont typeface="Arial" panose="020B0604020202020204" pitchFamily="34" charset="0"/>
+              <a:buChar char="•"/>
+            </a:pPr>
+            <a:r>
+              <a:rPr lang="en-US" altLang="ko-KR" dirty="0"/>
+              <a:t>5 </a:t>
+            </a:r>
+            <a:r>
+              <a:rPr lang="ko-KR" altLang="en-US" dirty="0"/>
+              <a:t>온라인 전투</a:t>
+            </a:r>
+            <a:endParaRPr lang="en-US" altLang="ko-KR" dirty="0"/>
+          </a:p>
+          <a:p>
+            <a:pPr marL="285750" indent="-285750">
+              <a:lnSpc>
+                <a:spcPct val="150000"/>
+              </a:lnSpc>
+              <a:buFont typeface="Arial" panose="020B0604020202020204" pitchFamily="34" charset="0"/>
+              <a:buChar char="•"/>
+            </a:pPr>
+            <a:r>
+              <a:rPr lang="en-US" altLang="ko-KR" dirty="0"/>
+              <a:t>6</a:t>
+            </a:r>
+            <a:r>
+              <a:rPr lang="ko-KR" altLang="en-US" dirty="0"/>
+              <a:t> 환경 설정</a:t>
+            </a:r>
+            <a:endParaRPr lang="en-US" altLang="ko-KR" dirty="0"/>
+          </a:p>
+        </p:txBody>
+      </p:sp>
+    </p:spTree>
+    <p:extLst>
+      <p:ext uri="{BB962C8B-B14F-4D97-AF65-F5344CB8AC3E}">
+        <p14:creationId xmlns:p14="http://schemas.microsoft.com/office/powerpoint/2010/main" val="2776705907"/>
+      </p:ext>
+    </p:extLst>
+  </p:cSld>
+  <p:clrMapOvr>
+    <a:masterClrMapping/>
+  </p:clrMapOvr>
+</p:sld>
+</file>
+
 <file path=ppt/slides/slide3.xml><?xml version="1.0" encoding="utf-8"?>
 <p:sld xmlns:a="http://schemas.openxmlformats.org/drawingml/2006/main" xmlns:r="http://schemas.openxmlformats.org/officeDocument/2006/relationships" xmlns:p="http://schemas.openxmlformats.org/presentationml/2006/main">
   <p:cSld>

--- a/docs/삼국 약식 체스.pptx
+++ b/docs/삼국 약식 체스.pptx
@@ -5,7 +5,7 @@
     <p:sldMasterId id="2147483648" r:id="rId1"/>
   </p:sldMasterIdLst>
   <p:notesMasterIdLst>
-    <p:notesMasterId r:id="rId33"/>
+    <p:notesMasterId r:id="rId34"/>
   </p:notesMasterIdLst>
   <p:sldIdLst>
     <p:sldId id="256" r:id="rId2"/>
@@ -39,6 +39,7 @@
     <p:sldId id="291" r:id="rId30"/>
     <p:sldId id="288" r:id="rId31"/>
     <p:sldId id="285" r:id="rId32"/>
+    <p:sldId id="292" r:id="rId33"/>
   </p:sldIdLst>
   <p:sldSz cx="12192000" cy="6858000"/>
   <p:notesSz cx="6858000" cy="9144000"/>
@@ -227,7 +228,7 @@
           <a:p>
             <a:fld id="{B4F07136-05B9-4084-83BF-56E9BCCDA6F9}" type="datetimeFigureOut">
               <a:rPr lang="ko-KR" altLang="en-US" smtClean="0"/>
-              <a:t>2026-08-12</a:t>
+              <a:t>2026-08-13</a:t>
             </a:fld>
             <a:endParaRPr lang="ko-KR" altLang="en-US"/>
           </a:p>
@@ -1265,7 +1266,7 @@
           <a:p>
             <a:fld id="{7612FBA5-57BE-4E0D-B9AB-8FA0886BAC02}" type="datetimeFigureOut">
               <a:rPr lang="ko-KR" altLang="en-US" smtClean="0"/>
-              <a:t>2026-08-12</a:t>
+              <a:t>2026-08-13</a:t>
             </a:fld>
             <a:endParaRPr lang="ko-KR" altLang="en-US"/>
           </a:p>
@@ -1463,7 +1464,7 @@
           <a:p>
             <a:fld id="{7612FBA5-57BE-4E0D-B9AB-8FA0886BAC02}" type="datetimeFigureOut">
               <a:rPr lang="ko-KR" altLang="en-US" smtClean="0"/>
-              <a:t>2026-08-12</a:t>
+              <a:t>2026-08-13</a:t>
             </a:fld>
             <a:endParaRPr lang="ko-KR" altLang="en-US"/>
           </a:p>
@@ -1671,7 +1672,7 @@
           <a:p>
             <a:fld id="{7612FBA5-57BE-4E0D-B9AB-8FA0886BAC02}" type="datetimeFigureOut">
               <a:rPr lang="ko-KR" altLang="en-US" smtClean="0"/>
-              <a:t>2026-08-12</a:t>
+              <a:t>2026-08-13</a:t>
             </a:fld>
             <a:endParaRPr lang="ko-KR" altLang="en-US"/>
           </a:p>
@@ -1869,7 +1870,7 @@
           <a:p>
             <a:fld id="{7612FBA5-57BE-4E0D-B9AB-8FA0886BAC02}" type="datetimeFigureOut">
               <a:rPr lang="ko-KR" altLang="en-US" smtClean="0"/>
-              <a:t>2026-08-12</a:t>
+              <a:t>2026-08-13</a:t>
             </a:fld>
             <a:endParaRPr lang="ko-KR" altLang="en-US"/>
           </a:p>
@@ -2144,7 +2145,7 @@
           <a:p>
             <a:fld id="{7612FBA5-57BE-4E0D-B9AB-8FA0886BAC02}" type="datetimeFigureOut">
               <a:rPr lang="ko-KR" altLang="en-US" smtClean="0"/>
-              <a:t>2026-08-12</a:t>
+              <a:t>2026-08-13</a:t>
             </a:fld>
             <a:endParaRPr lang="ko-KR" altLang="en-US"/>
           </a:p>
@@ -2409,7 +2410,7 @@
           <a:p>
             <a:fld id="{7612FBA5-57BE-4E0D-B9AB-8FA0886BAC02}" type="datetimeFigureOut">
               <a:rPr lang="ko-KR" altLang="en-US" smtClean="0"/>
-              <a:t>2026-08-12</a:t>
+              <a:t>2026-08-13</a:t>
             </a:fld>
             <a:endParaRPr lang="ko-KR" altLang="en-US"/>
           </a:p>
@@ -2821,7 +2822,7 @@
           <a:p>
             <a:fld id="{7612FBA5-57BE-4E0D-B9AB-8FA0886BAC02}" type="datetimeFigureOut">
               <a:rPr lang="ko-KR" altLang="en-US" smtClean="0"/>
-              <a:t>2026-08-12</a:t>
+              <a:t>2026-08-13</a:t>
             </a:fld>
             <a:endParaRPr lang="ko-KR" altLang="en-US"/>
           </a:p>
@@ -2962,7 +2963,7 @@
           <a:p>
             <a:fld id="{7612FBA5-57BE-4E0D-B9AB-8FA0886BAC02}" type="datetimeFigureOut">
               <a:rPr lang="ko-KR" altLang="en-US" smtClean="0"/>
-              <a:t>2026-08-12</a:t>
+              <a:t>2026-08-13</a:t>
             </a:fld>
             <a:endParaRPr lang="ko-KR" altLang="en-US"/>
           </a:p>
@@ -3075,7 +3076,7 @@
           <a:p>
             <a:fld id="{7612FBA5-57BE-4E0D-B9AB-8FA0886BAC02}" type="datetimeFigureOut">
               <a:rPr lang="ko-KR" altLang="en-US" smtClean="0"/>
-              <a:t>2026-08-12</a:t>
+              <a:t>2026-08-13</a:t>
             </a:fld>
             <a:endParaRPr lang="ko-KR" altLang="en-US"/>
           </a:p>
@@ -3386,7 +3387,7 @@
           <a:p>
             <a:fld id="{7612FBA5-57BE-4E0D-B9AB-8FA0886BAC02}" type="datetimeFigureOut">
               <a:rPr lang="ko-KR" altLang="en-US" smtClean="0"/>
-              <a:t>2026-08-12</a:t>
+              <a:t>2026-08-13</a:t>
             </a:fld>
             <a:endParaRPr lang="ko-KR" altLang="en-US"/>
           </a:p>
@@ -3674,7 +3675,7 @@
           <a:p>
             <a:fld id="{7612FBA5-57BE-4E0D-B9AB-8FA0886BAC02}" type="datetimeFigureOut">
               <a:rPr lang="ko-KR" altLang="en-US" smtClean="0"/>
-              <a:t>2026-08-12</a:t>
+              <a:t>2026-08-13</a:t>
             </a:fld>
             <a:endParaRPr lang="ko-KR" altLang="en-US"/>
           </a:p>
@@ -3915,7 +3916,7 @@
           <a:p>
             <a:fld id="{7612FBA5-57BE-4E0D-B9AB-8FA0886BAC02}" type="datetimeFigureOut">
               <a:rPr lang="ko-KR" altLang="en-US" smtClean="0"/>
-              <a:t>2026-08-12</a:t>
+              <a:t>2026-08-13</a:t>
             </a:fld>
             <a:endParaRPr lang="ko-KR" altLang="en-US"/>
           </a:p>
@@ -44735,6 +44736,36 @@
 </p:sld>
 </file>
 
+<file path=ppt/slides/slide32.xml><?xml version="1.0" encoding="utf-8"?>
+<p:sld xmlns:a="http://schemas.openxmlformats.org/drawingml/2006/main" xmlns:r="http://schemas.openxmlformats.org/officeDocument/2006/relationships" xmlns:p="http://schemas.openxmlformats.org/presentationml/2006/main">
+  <p:cSld>
+    <p:spTree>
+      <p:nvGrpSpPr>
+        <p:cNvPr id="1" name=""/>
+        <p:cNvGrpSpPr/>
+        <p:nvPr/>
+      </p:nvGrpSpPr>
+      <p:grpSpPr>
+        <a:xfrm>
+          <a:off x="0" y="0"/>
+          <a:ext cx="0" cy="0"/>
+          <a:chOff x="0" y="0"/>
+          <a:chExt cx="0" cy="0"/>
+        </a:xfrm>
+      </p:grpSpPr>
+    </p:spTree>
+    <p:extLst>
+      <p:ext uri="{BB962C8B-B14F-4D97-AF65-F5344CB8AC3E}">
+        <p14:creationId xmlns:p14="http://schemas.microsoft.com/office/powerpoint/2010/main" val="3809021131"/>
+      </p:ext>
+    </p:extLst>
+  </p:cSld>
+  <p:clrMapOvr>
+    <a:masterClrMapping/>
+  </p:clrMapOvr>
+</p:sld>
+</file>
+
 <file path=ppt/slides/slide4.xml><?xml version="1.0" encoding="utf-8"?>
 <p:sld xmlns:a="http://schemas.openxmlformats.org/drawingml/2006/main" xmlns:r="http://schemas.openxmlformats.org/officeDocument/2006/relationships" xmlns:p="http://schemas.openxmlformats.org/presentationml/2006/main">
   <p:cSld>
